--- a/docs/vinss-deck.pptx
+++ b/docs/vinss-deck.pptx
@@ -2,20 +2,22 @@
 <file path=ppt/presentation.xml><?xml version="1.0" encoding="utf-8"?>
 <p:presentation xmlns:p="http://schemas.openxmlformats.org/presentationml/2006/main">
   <p:sldMasterIdLst>
-    <p:sldMasterId xmlns:r="http://schemas.openxmlformats.org/officeDocument/2006/relationships" id="2147483648" r:id="Refce4d78b28c4222"/>
+    <p:sldMasterId xmlns:r="http://schemas.openxmlformats.org/officeDocument/2006/relationships" id="2147483648" r:id="R6753a2f96e884498"/>
   </p:sldMasterIdLst>
   <p:notesMasterIdLst>
-    <p:notesMasterId xmlns:r="http://schemas.openxmlformats.org/officeDocument/2006/relationships" r:id="Rb66621df775a46e2"/>
+    <p:notesMasterId xmlns:r="http://schemas.openxmlformats.org/officeDocument/2006/relationships" r:id="R24d3da7706854662"/>
   </p:notesMasterIdLst>
   <p:sldIdLst>
-    <p:sldId xmlns:r="http://schemas.openxmlformats.org/officeDocument/2006/relationships" id="256" r:id="R85bd0d855d544c35"/>
-    <p:sldId xmlns:r="http://schemas.openxmlformats.org/officeDocument/2006/relationships" id="257" r:id="R08ead7ba11ac40d9"/>
-    <p:sldId xmlns:r="http://schemas.openxmlformats.org/officeDocument/2006/relationships" id="258" r:id="R2ae5dad0c47d402b"/>
-    <p:sldId xmlns:r="http://schemas.openxmlformats.org/officeDocument/2006/relationships" id="259" r:id="Ra0863eb3b16344e8"/>
-    <p:sldId xmlns:r="http://schemas.openxmlformats.org/officeDocument/2006/relationships" id="260" r:id="R6f33d70bbe7c463c"/>
-    <p:sldId xmlns:r="http://schemas.openxmlformats.org/officeDocument/2006/relationships" id="261" r:id="Re76e3d0efc3b4415"/>
-    <p:sldId xmlns:r="http://schemas.openxmlformats.org/officeDocument/2006/relationships" id="262" r:id="R55a6253912d44c48"/>
-    <p:sldId xmlns:r="http://schemas.openxmlformats.org/officeDocument/2006/relationships" id="263" r:id="Rf4cb9f2b555841f2"/>
+    <p:sldId xmlns:r="http://schemas.openxmlformats.org/officeDocument/2006/relationships" id="256" r:id="R9cf20b0d4d894743"/>
+    <p:sldId xmlns:r="http://schemas.openxmlformats.org/officeDocument/2006/relationships" id="257" r:id="R0228ca07cb454581"/>
+    <p:sldId xmlns:r="http://schemas.openxmlformats.org/officeDocument/2006/relationships" id="258" r:id="R1e874937724a4221"/>
+    <p:sldId xmlns:r="http://schemas.openxmlformats.org/officeDocument/2006/relationships" id="259" r:id="R5365be0f35cd45c6"/>
+    <p:sldId xmlns:r="http://schemas.openxmlformats.org/officeDocument/2006/relationships" id="260" r:id="Rc3b85e2fe8e0474d"/>
+    <p:sldId xmlns:r="http://schemas.openxmlformats.org/officeDocument/2006/relationships" id="261" r:id="Rcf12ed350e6d4ca3"/>
+    <p:sldId xmlns:r="http://schemas.openxmlformats.org/officeDocument/2006/relationships" id="262" r:id="Ra376cf0ac72d4e9a"/>
+    <p:sldId xmlns:r="http://schemas.openxmlformats.org/officeDocument/2006/relationships" id="263" r:id="R85e9d2ce677a440d"/>
+    <p:sldId xmlns:r="http://schemas.openxmlformats.org/officeDocument/2006/relationships" id="264" r:id="R105397ac684c4ce8"/>
+    <p:sldId xmlns:r="http://schemas.openxmlformats.org/officeDocument/2006/relationships" id="265" r:id="R1b2f5ffcab5c43ab"/>
   </p:sldIdLst>
   <p:sldSz cx="12192000" cy="6858000"/>
   <p:notesSz cx="6858000" cy="9144000"/>
@@ -449,17 +451,107 @@
           <a:lstStyle xmlns:a="http://schemas.openxmlformats.org/drawingml/2006/main"/>
           <a:p xmlns:a="http://schemas.openxmlformats.org/drawingml/2006/main">
             <a:r>
-              <a:t>VINSS source revision: 07f45ae95f7b6eebddc176892e8756fc1b841571</a:t>
-            </a:r>
-          </a:p>
-          <a:p xmlns:a="http://schemas.openxmlformats.org/drawingml/2006/main">
-            <a:r>
-              <a:t>Sources: README.md; docs/BUSINESS_BRIEF.md</a:t>
-            </a:r>
-          </a:p>
-          <a:p xmlns:a="http://schemas.openxmlformats.org/drawingml/2006/main">
-            <a:r>
-              <a:t>Current business plans are hypotheses. Local real-WASM messaging verification uses simulated ledger/wallet access. Earlier DevNet settlement is separate evidence.</a:t>
+              <a:t>Source revision: 661aacc80e207cf8f9cddf7bb571e59feaaf41a6</a:t>
+            </a:r>
+          </a:p>
+          <a:p xmlns:a="http://schemas.openxmlformats.org/drawingml/2006/main">
+            <a:r>
+              <a:t>https://github.com/ntfound-dev/Vinss-canton/blob/661aacc80e207cf8f9cddf7bb571e59feaaf41a6/README.md</a:t>
+            </a:r>
+          </a:p>
+          <a:p xmlns:a="http://schemas.openxmlformats.org/drawingml/2006/main">
+            <a:r>
+              <a:t>https://github.com/ntfound-dev/Vinss-canton/blob/661aacc80e207cf8f9cddf7bb571e59feaaf41a6/docs/BUSINESS_BRIEF.md</a:t>
+            </a:r>
+          </a:p>
+          <a:p xmlns:a="http://schemas.openxmlformats.org/drawingml/2006/main">
+            <a:r>
+              <a:t>HackCanton League Season 3</a:t>
+            </a:r>
+          </a:p>
+        </p:txBody>
+      </p:sp>
+      <p:sp>
+        <p:nvSpPr>
+          <p:cNvPr id="4" name="Slide Number Placeholder 3"/>
+          <p:cNvSpPr>
+            <a:spLocks xmlns:a="http://schemas.openxmlformats.org/drawingml/2006/main" noGrp="1"/>
+          </p:cNvSpPr>
+          <p:nvPr>
+            <p:ph type="sldNum" idx="5"/>
+          </p:nvPr>
+        </p:nvSpPr>
+        <p:spPr/>
+        <p:txBody>
+          <a:bodyPr xmlns:a="http://schemas.openxmlformats.org/drawingml/2006/main"/>
+          <a:lstStyle xmlns:a="http://schemas.openxmlformats.org/drawingml/2006/main"/>
+          <a:p xmlns:a="http://schemas.openxmlformats.org/drawingml/2006/main"/>
+        </p:txBody>
+      </p:sp>
+    </p:spTree>
+  </p:cSld>
+  <p:clrMapOvr>
+    <a:masterClrMapping xmlns:a="http://schemas.openxmlformats.org/drawingml/2006/main"/>
+  </p:clrMapOvr>
+</p:notes>
+</file>
+
+<file path=ppt/notesSlides/notesSlide10.xml><?xml version="1.0" encoding="utf-8"?>
+<p:notes xmlns:p="http://schemas.openxmlformats.org/presentationml/2006/main">
+  <p:cSld>
+    <p:spTree>
+      <p:nvGrpSpPr>
+        <p:cNvPr id="1" name=""/>
+        <p:cNvGrpSpPr/>
+        <p:nvPr/>
+      </p:nvGrpSpPr>
+      <p:grpSpPr>
+        <a:xfrm xmlns:a="http://schemas.openxmlformats.org/drawingml/2006/main"/>
+      </p:grpSpPr>
+      <p:sp>
+        <p:nvSpPr>
+          <p:cNvPr id="2" name="Slide Image Placeholder 1"/>
+          <p:cNvSpPr>
+            <a:spLocks xmlns:a="http://schemas.openxmlformats.org/drawingml/2006/main" noGrp="1"/>
+          </p:cNvSpPr>
+          <p:nvPr>
+            <p:ph type="sldImg" idx="0"/>
+          </p:nvPr>
+        </p:nvSpPr>
+        <p:spPr/>
+      </p:sp>
+      <p:sp>
+        <p:nvSpPr>
+          <p:cNvPr id="3" name="Notes Placeholder 2"/>
+          <p:cNvSpPr>
+            <a:spLocks xmlns:a="http://schemas.openxmlformats.org/drawingml/2006/main" noGrp="1"/>
+          </p:cNvSpPr>
+          <p:nvPr>
+            <p:ph type="body" idx="1"/>
+          </p:nvPr>
+        </p:nvSpPr>
+        <p:spPr/>
+        <p:txBody>
+          <a:bodyPr xmlns:a="http://schemas.openxmlformats.org/drawingml/2006/main"/>
+          <a:lstStyle xmlns:a="http://schemas.openxmlformats.org/drawingml/2006/main"/>
+          <a:p xmlns:a="http://schemas.openxmlformats.org/drawingml/2006/main">
+            <a:r>
+              <a:t>Source revision: 661aacc80e207cf8f9cddf7bb571e59feaaf41a6</a:t>
+            </a:r>
+          </a:p>
+          <a:p xmlns:a="http://schemas.openxmlformats.org/drawingml/2006/main">
+            <a:r>
+              <a:t>https://github.com/ntfound-dev/Vinss-canton/blob/661aacc80e207cf8f9cddf7bb571e59feaaf41a6/docs/PILOT_PLAN.md</a:t>
+            </a:r>
+          </a:p>
+          <a:p xmlns:a="http://schemas.openxmlformats.org/drawingml/2006/main">
+            <a:r>
+              <a:t>https://github.com/ntfound-dev/Vinss-canton/blob/661aacc80e207cf8f9cddf7bb571e59feaaf41a6/docs/SUBMISSION.md</a:t>
+            </a:r>
+          </a:p>
+          <a:p xmlns:a="http://schemas.openxmlformats.org/drawingml/2006/main">
+            <a:r>
+              <a:t>Next product decisions: recovery, dispute/refund handling, self-service listings and VIP. Multichain follows Canton.</a:t>
             </a:r>
           </a:p>
         </p:txBody>
@@ -529,17 +621,17 @@
           <a:lstStyle xmlns:a="http://schemas.openxmlformats.org/drawingml/2006/main"/>
           <a:p xmlns:a="http://schemas.openxmlformats.org/drawingml/2006/main">
             <a:r>
-              <a:t>VINSS source revision: 07f45ae95f7b6eebddc176892e8756fc1b841571</a:t>
-            </a:r>
-          </a:p>
-          <a:p xmlns:a="http://schemas.openxmlformats.org/drawingml/2006/main">
-            <a:r>
-              <a:t>Sources: docs/VALUE_STATEMENT.md; docs/ICP_AUDIENCE.md</a:t>
-            </a:r>
-          </a:p>
-          <a:p xmlns:a="http://schemas.openxmlformats.org/drawingml/2006/main">
-            <a:r>
-              <a:t>Current business plans are hypotheses. Local real-WASM messaging verification uses simulated ledger/wallet access. Earlier DevNet settlement is separate evidence.</a:t>
+              <a:t>Source revision: 661aacc80e207cf8f9cddf7bb571e59feaaf41a6</a:t>
+            </a:r>
+          </a:p>
+          <a:p xmlns:a="http://schemas.openxmlformats.org/drawingml/2006/main">
+            <a:r>
+              <a:t>https://github.com/ntfound-dev/Vinss-canton/blob/661aacc80e207cf8f9cddf7bb571e59feaaf41a6/docs/VALUE_STATEMENT.md</a:t>
+            </a:r>
+          </a:p>
+          <a:p xmlns:a="http://schemas.openxmlformats.org/drawingml/2006/main">
+            <a:r>
+              <a:t>Initial use case: one client and one freelancer completing a defined digital task.</a:t>
             </a:r>
           </a:p>
         </p:txBody>
@@ -609,17 +701,22 @@
           <a:lstStyle xmlns:a="http://schemas.openxmlformats.org/drawingml/2006/main"/>
           <a:p xmlns:a="http://schemas.openxmlformats.org/drawingml/2006/main">
             <a:r>
-              <a:t>VINSS source revision: 07f45ae95f7b6eebddc176892e8756fc1b841571</a:t>
-            </a:r>
-          </a:p>
-          <a:p xmlns:a="http://schemas.openxmlformats.org/drawingml/2006/main">
-            <a:r>
-              <a:t>Sources: frontend/lib/canton-invite.ts; frontend/lib/canton-room-runtime.ts; daml/Vinss/Deal.daml</a:t>
-            </a:r>
-          </a:p>
-          <a:p xmlns:a="http://schemas.openxmlformats.org/drawingml/2006/main">
-            <a:r>
-              <a:t>Current business plans are hypotheses. Local real-WASM messaging verification uses simulated ledger/wallet access. Earlier DevNet settlement is separate evidence.</a:t>
+              <a:t>Source revision: 661aacc80e207cf8f9cddf7bb571e59feaaf41a6</a:t>
+            </a:r>
+          </a:p>
+          <a:p xmlns:a="http://schemas.openxmlformats.org/drawingml/2006/main">
+            <a:r>
+              <a:t>https://github.com/ntfound-dev/Vinss-canton/blob/661aacc80e207cf8f9cddf7bb571e59feaaf41a6/docs/ESCROW.md</a:t>
+            </a:r>
+          </a:p>
+          <a:p xmlns:a="http://schemas.openxmlformats.org/drawingml/2006/main">
+            <a:r>
+              <a:t>https://github.com/ntfound-dev/Vinss-canton/blob/661aacc80e207cf8f9cddf7bb571e59feaaf41a6/frontend/lib/canton-room-runtime.ts</a:t>
+            </a:r>
+          </a:p>
+          <a:p xmlns:a="http://schemas.openxmlformats.org/drawingml/2006/main">
+            <a:r>
+              <a:t>Encrypted group chat supports team discussion. Escrow currently uses two-person rooms.</a:t>
             </a:r>
           </a:p>
         </p:txBody>
@@ -689,17 +786,22 @@
           <a:lstStyle xmlns:a="http://schemas.openxmlformats.org/drawingml/2006/main"/>
           <a:p xmlns:a="http://schemas.openxmlformats.org/drawingml/2006/main">
             <a:r>
-              <a:t>VINSS source revision: 07f45ae95f7b6eebddc176892e8756fc1b841571</a:t>
-            </a:r>
-          </a:p>
-          <a:p xmlns:a="http://schemas.openxmlformats.org/drawingml/2006/main">
-            <a:r>
-              <a:t>Sources: docs/ARCHITECTURE.md; daml/Vinss/Messaging.daml; daml/Vinss/Deal.daml</a:t>
-            </a:r>
-          </a:p>
-          <a:p xmlns:a="http://schemas.openxmlformats.org/drawingml/2006/main">
-            <a:r>
-              <a:t>Current business plans are hypotheses. Local real-WASM messaging verification uses simulated ledger/wallet access. Earlier DevNet settlement is separate evidence.</a:t>
+              <a:t>Source revision: 661aacc80e207cf8f9cddf7bb571e59feaaf41a6</a:t>
+            </a:r>
+          </a:p>
+          <a:p xmlns:a="http://schemas.openxmlformats.org/drawingml/2006/main">
+            <a:r>
+              <a:t>https://github.com/ntfound-dev/Vinss-canton/blob/661aacc80e207cf8f9cddf7bb571e59feaaf41a6/docs/ESCROW.md</a:t>
+            </a:r>
+          </a:p>
+          <a:p xmlns:a="http://schemas.openxmlformats.org/drawingml/2006/main">
+            <a:r>
+              <a:t>https://github.com/ntfound-dev/Vinss-canton/blob/661aacc80e207cf8f9cddf7bb571e59feaaf41a6/daml/Vinss/Deal.daml</a:t>
+            </a:r>
+          </a:p>
+          <a:p xmlns:a="http://schemas.openxmlformats.org/drawingml/2006/main">
+            <a:r>
+              <a:t>VINSS references the allocation. The current module has no dispute or refund choice.</a:t>
             </a:r>
           </a:p>
         </p:txBody>
@@ -769,17 +871,22 @@
           <a:lstStyle xmlns:a="http://schemas.openxmlformats.org/drawingml/2006/main"/>
           <a:p xmlns:a="http://schemas.openxmlformats.org/drawingml/2006/main">
             <a:r>
-              <a:t>VINSS source revision: 07f45ae95f7b6eebddc176892e8756fc1b841571</a:t>
-            </a:r>
-          </a:p>
-          <a:p xmlns:a="http://schemas.openxmlformats.org/drawingml/2006/main">
-            <a:r>
-              <a:t>Sources: docs/CANTON_DEVNET_E2E.md#verified-devnet-run-evidence; docs/MESSAGING_E2E.md; tests/integration/messaging-scenario.mjs</a:t>
-            </a:r>
-          </a:p>
-          <a:p xmlns:a="http://schemas.openxmlformats.org/drawingml/2006/main">
-            <a:r>
-              <a:t>Current business plans are hypotheses. Local real-WASM messaging verification uses simulated ledger/wallet access. Earlier DevNet settlement is separate evidence.</a:t>
+              <a:t>Source revision: 661aacc80e207cf8f9cddf7bb571e59feaaf41a6</a:t>
+            </a:r>
+          </a:p>
+          <a:p xmlns:a="http://schemas.openxmlformats.org/drawingml/2006/main">
+            <a:r>
+              <a:t>https://github.com/ntfound-dev/Vinss-canton/blob/661aacc80e207cf8f9cddf7bb571e59feaaf41a6/docs/ARCHITECTURE.md</a:t>
+            </a:r>
+          </a:p>
+          <a:p xmlns:a="http://schemas.openxmlformats.org/drawingml/2006/main">
+            <a:r>
+              <a:t>https://github.com/ntfound-dev/Vinss-canton/blob/661aacc80e207cf8f9cddf7bb571e59feaaf41a6/docs/TECHNICAL_OVERVIEW.md</a:t>
+            </a:r>
+          </a:p>
+          <a:p xmlns:a="http://schemas.openxmlformats.org/drawingml/2006/main">
+            <a:r>
+              <a:t>Authorized ledger viewers can see deal metadata, including amounts and Parties.</a:t>
             </a:r>
           </a:p>
         </p:txBody>
@@ -849,17 +956,22 @@
           <a:lstStyle xmlns:a="http://schemas.openxmlformats.org/drawingml/2006/main"/>
           <a:p xmlns:a="http://schemas.openxmlformats.org/drawingml/2006/main">
             <a:r>
-              <a:t>VINSS source revision: 07f45ae95f7b6eebddc176892e8756fc1b841571</a:t>
-            </a:r>
-          </a:p>
-          <a:p xmlns:a="http://schemas.openxmlformats.org/drawingml/2006/main">
-            <a:r>
-              <a:t>Sources: docs/ICP_AUDIENCE.md; docs/PILOT_PLAN.md</a:t>
-            </a:r>
-          </a:p>
-          <a:p xmlns:a="http://schemas.openxmlformats.org/drawingml/2006/main">
-            <a:r>
-              <a:t>Current business plans are hypotheses. Local real-WASM messaging verification uses simulated ledger/wallet access. Earlier DevNet settlement is separate evidence.</a:t>
+              <a:t>Source revision: 661aacc80e207cf8f9cddf7bb571e59feaaf41a6</a:t>
+            </a:r>
+          </a:p>
+          <a:p xmlns:a="http://schemas.openxmlformats.org/drawingml/2006/main">
+            <a:r>
+              <a:t>https://github.com/ntfound-dev/Vinss-canton/blob/661aacc80e207cf8f9cddf7bb571e59feaaf41a6/docs/CANTON_DEVNET_E2E.md#verified-devnet-run-evidence</a:t>
+            </a:r>
+          </a:p>
+          <a:p xmlns:a="http://schemas.openxmlformats.org/drawingml/2006/main">
+            <a:r>
+              <a:t>https://github.com/ntfound-dev/Vinss-canton/blob/661aacc80e207cf8f9cddf7bb571e59feaaf41a6/docs/MESSAGING_E2E.md</a:t>
+            </a:r>
+          </a:p>
+          <a:p xmlns:a="http://schemas.openxmlformats.org/drawingml/2006/main">
+            <a:r>
+              <a:t>The updated browser-wallet messaging flow still needs a fresh live recording.</a:t>
             </a:r>
           </a:p>
         </p:txBody>
@@ -929,17 +1041,22 @@
           <a:lstStyle xmlns:a="http://schemas.openxmlformats.org/drawingml/2006/main"/>
           <a:p xmlns:a="http://schemas.openxmlformats.org/drawingml/2006/main">
             <a:r>
-              <a:t>VINSS source revision: 07f45ae95f7b6eebddc176892e8756fc1b841571</a:t>
-            </a:r>
-          </a:p>
-          <a:p xmlns:a="http://schemas.openxmlformats.org/drawingml/2006/main">
-            <a:r>
-              <a:t>Sources: docs/GTM.md; docs/BUSINESS_BRIEF.md; frontend/app/rewards/page.tsx</a:t>
-            </a:r>
-          </a:p>
-          <a:p xmlns:a="http://schemas.openxmlformats.org/drawingml/2006/main">
-            <a:r>
-              <a:t>Current business plans are hypotheses. Local real-WASM messaging verification uses simulated ledger/wallet access. Earlier DevNet settlement is separate evidence.</a:t>
+              <a:t>Source revision: 661aacc80e207cf8f9cddf7bb571e59feaaf41a6</a:t>
+            </a:r>
+          </a:p>
+          <a:p xmlns:a="http://schemas.openxmlformats.org/drawingml/2006/main">
+            <a:r>
+              <a:t>https://github.com/ntfound-dev/Vinss-canton/blob/661aacc80e207cf8f9cddf7bb571e59feaaf41a6/docs/ICP_AUDIENCE.md</a:t>
+            </a:r>
+          </a:p>
+          <a:p xmlns:a="http://schemas.openxmlformats.org/drawingml/2006/main">
+            <a:r>
+              <a:t>https://github.com/ntfound-dev/Vinss-canton/blob/661aacc80e207cf8f9cddf7bb571e59feaaf41a6/docs/PILOT_PLAN.md</a:t>
+            </a:r>
+          </a:p>
+          <a:p xmlns:a="http://schemas.openxmlformats.org/drawingml/2006/main">
+            <a:r>
+              <a:t>Proposed audience and pilot. Customer demand and retention are not yet measured.</a:t>
             </a:r>
           </a:p>
         </p:txBody>
@@ -1009,17 +1126,107 @@
           <a:lstStyle xmlns:a="http://schemas.openxmlformats.org/drawingml/2006/main"/>
           <a:p xmlns:a="http://schemas.openxmlformats.org/drawingml/2006/main">
             <a:r>
-              <a:t>VINSS source revision: 07f45ae95f7b6eebddc176892e8756fc1b841571</a:t>
-            </a:r>
-          </a:p>
-          <a:p xmlns:a="http://schemas.openxmlformats.org/drawingml/2006/main">
-            <a:r>
-              <a:t>Sources: docs/PILOT_PLAN.md; docs/SUBMISSION.md</a:t>
-            </a:r>
-          </a:p>
-          <a:p xmlns:a="http://schemas.openxmlformats.org/drawingml/2006/main">
-            <a:r>
-              <a:t>Current business plans are hypotheses. Local real-WASM messaging verification uses simulated ledger/wallet access. Earlier DevNet settlement is separate evidence.</a:t>
+              <a:t>Source revision: 661aacc80e207cf8f9cddf7bb571e59feaaf41a6</a:t>
+            </a:r>
+          </a:p>
+          <a:p xmlns:a="http://schemas.openxmlformats.org/drawingml/2006/main">
+            <a:r>
+              <a:t>https://github.com/ntfound-dev/Vinss-canton/blob/661aacc80e207cf8f9cddf7bb571e59feaaf41a6/docs/GTM.md</a:t>
+            </a:r>
+          </a:p>
+          <a:p xmlns:a="http://schemas.openxmlformats.org/drawingml/2006/main">
+            <a:r>
+              <a:t>https://github.com/ntfound-dev/Vinss-canton/blob/661aacc80e207cf8f9cddf7bb571e59feaaf41a6/frontend/app/rewards/page.tsx</a:t>
+            </a:r>
+          </a:p>
+          <a:p xmlns:a="http://schemas.openxmlformats.org/drawingml/2006/main">
+            <a:r>
+              <a:t>VIP billing and Points issuance are pending. Private chat and escrow are core features.</a:t>
+            </a:r>
+          </a:p>
+        </p:txBody>
+      </p:sp>
+      <p:sp>
+        <p:nvSpPr>
+          <p:cNvPr id="4" name="Slide Number Placeholder 3"/>
+          <p:cNvSpPr>
+            <a:spLocks xmlns:a="http://schemas.openxmlformats.org/drawingml/2006/main" noGrp="1"/>
+          </p:cNvSpPr>
+          <p:nvPr>
+            <p:ph type="sldNum" idx="5"/>
+          </p:nvPr>
+        </p:nvSpPr>
+        <p:spPr/>
+        <p:txBody>
+          <a:bodyPr xmlns:a="http://schemas.openxmlformats.org/drawingml/2006/main"/>
+          <a:lstStyle xmlns:a="http://schemas.openxmlformats.org/drawingml/2006/main"/>
+          <a:p xmlns:a="http://schemas.openxmlformats.org/drawingml/2006/main"/>
+        </p:txBody>
+      </p:sp>
+    </p:spTree>
+  </p:cSld>
+  <p:clrMapOvr>
+    <a:masterClrMapping xmlns:a="http://schemas.openxmlformats.org/drawingml/2006/main"/>
+  </p:clrMapOvr>
+</p:notes>
+</file>
+
+<file path=ppt/notesSlides/notesSlide9.xml><?xml version="1.0" encoding="utf-8"?>
+<p:notes xmlns:p="http://schemas.openxmlformats.org/presentationml/2006/main">
+  <p:cSld>
+    <p:spTree>
+      <p:nvGrpSpPr>
+        <p:cNvPr id="1" name=""/>
+        <p:cNvGrpSpPr/>
+        <p:nvPr/>
+      </p:nvGrpSpPr>
+      <p:grpSpPr>
+        <a:xfrm xmlns:a="http://schemas.openxmlformats.org/drawingml/2006/main"/>
+      </p:grpSpPr>
+      <p:sp>
+        <p:nvSpPr>
+          <p:cNvPr id="2" name="Slide Image Placeholder 1"/>
+          <p:cNvSpPr>
+            <a:spLocks xmlns:a="http://schemas.openxmlformats.org/drawingml/2006/main" noGrp="1"/>
+          </p:cNvSpPr>
+          <p:nvPr>
+            <p:ph type="sldImg" idx="0"/>
+          </p:nvPr>
+        </p:nvSpPr>
+        <p:spPr/>
+      </p:sp>
+      <p:sp>
+        <p:nvSpPr>
+          <p:cNvPr id="3" name="Notes Placeholder 2"/>
+          <p:cNvSpPr>
+            <a:spLocks xmlns:a="http://schemas.openxmlformats.org/drawingml/2006/main" noGrp="1"/>
+          </p:cNvSpPr>
+          <p:nvPr>
+            <p:ph type="body" idx="1"/>
+          </p:nvPr>
+        </p:nvSpPr>
+        <p:spPr/>
+        <p:txBody>
+          <a:bodyPr xmlns:a="http://schemas.openxmlformats.org/drawingml/2006/main"/>
+          <a:lstStyle xmlns:a="http://schemas.openxmlformats.org/drawingml/2006/main"/>
+          <a:p xmlns:a="http://schemas.openxmlformats.org/drawingml/2006/main">
+            <a:r>
+              <a:t>Source revision: 661aacc80e207cf8f9cddf7bb571e59feaaf41a6</a:t>
+            </a:r>
+          </a:p>
+          <a:p xmlns:a="http://schemas.openxmlformats.org/drawingml/2006/main">
+            <a:r>
+              <a:t>https://github.com/ntfound-dev/Vinss-canton/blob/661aacc80e207cf8f9cddf7bb571e59feaaf41a6/docs/METRICS_VALIDATION.md</a:t>
+            </a:r>
+          </a:p>
+          <a:p xmlns:a="http://schemas.openxmlformats.org/drawingml/2006/main">
+            <a:r>
+              <a:t>https://github.com/ntfound-dev/Vinss-canton/blob/661aacc80e207cf8f9cddf7bb571e59feaaf41a6/docs/GTM.md</a:t>
+            </a:r>
+          </a:p>
+          <a:p xmlns:a="http://schemas.openxmlformats.org/drawingml/2006/main">
+            <a:r>
+              <a:t>Targets are proposed, not achieved results. Report raw counts for the 3-5-pair cohort.</a:t>
             </a:r>
           </a:p>
         </p:txBody>
@@ -1066,7 +1273,7 @@
           <p:cNvPr id="4" name="Accent rule">
             <a:extLst xmlns:a="http://schemas.openxmlformats.org/drawingml/2006/main">
               <a:ext uri="{FF2B5EF4-FFF2-40B4-BE49-F238E27FC236}">
-                <a16:creationId xmlns:a16="http://schemas.microsoft.com/office/drawing/2014/main" id="{F8B251D6-5597-47B1-B699-9C5327796973}"/>
+                <a16:creationId xmlns:a16="http://schemas.microsoft.com/office/drawing/2014/main" id="{D58A3253-A575-40C1-BA16-50BAC72CB20C}"/>
               </a:ext>
             </a:extLst>
           </p:cNvPr>
@@ -1097,7 +1304,7 @@
           <p:cNvPr id="2" name="Title">
             <a:extLst xmlns:a="http://schemas.openxmlformats.org/drawingml/2006/main">
               <a:ext uri="{FF2B5EF4-FFF2-40B4-BE49-F238E27FC236}">
-                <a16:creationId xmlns:a16="http://schemas.microsoft.com/office/drawing/2014/main" id="{70D6EC5D-47D5-464D-B40C-369DDDA17121}"/>
+                <a16:creationId xmlns:a16="http://schemas.microsoft.com/office/drawing/2014/main" id="{4526BF32-E1AA-4761-A697-B53F063DC211}"/>
               </a:ext>
             </a:extLst>
           </p:cNvPr>
@@ -1244,7 +1451,7 @@
           <p:cNvPr id="3" name="Subtitle">
             <a:extLst xmlns:a="http://schemas.openxmlformats.org/drawingml/2006/main">
               <a:ext uri="{FF2B5EF4-FFF2-40B4-BE49-F238E27FC236}">
-                <a16:creationId xmlns:a16="http://schemas.microsoft.com/office/drawing/2014/main" id="{737B8317-DF9F-4137-9674-65FAB5973944}"/>
+                <a16:creationId xmlns:a16="http://schemas.microsoft.com/office/drawing/2014/main" id="{21B4BD9B-466E-4A6F-BFCA-DC358E7770F6}"/>
               </a:ext>
             </a:extLst>
           </p:cNvPr>
@@ -1408,7 +1615,7 @@
           <p:cNvPr id="3" name="Accent rule">
             <a:extLst xmlns:a="http://schemas.openxmlformats.org/drawingml/2006/main">
               <a:ext uri="{FF2B5EF4-FFF2-40B4-BE49-F238E27FC236}">
-                <a16:creationId xmlns:a16="http://schemas.microsoft.com/office/drawing/2014/main" id="{36D21180-8E34-47B1-952D-BC787C9F9916}"/>
+                <a16:creationId xmlns:a16="http://schemas.microsoft.com/office/drawing/2014/main" id="{2D9D100F-B8D5-4FBD-9FAB-9A8E53F4B5E5}"/>
               </a:ext>
             </a:extLst>
           </p:cNvPr>
@@ -1439,7 +1646,7 @@
           <p:cNvPr id="2" name="Section title">
             <a:extLst xmlns:a="http://schemas.openxmlformats.org/drawingml/2006/main">
               <a:ext uri="{FF2B5EF4-FFF2-40B4-BE49-F238E27FC236}">
-                <a16:creationId xmlns:a16="http://schemas.microsoft.com/office/drawing/2014/main" id="{5EAF32BF-31FA-474F-A6D5-E5F884F1CDE9}"/>
+                <a16:creationId xmlns:a16="http://schemas.microsoft.com/office/drawing/2014/main" id="{9F0D8773-E9C3-434F-8F0A-05AA4898A161}"/>
               </a:ext>
             </a:extLst>
           </p:cNvPr>
@@ -1603,7 +1810,7 @@
           <p:cNvPr id="4" name="Accent rule">
             <a:extLst xmlns:a="http://schemas.openxmlformats.org/drawingml/2006/main">
               <a:ext uri="{FF2B5EF4-FFF2-40B4-BE49-F238E27FC236}">
-                <a16:creationId xmlns:a16="http://schemas.microsoft.com/office/drawing/2014/main" id="{69BE1835-016E-44A6-941E-602D6E96D4C8}"/>
+                <a16:creationId xmlns:a16="http://schemas.microsoft.com/office/drawing/2014/main" id="{C11DAC91-9D20-4A2D-8D80-7E6E15FDF3BA}"/>
               </a:ext>
             </a:extLst>
           </p:cNvPr>
@@ -1634,7 +1841,7 @@
           <p:cNvPr id="2" name="Title">
             <a:extLst xmlns:a="http://schemas.openxmlformats.org/drawingml/2006/main">
               <a:ext uri="{FF2B5EF4-FFF2-40B4-BE49-F238E27FC236}">
-                <a16:creationId xmlns:a16="http://schemas.microsoft.com/office/drawing/2014/main" id="{9D025427-8AF0-4A94-A84A-22660ED1C16F}"/>
+                <a16:creationId xmlns:a16="http://schemas.microsoft.com/office/drawing/2014/main" id="{D6AA28D8-7237-40A3-BB93-2981D2D90675}"/>
               </a:ext>
             </a:extLst>
           </p:cNvPr>
@@ -1781,7 +1988,7 @@
           <p:cNvPr id="3" name="Body">
             <a:extLst xmlns:a="http://schemas.openxmlformats.org/drawingml/2006/main">
               <a:ext uri="{FF2B5EF4-FFF2-40B4-BE49-F238E27FC236}">
-                <a16:creationId xmlns:a16="http://schemas.microsoft.com/office/drawing/2014/main" id="{EBFC85DD-FC45-4E3C-9366-1D69049F678F}"/>
+                <a16:creationId xmlns:a16="http://schemas.microsoft.com/office/drawing/2014/main" id="{A8663886-D5CB-4732-AF70-45D32E4267E2}"/>
               </a:ext>
             </a:extLst>
           </p:cNvPr>
@@ -1945,7 +2152,7 @@
           <p:cNvPr id="5" name="Accent rule">
             <a:extLst xmlns:a="http://schemas.openxmlformats.org/drawingml/2006/main">
               <a:ext uri="{FF2B5EF4-FFF2-40B4-BE49-F238E27FC236}">
-                <a16:creationId xmlns:a16="http://schemas.microsoft.com/office/drawing/2014/main" id="{9B0F3B86-327F-4699-831B-A1E81AF43B7B}"/>
+                <a16:creationId xmlns:a16="http://schemas.microsoft.com/office/drawing/2014/main" id="{79FDFD33-5CB2-46E3-9D42-EA2B91A17970}"/>
               </a:ext>
             </a:extLst>
           </p:cNvPr>
@@ -1976,7 +2183,7 @@
           <p:cNvPr id="2" name="Title">
             <a:extLst xmlns:a="http://schemas.openxmlformats.org/drawingml/2006/main">
               <a:ext uri="{FF2B5EF4-FFF2-40B4-BE49-F238E27FC236}">
-                <a16:creationId xmlns:a16="http://schemas.microsoft.com/office/drawing/2014/main" id="{BF520BB4-A401-43A7-AA0F-F65B0ED8FBE3}"/>
+                <a16:creationId xmlns:a16="http://schemas.microsoft.com/office/drawing/2014/main" id="{A8F56A57-0804-4E10-8F24-EB4786665D46}"/>
               </a:ext>
             </a:extLst>
           </p:cNvPr>
@@ -2123,7 +2330,7 @@
           <p:cNvPr id="3" name="Left column">
             <a:extLst xmlns:a="http://schemas.openxmlformats.org/drawingml/2006/main">
               <a:ext uri="{FF2B5EF4-FFF2-40B4-BE49-F238E27FC236}">
-                <a16:creationId xmlns:a16="http://schemas.microsoft.com/office/drawing/2014/main" id="{6D9C8475-8D9A-42FE-86C7-6D5F603E1314}"/>
+                <a16:creationId xmlns:a16="http://schemas.microsoft.com/office/drawing/2014/main" id="{4904CA69-EEF1-4F50-9374-0EA455E7F842}"/>
               </a:ext>
             </a:extLst>
           </p:cNvPr>
@@ -2270,7 +2477,7 @@
           <p:cNvPr id="4" name="Right column">
             <a:extLst xmlns:a="http://schemas.openxmlformats.org/drawingml/2006/main">
               <a:ext uri="{FF2B5EF4-FFF2-40B4-BE49-F238E27FC236}">
-                <a16:creationId xmlns:a16="http://schemas.microsoft.com/office/drawing/2014/main" id="{9CF90A83-B6F3-41A9-8D08-E31AAA708226}"/>
+                <a16:creationId xmlns:a16="http://schemas.microsoft.com/office/drawing/2014/main" id="{0B2F8FD1-B713-46E9-91C0-CCF1B42A5F0B}"/>
               </a:ext>
             </a:extLst>
           </p:cNvPr>
@@ -2434,7 +2641,7 @@
           <p:cNvPr id="4" name="Accent rule">
             <a:extLst xmlns:a="http://schemas.openxmlformats.org/drawingml/2006/main">
               <a:ext uri="{FF2B5EF4-FFF2-40B4-BE49-F238E27FC236}">
-                <a16:creationId xmlns:a16="http://schemas.microsoft.com/office/drawing/2014/main" id="{C959DEB3-5892-4BC9-969C-CA7899F6EACB}"/>
+                <a16:creationId xmlns:a16="http://schemas.microsoft.com/office/drawing/2014/main" id="{BED18772-1FB5-44C2-A50E-83AC06C234D6}"/>
               </a:ext>
             </a:extLst>
           </p:cNvPr>
@@ -2465,7 +2672,7 @@
           <p:cNvPr id="2" name="Title">
             <a:extLst xmlns:a="http://schemas.openxmlformats.org/drawingml/2006/main">
               <a:ext uri="{FF2B5EF4-FFF2-40B4-BE49-F238E27FC236}">
-                <a16:creationId xmlns:a16="http://schemas.microsoft.com/office/drawing/2014/main" id="{F97FD716-36EB-4325-B1C0-65CDE02394CD}"/>
+                <a16:creationId xmlns:a16="http://schemas.microsoft.com/office/drawing/2014/main" id="{925FCE8F-4A14-4859-AE94-109B97FB2512}"/>
               </a:ext>
             </a:extLst>
           </p:cNvPr>
@@ -2612,7 +2819,7 @@
           <p:cNvPr id="3" name="Left column">
             <a:extLst xmlns:a="http://schemas.openxmlformats.org/drawingml/2006/main">
               <a:ext uri="{FF2B5EF4-FFF2-40B4-BE49-F238E27FC236}">
-                <a16:creationId xmlns:a16="http://schemas.microsoft.com/office/drawing/2014/main" id="{E50304FB-E972-4D72-A154-759C33239580}"/>
+                <a16:creationId xmlns:a16="http://schemas.microsoft.com/office/drawing/2014/main" id="{D7B54EF3-EDF2-4481-94C7-D2846CF09823}"/>
               </a:ext>
             </a:extLst>
           </p:cNvPr>
@@ -2797,12 +3004,12 @@
   </p:cSld>
   <p:clrMap bg1="lt1" tx1="dk1" bg2="lt2" tx2="dk2" accent1="accent1" accent2="accent2" accent3="accent3" accent4="accent4" accent5="accent5" accent6="accent6" hlink="hlink" folHlink="folHlink"/>
   <p:sldLayoutIdLst>
-    <p:sldLayoutId xmlns:r="http://schemas.openxmlformats.org/officeDocument/2006/relationships" id="2147483649" r:id="R6b26646a944d4e15"/>
-    <p:sldLayoutId xmlns:r="http://schemas.openxmlformats.org/officeDocument/2006/relationships" id="2147483650" r:id="Redb9310527a84d7b"/>
-    <p:sldLayoutId xmlns:r="http://schemas.openxmlformats.org/officeDocument/2006/relationships" id="2147483651" r:id="Rc23c73b71cd24851"/>
-    <p:sldLayoutId xmlns:r="http://schemas.openxmlformats.org/officeDocument/2006/relationships" id="2147483652" r:id="R83c6864f0ff245b6"/>
-    <p:sldLayoutId xmlns:r="http://schemas.openxmlformats.org/officeDocument/2006/relationships" id="2147483653" r:id="R4c363cce892b4c5a"/>
-    <p:sldLayoutId xmlns:r="http://schemas.openxmlformats.org/officeDocument/2006/relationships" id="2147483654" r:id="Rba2648088d624baa"/>
+    <p:sldLayoutId xmlns:r="http://schemas.openxmlformats.org/officeDocument/2006/relationships" id="2147483649" r:id="R15556f0675594592"/>
+    <p:sldLayoutId xmlns:r="http://schemas.openxmlformats.org/officeDocument/2006/relationships" id="2147483650" r:id="R234cb9de48074213"/>
+    <p:sldLayoutId xmlns:r="http://schemas.openxmlformats.org/officeDocument/2006/relationships" id="2147483651" r:id="Rc53d235872f04ef5"/>
+    <p:sldLayoutId xmlns:r="http://schemas.openxmlformats.org/officeDocument/2006/relationships" id="2147483652" r:id="Rc537d852b6c046bd"/>
+    <p:sldLayoutId xmlns:r="http://schemas.openxmlformats.org/officeDocument/2006/relationships" id="2147483653" r:id="R0a1484d4e8c84abb"/>
+    <p:sldLayoutId xmlns:r="http://schemas.openxmlformats.org/officeDocument/2006/relationships" id="2147483654" r:id="Rf88422df1cf14487"/>
   </p:sldLayoutIdLst>
   <p:txStyles>
     <p:titleStyle>
@@ -3335,7 +3542,7 @@
     <p:bg>
       <p:bgPr>
         <a:solidFill xmlns:a="http://schemas.openxmlformats.org/drawingml/2006/main">
-          <a:srgbClr val="FFFDFA"/>
+          <a:srgbClr val="152A27"/>
         </a:solidFill>
       </p:bgPr>
     </p:bg>
@@ -3353,7 +3560,7 @@
           <p:cNvPr id="5" name="">
             <a:extLst xmlns:a="http://schemas.openxmlformats.org/drawingml/2006/main">
               <a:ext uri="{FF2B5EF4-FFF2-40B4-BE49-F238E27FC236}">
-                <a16:creationId xmlns:a16="http://schemas.microsoft.com/office/drawing/2014/main" id="{31D9C875-733A-4923-AC58-D8B6AC4C2F00}"/>
+                <a16:creationId xmlns:a16="http://schemas.microsoft.com/office/drawing/2014/main" id="{AEE6CA46-5E6A-4A57-A857-BF33E00B06DD}"/>
               </a:ext>
             </a:extLst>
           </p:cNvPr>
@@ -3364,8 +3571,8 @@
         </p:nvSpPr>
         <p:spPr>
           <a:xfrm xmlns:a="http://schemas.openxmlformats.org/drawingml/2006/main">
-            <a:off x="723900" y="838200"/>
-            <a:ext cx="9525000" cy="952500"/>
+            <a:off x="666750" y="590550"/>
+            <a:ext cx="10477500" cy="1047750"/>
           </a:xfrm>
           <a:prstGeom xmlns:a="http://schemas.openxmlformats.org/drawingml/2006/main" prst="rect">
             <a:avLst/>
@@ -3382,9 +3589,9 @@
           <a:lstStyle xmlns:a="http://schemas.openxmlformats.org/drawingml/2006/main"/>
           <a:p xmlns:a="http://schemas.openxmlformats.org/drawingml/2006/main">
             <a:pPr>
-              <a:defRPr sz="5700" b="1">
-                <a:solidFill>
-                  <a:srgbClr val="142D31"/>
+              <a:defRPr sz="6225" b="1">
+                <a:solidFill>
+                  <a:srgbClr val="FFFFFF"/>
                 </a:solidFill>
                 <a:latin typeface="DejaVu Sans"/>
                 <a:ea typeface="DejaVu Sans"/>
@@ -3392,9 +3599,9 @@
               </a:defRPr>
             </a:pPr>
             <a:r>
-              <a:rPr sz="5700" b="1">
-                <a:solidFill>
-                  <a:srgbClr val="142D31"/>
+              <a:rPr sz="6225" b="1">
+                <a:solidFill>
+                  <a:srgbClr val="FFFFFF"/>
                 </a:solidFill>
                 <a:latin typeface="DejaVu Sans"/>
                 <a:ea typeface="DejaVu Sans"/>
@@ -3410,7 +3617,7 @@
           <p:cNvPr id="2" name="">
             <a:extLst xmlns:a="http://schemas.openxmlformats.org/drawingml/2006/main">
               <a:ext uri="{FF2B5EF4-FFF2-40B4-BE49-F238E27FC236}">
-                <a16:creationId xmlns:a16="http://schemas.microsoft.com/office/drawing/2014/main" id="{904E2CCF-ED6E-450F-B30E-794F0CFAE708}"/>
+                <a16:creationId xmlns:a16="http://schemas.microsoft.com/office/drawing/2014/main" id="{BC665A78-E8AE-44E2-AD38-56BAAB3A0E83}"/>
               </a:ext>
             </a:extLst>
           </p:cNvPr>
@@ -3421,8 +3628,8 @@
         </p:nvSpPr>
         <p:spPr>
           <a:xfrm xmlns:a="http://schemas.openxmlformats.org/drawingml/2006/main">
-            <a:off x="723900" y="2228850"/>
-            <a:ext cx="10287000" cy="857250"/>
+            <a:off x="666750" y="2076450"/>
+            <a:ext cx="10668000" cy="2257425"/>
           </a:xfrm>
           <a:prstGeom xmlns:a="http://schemas.openxmlformats.org/drawingml/2006/main" prst="rect">
             <a:avLst/>
@@ -3439,9 +3646,9 @@
           <a:lstStyle xmlns:a="http://schemas.openxmlformats.org/drawingml/2006/main"/>
           <a:p xmlns:a="http://schemas.openxmlformats.org/drawingml/2006/main">
             <a:pPr>
-              <a:defRPr sz="3600" b="1">
-                <a:solidFill>
-                  <a:srgbClr val="087F80"/>
+              <a:defRPr sz="4425" b="1">
+                <a:solidFill>
+                  <a:srgbClr val="FFFFFF"/>
                 </a:solidFill>
                 <a:latin typeface="DejaVu Sans"/>
                 <a:ea typeface="DejaVu Sans"/>
@@ -3449,15 +3656,61 @@
               </a:defRPr>
             </a:pPr>
             <a:r>
-              <a:rPr sz="3600" b="1">
-                <a:solidFill>
-                  <a:srgbClr val="087F80"/>
+              <a:rPr sz="4425" b="1">
+                <a:solidFill>
+                  <a:srgbClr val="FFFFFF"/>
                 </a:solidFill>
                 <a:latin typeface="DejaVu Sans"/>
                 <a:ea typeface="DejaVu Sans"/>
                 <a:cs typeface="DejaVu Sans"/>
               </a:rPr>
-              <a:t>Private deals between people</a:t>
+              <a:t>Private chat.</a:t>
+            </a:r>
+          </a:p>
+          <a:p xmlns:a="http://schemas.openxmlformats.org/drawingml/2006/main">
+            <a:pPr>
+              <a:defRPr sz="4425" b="1">
+                <a:solidFill>
+                  <a:srgbClr val="FFFFFF"/>
+                </a:solidFill>
+                <a:latin typeface="DejaVu Sans"/>
+                <a:ea typeface="DejaVu Sans"/>
+                <a:cs typeface="DejaVu Sans"/>
+              </a:defRPr>
+            </a:pPr>
+            <a:r>
+              <a:rPr sz="4425" b="1">
+                <a:solidFill>
+                  <a:srgbClr val="FFFFFF"/>
+                </a:solidFill>
+                <a:latin typeface="DejaVu Sans"/>
+                <a:ea typeface="DejaVu Sans"/>
+                <a:cs typeface="DejaVu Sans"/>
+              </a:rPr>
+              <a:t>Agreed work.</a:t>
+            </a:r>
+          </a:p>
+          <a:p xmlns:a="http://schemas.openxmlformats.org/drawingml/2006/main">
+            <a:pPr>
+              <a:defRPr sz="4425" b="1">
+                <a:solidFill>
+                  <a:srgbClr val="FFFFFF"/>
+                </a:solidFill>
+                <a:latin typeface="DejaVu Sans"/>
+                <a:ea typeface="DejaVu Sans"/>
+                <a:cs typeface="DejaVu Sans"/>
+              </a:defRPr>
+            </a:pPr>
+            <a:r>
+              <a:rPr sz="4425" b="1">
+                <a:solidFill>
+                  <a:srgbClr val="FFFFFF"/>
+                </a:solidFill>
+                <a:latin typeface="DejaVu Sans"/>
+                <a:ea typeface="DejaVu Sans"/>
+                <a:cs typeface="DejaVu Sans"/>
+              </a:rPr>
+              <a:t>Escrow settlement.</a:t>
             </a:r>
           </a:p>
         </p:txBody>
@@ -3467,7 +3720,7 @@
           <p:cNvPr id="3" name="">
             <a:extLst xmlns:a="http://schemas.openxmlformats.org/drawingml/2006/main">
               <a:ext uri="{FF2B5EF4-FFF2-40B4-BE49-F238E27FC236}">
-                <a16:creationId xmlns:a16="http://schemas.microsoft.com/office/drawing/2014/main" id="{E35E810A-B05B-4BD9-8011-58B6F1068382}"/>
+                <a16:creationId xmlns:a16="http://schemas.microsoft.com/office/drawing/2014/main" id="{93E6F38B-E36F-4F7C-AC31-B0C731001B0D}"/>
               </a:ext>
             </a:extLst>
           </p:cNvPr>
@@ -3478,8 +3731,8 @@
         </p:nvSpPr>
         <p:spPr>
           <a:xfrm xmlns:a="http://schemas.openxmlformats.org/drawingml/2006/main">
-            <a:off x="723900" y="3514725"/>
-            <a:ext cx="8953500" cy="1333500"/>
+            <a:off x="704850" y="4743450"/>
+            <a:ext cx="9525000" cy="885825"/>
           </a:xfrm>
           <a:prstGeom xmlns:a="http://schemas.openxmlformats.org/drawingml/2006/main" prst="rect">
             <a:avLst/>
@@ -3496,9 +3749,9 @@
           <a:lstStyle xmlns:a="http://schemas.openxmlformats.org/drawingml/2006/main"/>
           <a:p xmlns:a="http://schemas.openxmlformats.org/drawingml/2006/main">
             <a:pPr>
-              <a:defRPr sz="2550" b="0">
-                <a:solidFill>
-                  <a:srgbClr val="142D31"/>
+              <a:defRPr sz="2250" b="0">
+                <a:solidFill>
+                  <a:srgbClr val="A9DAC3"/>
                 </a:solidFill>
                 <a:latin typeface="DejaVu Sans"/>
                 <a:ea typeface="DejaVu Sans"/>
@@ -3506,15 +3759,15 @@
               </a:defRPr>
             </a:pPr>
             <a:r>
-              <a:rPr sz="2550" b="0">
-                <a:solidFill>
-                  <a:srgbClr val="142D31"/>
+              <a:rPr sz="2250" b="0">
+                <a:solidFill>
+                  <a:srgbClr val="A9DAC3"/>
                 </a:solidFill>
                 <a:latin typeface="DejaVu Sans"/>
                 <a:ea typeface="DejaVu Sans"/>
                 <a:cs typeface="DejaVu Sans"/>
               </a:rPr>
-              <a:t>Discuss the work privately. Agree on an offer. Settle payment after approval.</a:t>
+              <a:t>A private deal workspace for clients and freelancers on Canton.</a:t>
             </a:r>
           </a:p>
         </p:txBody>
@@ -3524,7 +3777,7 @@
           <p:cNvPr id="4" name="">
             <a:extLst xmlns:a="http://schemas.openxmlformats.org/drawingml/2006/main">
               <a:ext uri="{FF2B5EF4-FFF2-40B4-BE49-F238E27FC236}">
-                <a16:creationId xmlns:a16="http://schemas.microsoft.com/office/drawing/2014/main" id="{6BD88B30-EB5C-4F97-B760-2BF465BE57CC}"/>
+                <a16:creationId xmlns:a16="http://schemas.microsoft.com/office/drawing/2014/main" id="{E2748D0F-ABE8-4A1C-96A5-6FBCEC1A41A9}"/>
               </a:ext>
             </a:extLst>
           </p:cNvPr>
@@ -3535,8 +3788,8 @@
         </p:nvSpPr>
         <p:spPr>
           <a:xfrm xmlns:a="http://schemas.openxmlformats.org/drawingml/2006/main">
-            <a:off x="723900" y="5886450"/>
-            <a:ext cx="10287000" cy="342900"/>
+            <a:off x="704850" y="6210300"/>
+            <a:ext cx="10477500" cy="285750"/>
           </a:xfrm>
           <a:prstGeom xmlns:a="http://schemas.openxmlformats.org/drawingml/2006/main" prst="rect">
             <a:avLst/>
@@ -3553,9 +3806,9 @@
           <a:lstStyle xmlns:a="http://schemas.openxmlformats.org/drawingml/2006/main"/>
           <a:p xmlns:a="http://schemas.openxmlformats.org/drawingml/2006/main">
             <a:pPr>
-              <a:defRPr sz="1650" b="0">
-                <a:solidFill>
-                  <a:srgbClr val="52646B"/>
+              <a:defRPr sz="1500" b="0">
+                <a:solidFill>
+                  <a:srgbClr val="A9DAC3"/>
                 </a:solidFill>
                 <a:latin typeface="DejaVu Sans"/>
                 <a:ea typeface="DejaVu Sans"/>
@@ -3563,15 +3816,15 @@
               </a:defRPr>
             </a:pPr>
             <a:r>
-              <a:rPr sz="1650" b="0">
-                <a:solidFill>
-                  <a:srgbClr val="52646B"/>
+              <a:rPr sz="1500" b="0">
+                <a:solidFill>
+                  <a:srgbClr val="A9DAC3"/>
                 </a:solidFill>
                 <a:latin typeface="DejaVu Sans"/>
                 <a:ea typeface="DejaVu Sans"/>
                 <a:cs typeface="DejaVu Sans"/>
               </a:rPr>
-              <a:t>Canton MVP - HackCanton League Season 3</a:t>
+              <a:t>HackCanton League Season 3</a:t>
             </a:r>
           </a:p>
         </p:txBody>
@@ -3579,7 +3832,390 @@
     </p:spTree>
     <p:extLst>
       <p:ext uri="{BB962C8B-B14F-4D97-AF65-F5344CB8AC3E}">
-        <p14:creationId xmlns:p14="http://schemas.microsoft.com/office/powerpoint/2010/main" val="70603547"/>
+        <p14:creationId xmlns:p14="http://schemas.microsoft.com/office/powerpoint/2010/main" val="641336810"/>
+      </p:ext>
+    </p:extLst>
+  </p:cSld>
+</p:sld>
+</file>
+
+<file path=ppt/slides/slide10.xml><?xml version="1.0" encoding="utf-8"?>
+<p:sld xmlns:p="http://schemas.openxmlformats.org/presentationml/2006/main">
+  <p:cSld>
+    <p:bg>
+      <p:bgPr>
+        <a:solidFill xmlns:a="http://schemas.openxmlformats.org/drawingml/2006/main">
+          <a:srgbClr val="152A27"/>
+        </a:solidFill>
+      </p:bgPr>
+    </p:bg>
+    <p:spTree>
+      <p:nvGrpSpPr>
+        <p:cNvPr id="1" name=""/>
+        <p:cNvGrpSpPr/>
+        <p:nvPr/>
+      </p:nvGrpSpPr>
+      <p:grpSpPr>
+        <a:xfrm xmlns:a="http://schemas.openxmlformats.org/drawingml/2006/main"/>
+      </p:grpSpPr>
+      <p:sp>
+        <p:nvSpPr>
+          <p:cNvPr id="6" name="">
+            <a:extLst xmlns:a="http://schemas.openxmlformats.org/drawingml/2006/main">
+              <a:ext uri="{FF2B5EF4-FFF2-40B4-BE49-F238E27FC236}">
+                <a16:creationId xmlns:a16="http://schemas.microsoft.com/office/drawing/2014/main" id="{5BD786EA-8E6E-431F-9C86-4966D37BF56F}"/>
+              </a:ext>
+            </a:extLst>
+          </p:cNvPr>
+          <p:cNvSpPr>
+            <a:spLocks xmlns:a="http://schemas.openxmlformats.org/drawingml/2006/main" noGrp="1"/>
+          </p:cNvSpPr>
+          <p:nvPr/>
+        </p:nvSpPr>
+        <p:spPr>
+          <a:xfrm xmlns:a="http://schemas.openxmlformats.org/drawingml/2006/main">
+            <a:off x="609600" y="447675"/>
+            <a:ext cx="10934700" cy="914400"/>
+          </a:xfrm>
+          <a:prstGeom xmlns:a="http://schemas.openxmlformats.org/drawingml/2006/main" prst="rect">
+            <a:avLst/>
+          </a:prstGeom>
+          <a:noFill xmlns:a="http://schemas.openxmlformats.org/drawingml/2006/main"/>
+          <a:ln xmlns:a="http://schemas.openxmlformats.org/drawingml/2006/main" w="0">
+            <a:noFill/>
+          </a:ln>
+        </p:spPr>
+        <p:txBody>
+          <a:bodyPr xmlns:a="http://schemas.openxmlformats.org/drawingml/2006/main">
+            <a:noAutofit/>
+          </a:bodyPr>
+          <a:lstStyle xmlns:a="http://schemas.openxmlformats.org/drawingml/2006/main"/>
+          <a:p xmlns:a="http://schemas.openxmlformats.org/drawingml/2006/main">
+            <a:pPr>
+              <a:defRPr sz="3675" b="1">
+                <a:solidFill>
+                  <a:srgbClr val="FFFFFF"/>
+                </a:solidFill>
+                <a:latin typeface="DejaVu Sans"/>
+                <a:ea typeface="DejaVu Sans"/>
+                <a:cs typeface="DejaVu Sans"/>
+              </a:defRPr>
+            </a:pPr>
+            <a:r>
+              <a:rPr sz="3675" b="1">
+                <a:solidFill>
+                  <a:srgbClr val="FFFFFF"/>
+                </a:solidFill>
+                <a:latin typeface="DejaVu Sans"/>
+                <a:ea typeface="DejaVu Sans"/>
+                <a:cs typeface="DejaVu Sans"/>
+              </a:rPr>
+              <a:t>The next Canton milestone</a:t>
+            </a:r>
+          </a:p>
+        </p:txBody>
+      </p:sp>
+      <p:sp>
+        <p:nvSpPr>
+          <p:cNvPr id="2" name="">
+            <a:extLst xmlns:a="http://schemas.openxmlformats.org/drawingml/2006/main">
+              <a:ext uri="{FF2B5EF4-FFF2-40B4-BE49-F238E27FC236}">
+                <a16:creationId xmlns:a16="http://schemas.microsoft.com/office/drawing/2014/main" id="{2B82AE04-C919-49F6-90A2-B155652B4B76}"/>
+              </a:ext>
+            </a:extLst>
+          </p:cNvPr>
+          <p:cNvSpPr>
+            <a:spLocks xmlns:a="http://schemas.openxmlformats.org/drawingml/2006/main" noGrp="1"/>
+          </p:cNvSpPr>
+          <p:nvPr/>
+        </p:nvSpPr>
+        <p:spPr>
+          <a:xfrm xmlns:a="http://schemas.openxmlformats.org/drawingml/2006/main">
+            <a:off x="628650" y="1476375"/>
+            <a:ext cx="10934700" cy="685800"/>
+          </a:xfrm>
+          <a:prstGeom xmlns:a="http://schemas.openxmlformats.org/drawingml/2006/main" prst="rect">
+            <a:avLst/>
+          </a:prstGeom>
+          <a:noFill xmlns:a="http://schemas.openxmlformats.org/drawingml/2006/main"/>
+          <a:ln xmlns:a="http://schemas.openxmlformats.org/drawingml/2006/main" w="0">
+            <a:noFill/>
+          </a:ln>
+        </p:spPr>
+        <p:txBody>
+          <a:bodyPr xmlns:a="http://schemas.openxmlformats.org/drawingml/2006/main">
+            <a:noAutofit/>
+          </a:bodyPr>
+          <a:lstStyle xmlns:a="http://schemas.openxmlformats.org/drawingml/2006/main"/>
+          <a:p xmlns:a="http://schemas.openxmlformats.org/drawingml/2006/main">
+            <a:pPr>
+              <a:defRPr sz="2100" b="0">
+                <a:solidFill>
+                  <a:srgbClr val="A9DAC3"/>
+                </a:solidFill>
+                <a:latin typeface="DejaVu Sans"/>
+                <a:ea typeface="DejaVu Sans"/>
+                <a:cs typeface="DejaVu Sans"/>
+              </a:defRPr>
+            </a:pPr>
+            <a:r>
+              <a:rPr sz="2100" b="0">
+                <a:solidFill>
+                  <a:srgbClr val="A9DAC3"/>
+                </a:solidFill>
+                <a:latin typeface="DejaVu Sans"/>
+                <a:ea typeface="DejaVu Sans"/>
+                <a:cs typeface="DejaVu Sans"/>
+              </a:rPr>
+              <a:t>Complete the live wallet demonstration and the first observed pilot.</a:t>
+            </a:r>
+          </a:p>
+        </p:txBody>
+      </p:sp>
+      <p:sp>
+        <p:nvSpPr>
+          <p:cNvPr id="3" name="">
+            <a:extLst xmlns:a="http://schemas.openxmlformats.org/drawingml/2006/main">
+              <a:ext uri="{FF2B5EF4-FFF2-40B4-BE49-F238E27FC236}">
+                <a16:creationId xmlns:a16="http://schemas.microsoft.com/office/drawing/2014/main" id="{FEC6A0A3-B7D7-40B5-90E8-10E12B01E6AF}"/>
+              </a:ext>
+            </a:extLst>
+          </p:cNvPr>
+          <p:cNvSpPr>
+            <a:spLocks xmlns:a="http://schemas.openxmlformats.org/drawingml/2006/main" noGrp="1"/>
+          </p:cNvSpPr>
+          <p:nvPr/>
+        </p:nvSpPr>
+        <p:spPr>
+          <a:xfrm xmlns:a="http://schemas.openxmlformats.org/drawingml/2006/main">
+            <a:off x="628650" y="2762250"/>
+            <a:ext cx="10763250" cy="2286000"/>
+          </a:xfrm>
+          <a:prstGeom xmlns:a="http://schemas.openxmlformats.org/drawingml/2006/main" prst="rect">
+            <a:avLst/>
+          </a:prstGeom>
+          <a:noFill xmlns:a="http://schemas.openxmlformats.org/drawingml/2006/main"/>
+          <a:ln xmlns:a="http://schemas.openxmlformats.org/drawingml/2006/main" w="0">
+            <a:noFill/>
+          </a:ln>
+        </p:spPr>
+        <p:txBody>
+          <a:bodyPr xmlns:a="http://schemas.openxmlformats.org/drawingml/2006/main">
+            <a:noAutofit/>
+          </a:bodyPr>
+          <a:lstStyle xmlns:a="http://schemas.openxmlformats.org/drawingml/2006/main"/>
+          <a:p xmlns:a="http://schemas.openxmlformats.org/drawingml/2006/main">
+            <a:pPr>
+              <a:defRPr sz="2475" b="0">
+                <a:solidFill>
+                  <a:srgbClr val="FFFFFF"/>
+                </a:solidFill>
+                <a:latin typeface="DejaVu Sans"/>
+                <a:ea typeface="DejaVu Sans"/>
+                <a:cs typeface="DejaVu Sans"/>
+              </a:defRPr>
+            </a:pPr>
+            <a:r>
+              <a:rPr sz="2475" b="0">
+                <a:solidFill>
+                  <a:srgbClr val="FFFFFF"/>
+                </a:solidFill>
+                <a:latin typeface="DejaVu Sans"/>
+                <a:ea typeface="DejaVu Sans"/>
+                <a:cs typeface="DejaVu Sans"/>
+              </a:rPr>
+              <a:t>Record current-release chat and group delivery.</a:t>
+            </a:r>
+          </a:p>
+          <a:p xmlns:a="http://schemas.openxmlformats.org/drawingml/2006/main">
+            <a:pPr>
+              <a:defRPr sz="2475" b="0">
+                <a:solidFill>
+                  <a:srgbClr val="FFFFFF"/>
+                </a:solidFill>
+                <a:latin typeface="DejaVu Sans"/>
+                <a:ea typeface="DejaVu Sans"/>
+                <a:cs typeface="DejaVu Sans"/>
+              </a:defRPr>
+            </a:pPr>
+            <a:r>
+              <a:rPr sz="2475" b="0">
+                <a:solidFill>
+                  <a:srgbClr val="FFFFFF"/>
+                </a:solidFill>
+                <a:latin typeface="DejaVu Sans"/>
+                <a:ea typeface="DejaVu Sans"/>
+                <a:cs typeface="DejaVu Sans"/>
+              </a:rPr>
+              <a:t>Verify the funded deal through its settlement receipt.</a:t>
+            </a:r>
+          </a:p>
+          <a:p xmlns:a="http://schemas.openxmlformats.org/drawingml/2006/main">
+            <a:pPr>
+              <a:defRPr sz="2475" b="0">
+                <a:solidFill>
+                  <a:srgbClr val="FFFFFF"/>
+                </a:solidFill>
+                <a:latin typeface="DejaVu Sans"/>
+                <a:ea typeface="DejaVu Sans"/>
+                <a:cs typeface="DejaVu Sans"/>
+              </a:defRPr>
+            </a:pPr>
+            <a:r>
+              <a:rPr sz="2475" b="0">
+                <a:solidFill>
+                  <a:srgbClr val="FFFFFF"/>
+                </a:solidFill>
+                <a:latin typeface="DejaVu Sans"/>
+                <a:ea typeface="DejaVu Sans"/>
+                <a:cs typeface="DejaVu Sans"/>
+              </a:rPr>
+              <a:t>Use participant feedback to resolve the biggest blockers.</a:t>
+            </a:r>
+          </a:p>
+        </p:txBody>
+      </p:sp>
+      <p:sp>
+        <p:nvSpPr>
+          <p:cNvPr id="4" name="">
+            <a:extLst xmlns:a="http://schemas.openxmlformats.org/drawingml/2006/main">
+              <a:ext uri="{FF2B5EF4-FFF2-40B4-BE49-F238E27FC236}">
+                <a16:creationId xmlns:a16="http://schemas.microsoft.com/office/drawing/2014/main" id="{F97706B3-7977-4DDC-A2C3-B5B21173E788}"/>
+              </a:ext>
+            </a:extLst>
+          </p:cNvPr>
+          <p:cNvSpPr>
+            <a:spLocks xmlns:a="http://schemas.openxmlformats.org/drawingml/2006/main" noGrp="1"/>
+          </p:cNvSpPr>
+          <p:nvPr/>
+        </p:nvSpPr>
+        <p:spPr>
+          <a:xfrm xmlns:a="http://schemas.openxmlformats.org/drawingml/2006/main">
+            <a:off x="628650" y="5172075"/>
+            <a:ext cx="10668000" cy="647700"/>
+          </a:xfrm>
+          <a:prstGeom xmlns:a="http://schemas.openxmlformats.org/drawingml/2006/main" prst="rect">
+            <a:avLst/>
+          </a:prstGeom>
+          <a:noFill xmlns:a="http://schemas.openxmlformats.org/drawingml/2006/main"/>
+          <a:ln xmlns:a="http://schemas.openxmlformats.org/drawingml/2006/main" w="0">
+            <a:noFill/>
+          </a:ln>
+        </p:spPr>
+        <p:txBody>
+          <a:bodyPr xmlns:a="http://schemas.openxmlformats.org/drawingml/2006/main">
+            <a:noAutofit/>
+          </a:bodyPr>
+          <a:lstStyle xmlns:a="http://schemas.openxmlformats.org/drawingml/2006/main"/>
+          <a:p xmlns:a="http://schemas.openxmlformats.org/drawingml/2006/main">
+            <a:pPr>
+              <a:defRPr sz="1800" b="0">
+                <a:solidFill>
+                  <a:srgbClr val="A9DAC3"/>
+                </a:solidFill>
+                <a:latin typeface="DejaVu Sans"/>
+                <a:ea typeface="DejaVu Sans"/>
+                <a:cs typeface="DejaVu Sans"/>
+              </a:defRPr>
+            </a:pPr>
+            <a:r>
+              <a:rPr sz="1800" b="0">
+                <a:solidFill>
+                  <a:srgbClr val="A9DAC3"/>
+                </a:solidFill>
+                <a:latin typeface="DejaVu Sans"/>
+                <a:ea typeface="DejaVu Sans"/>
+                <a:cs typeface="DejaVu Sans"/>
+              </a:rPr>
+              <a:t>vinss-canton.vercel.app</a:t>
+            </a:r>
+          </a:p>
+          <a:p xmlns:a="http://schemas.openxmlformats.org/drawingml/2006/main">
+            <a:pPr>
+              <a:defRPr sz="1800" b="0">
+                <a:solidFill>
+                  <a:srgbClr val="A9DAC3"/>
+                </a:solidFill>
+                <a:latin typeface="DejaVu Sans"/>
+                <a:ea typeface="DejaVu Sans"/>
+                <a:cs typeface="DejaVu Sans"/>
+              </a:defRPr>
+            </a:pPr>
+            <a:r>
+              <a:rPr sz="1800" b="0">
+                <a:solidFill>
+                  <a:srgbClr val="A9DAC3"/>
+                </a:solidFill>
+                <a:latin typeface="DejaVu Sans"/>
+                <a:ea typeface="DejaVu Sans"/>
+                <a:cs typeface="DejaVu Sans"/>
+              </a:rPr>
+              <a:t>github.com/ntfound-dev/Vinss-canton</a:t>
+            </a:r>
+          </a:p>
+        </p:txBody>
+      </p:sp>
+      <p:sp>
+        <p:nvSpPr>
+          <p:cNvPr id="5" name="">
+            <a:extLst xmlns:a="http://schemas.openxmlformats.org/drawingml/2006/main">
+              <a:ext uri="{FF2B5EF4-FFF2-40B4-BE49-F238E27FC236}">
+                <a16:creationId xmlns:a16="http://schemas.microsoft.com/office/drawing/2014/main" id="{7EB2174F-305C-42F0-BA47-97FB3C4B187A}"/>
+              </a:ext>
+            </a:extLst>
+          </p:cNvPr>
+          <p:cNvSpPr>
+            <a:spLocks xmlns:a="http://schemas.openxmlformats.org/drawingml/2006/main" noGrp="1"/>
+          </p:cNvSpPr>
+          <p:nvPr/>
+        </p:nvSpPr>
+        <p:spPr>
+          <a:xfrm xmlns:a="http://schemas.openxmlformats.org/drawingml/2006/main">
+            <a:off x="628650" y="6115050"/>
+            <a:ext cx="10534650" cy="628650"/>
+          </a:xfrm>
+          <a:prstGeom xmlns:a="http://schemas.openxmlformats.org/drawingml/2006/main" prst="rect">
+            <a:avLst/>
+          </a:prstGeom>
+          <a:noFill xmlns:a="http://schemas.openxmlformats.org/drawingml/2006/main"/>
+          <a:ln xmlns:a="http://schemas.openxmlformats.org/drawingml/2006/main" w="0">
+            <a:noFill/>
+          </a:ln>
+        </p:spPr>
+        <p:txBody>
+          <a:bodyPr xmlns:a="http://schemas.openxmlformats.org/drawingml/2006/main">
+            <a:noAutofit/>
+          </a:bodyPr>
+          <a:lstStyle xmlns:a="http://schemas.openxmlformats.org/drawingml/2006/main"/>
+          <a:p xmlns:a="http://schemas.openxmlformats.org/drawingml/2006/main">
+            <a:pPr>
+              <a:defRPr sz="1350" b="0">
+                <a:solidFill>
+                  <a:srgbClr val="A9DAC3"/>
+                </a:solidFill>
+                <a:latin typeface="DejaVu Sans"/>
+                <a:ea typeface="DejaVu Sans"/>
+                <a:cs typeface="DejaVu Sans"/>
+              </a:defRPr>
+            </a:pPr>
+            <a:r>
+              <a:rPr sz="1350" b="0">
+                <a:solidFill>
+                  <a:srgbClr val="A9DAC3"/>
+                </a:solidFill>
+                <a:latin typeface="DejaVu Sans"/>
+                <a:ea typeface="DejaVu Sans"/>
+                <a:cs typeface="DejaVu Sans"/>
+              </a:rPr>
+              <a:t>Next product decisions: recovery, dispute/refund handling, self-service listings and VIP. Multichain follows Canton.</a:t>
+            </a:r>
+          </a:p>
+        </p:txBody>
+      </p:sp>
+    </p:spTree>
+    <p:extLst>
+      <p:ext uri="{BB962C8B-B14F-4D97-AF65-F5344CB8AC3E}">
+        <p14:creationId xmlns:p14="http://schemas.microsoft.com/office/powerpoint/2010/main" val="932949490"/>
       </p:ext>
     </p:extLst>
   </p:cSld>
@@ -3592,7 +4228,7 @@
     <p:bg>
       <p:bgPr>
         <a:solidFill xmlns:a="http://schemas.openxmlformats.org/drawingml/2006/main">
-          <a:srgbClr val="FFFDFA"/>
+          <a:srgbClr val="FAFAF6"/>
         </a:solidFill>
       </p:bgPr>
     </p:bg>
@@ -3610,7 +4246,7 @@
           <p:cNvPr id="8" name="">
             <a:extLst xmlns:a="http://schemas.openxmlformats.org/drawingml/2006/main">
               <a:ext uri="{FF2B5EF4-FFF2-40B4-BE49-F238E27FC236}">
-                <a16:creationId xmlns:a16="http://schemas.microsoft.com/office/drawing/2014/main" id="{A96EE409-A393-4E69-BA76-250DF32DE3EF}"/>
+                <a16:creationId xmlns:a16="http://schemas.microsoft.com/office/drawing/2014/main" id="{040FD1F2-4E82-4A07-BC5C-59997D2B95FF}"/>
               </a:ext>
             </a:extLst>
           </p:cNvPr>
@@ -3621,8 +4257,8 @@
         </p:nvSpPr>
         <p:spPr>
           <a:xfrm xmlns:a="http://schemas.openxmlformats.org/drawingml/2006/main">
-            <a:off x="685800" y="457200"/>
-            <a:ext cx="10820400" cy="895350"/>
+            <a:off x="609600" y="447675"/>
+            <a:ext cx="10934700" cy="914400"/>
           </a:xfrm>
           <a:prstGeom xmlns:a="http://schemas.openxmlformats.org/drawingml/2006/main" prst="rect">
             <a:avLst/>
@@ -3639,9 +4275,9 @@
           <a:lstStyle xmlns:a="http://schemas.openxmlformats.org/drawingml/2006/main"/>
           <a:p xmlns:a="http://schemas.openxmlformats.org/drawingml/2006/main">
             <a:pPr>
-              <a:defRPr sz="3600" b="1">
-                <a:solidFill>
-                  <a:srgbClr val="142D31"/>
+              <a:defRPr sz="3675" b="1">
+                <a:solidFill>
+                  <a:srgbClr val="152A27"/>
                 </a:solidFill>
                 <a:latin typeface="DejaVu Sans"/>
                 <a:ea typeface="DejaVu Sans"/>
@@ -3649,15 +4285,15 @@
               </a:defRPr>
             </a:pPr>
             <a:r>
-              <a:rPr sz="3600" b="1">
-                <a:solidFill>
-                  <a:srgbClr val="142D31"/>
+              <a:rPr sz="3675" b="1">
+                <a:solidFill>
+                  <a:srgbClr val="152A27"/>
                 </a:solidFill>
                 <a:latin typeface="DejaVu Sans"/>
                 <a:ea typeface="DejaVu Sans"/>
                 <a:cs typeface="DejaVu Sans"/>
               </a:rPr>
-              <a:t>The client-work problem</a:t>
+              <a:t>The gap between chat and payment</a:t>
             </a:r>
           </a:p>
         </p:txBody>
@@ -3667,7 +4303,7 @@
           <p:cNvPr id="2" name="">
             <a:extLst xmlns:a="http://schemas.openxmlformats.org/drawingml/2006/main">
               <a:ext uri="{FF2B5EF4-FFF2-40B4-BE49-F238E27FC236}">
-                <a16:creationId xmlns:a16="http://schemas.microsoft.com/office/drawing/2014/main" id="{2D25ACF9-4126-440E-83C4-306A5726386B}"/>
+                <a16:creationId xmlns:a16="http://schemas.microsoft.com/office/drawing/2014/main" id="{AFF10731-037F-4784-A4AF-F9E6C230B6BA}"/>
               </a:ext>
             </a:extLst>
           </p:cNvPr>
@@ -3678,8 +4314,8 @@
         </p:nvSpPr>
         <p:spPr>
           <a:xfrm xmlns:a="http://schemas.openxmlformats.org/drawingml/2006/main">
-            <a:off x="685800" y="1447800"/>
-            <a:ext cx="10648950" cy="781050"/>
+            <a:off x="628650" y="1476375"/>
+            <a:ext cx="10934700" cy="685800"/>
           </a:xfrm>
           <a:prstGeom xmlns:a="http://schemas.openxmlformats.org/drawingml/2006/main" prst="rect">
             <a:avLst/>
@@ -3696,9 +4332,9 @@
           <a:lstStyle xmlns:a="http://schemas.openxmlformats.org/drawingml/2006/main"/>
           <a:p xmlns:a="http://schemas.openxmlformats.org/drawingml/2006/main">
             <a:pPr>
-              <a:defRPr sz="2250" b="0">
-                <a:solidFill>
-                  <a:srgbClr val="087F80"/>
+              <a:defRPr sz="2100" b="0">
+                <a:solidFill>
+                  <a:srgbClr val="146C56"/>
                 </a:solidFill>
                 <a:latin typeface="DejaVu Sans"/>
                 <a:ea typeface="DejaVu Sans"/>
@@ -3706,15 +4342,15 @@
               </a:defRPr>
             </a:pPr>
             <a:r>
-              <a:rPr sz="2250" b="0">
-                <a:solidFill>
-                  <a:srgbClr val="087F80"/>
+              <a:rPr sz="2100" b="0">
+                <a:solidFill>
+                  <a:srgbClr val="146C56"/>
                 </a:solidFill>
                 <a:latin typeface="DejaVu Sans"/>
                 <a:ea typeface="DejaVu Sans"/>
                 <a:cs typeface="DejaVu Sans"/>
               </a:rPr>
-              <a:t>The agreement and payment status live in different places.</a:t>
+              <a:t>A direct client deal often loses its shared context.</a:t>
             </a:r>
           </a:p>
         </p:txBody>
@@ -3724,7 +4360,7 @@
           <p:cNvPr id="3" name="">
             <a:extLst xmlns:a="http://schemas.openxmlformats.org/drawingml/2006/main">
               <a:ext uri="{FF2B5EF4-FFF2-40B4-BE49-F238E27FC236}">
-                <a16:creationId xmlns:a16="http://schemas.microsoft.com/office/drawing/2014/main" id="{3C161FD3-D18B-43B0-9A49-11B66CCB8D4D}"/>
+                <a16:creationId xmlns:a16="http://schemas.microsoft.com/office/drawing/2014/main" id="{B0210878-EE3E-4A28-9C04-1AEA39E3DE56}"/>
               </a:ext>
             </a:extLst>
           </p:cNvPr>
@@ -3735,8 +4371,8 @@
         </p:nvSpPr>
         <p:spPr>
           <a:xfrm xmlns:a="http://schemas.openxmlformats.org/drawingml/2006/main">
-            <a:off x="685800" y="2781300"/>
-            <a:ext cx="4905375" cy="495300"/>
+            <a:off x="628650" y="2543175"/>
+            <a:ext cx="4972050" cy="476250"/>
           </a:xfrm>
           <a:prstGeom xmlns:a="http://schemas.openxmlformats.org/drawingml/2006/main" prst="rect">
             <a:avLst/>
@@ -3753,9 +4389,9 @@
           <a:lstStyle xmlns:a="http://schemas.openxmlformats.org/drawingml/2006/main"/>
           <a:p xmlns:a="http://schemas.openxmlformats.org/drawingml/2006/main">
             <a:pPr>
-              <a:defRPr sz="2250" b="1">
-                <a:solidFill>
-                  <a:srgbClr val="142D31"/>
+              <a:defRPr sz="2175" b="1">
+                <a:solidFill>
+                  <a:srgbClr val="146C56"/>
                 </a:solidFill>
                 <a:latin typeface="DejaVu Sans"/>
                 <a:ea typeface="DejaVu Sans"/>
@@ -3763,15 +4399,15 @@
               </a:defRPr>
             </a:pPr>
             <a:r>
-              <a:rPr sz="2250" b="1">
-                <a:solidFill>
-                  <a:srgbClr val="142D31"/>
+              <a:rPr sz="2175" b="1">
+                <a:solidFill>
+                  <a:srgbClr val="146C56"/>
                 </a:solidFill>
                 <a:latin typeface="DejaVu Sans"/>
                 <a:ea typeface="DejaVu Sans"/>
                 <a:cs typeface="DejaVu Sans"/>
               </a:rPr>
-              <a:t>Client</a:t>
+              <a:t>The freelancer needs to know</a:t>
             </a:r>
           </a:p>
         </p:txBody>
@@ -3781,7 +4417,7 @@
           <p:cNvPr id="4" name="">
             <a:extLst xmlns:a="http://schemas.openxmlformats.org/drawingml/2006/main">
               <a:ext uri="{FF2B5EF4-FFF2-40B4-BE49-F238E27FC236}">
-                <a16:creationId xmlns:a16="http://schemas.microsoft.com/office/drawing/2014/main" id="{322DE67B-29DB-4782-A7B6-8E28307F65C7}"/>
+                <a16:creationId xmlns:a16="http://schemas.microsoft.com/office/drawing/2014/main" id="{C21305E2-99E8-40D3-B5F5-A267F1790AFC}"/>
               </a:ext>
             </a:extLst>
           </p:cNvPr>
@@ -3792,8 +4428,8 @@
         </p:nvSpPr>
         <p:spPr>
           <a:xfrm xmlns:a="http://schemas.openxmlformats.org/drawingml/2006/main">
-            <a:off x="685800" y="3409950"/>
-            <a:ext cx="4905375" cy="2076450"/>
+            <a:off x="628650" y="3219450"/>
+            <a:ext cx="4972050" cy="2476500"/>
           </a:xfrm>
           <a:prstGeom xmlns:a="http://schemas.openxmlformats.org/drawingml/2006/main" prst="rect">
             <a:avLst/>
@@ -3810,9 +4446,9 @@
           <a:lstStyle xmlns:a="http://schemas.openxmlformats.org/drawingml/2006/main"/>
           <a:p xmlns:a="http://schemas.openxmlformats.org/drawingml/2006/main">
             <a:pPr>
-              <a:defRPr sz="2175" b="0">
-                <a:solidFill>
-                  <a:srgbClr val="142D31"/>
+              <a:defRPr sz="2100" b="0">
+                <a:solidFill>
+                  <a:srgbClr val="152A27"/>
                 </a:solidFill>
                 <a:latin typeface="DejaVu Sans"/>
                 <a:ea typeface="DejaVu Sans"/>
@@ -3820,15 +4456,61 @@
               </a:defRPr>
             </a:pPr>
             <a:r>
-              <a:rPr sz="2175" b="0">
-                <a:solidFill>
-                  <a:srgbClr val="142D31"/>
+              <a:rPr sz="2100" b="0">
+                <a:solidFill>
+                  <a:srgbClr val="152A27"/>
                 </a:solidFill>
                 <a:latin typeface="DejaVu Sans"/>
                 <a:ea typeface="DejaVu Sans"/>
                 <a:cs typeface="DejaVu Sans"/>
               </a:rPr>
-              <a:t>Connect the delivered work to the accepted scope. Understand what approving it authorizes.</a:t>
+              <a:t>Which scope did the client accept?</a:t>
+            </a:r>
+          </a:p>
+          <a:p xmlns:a="http://schemas.openxmlformats.org/drawingml/2006/main">
+            <a:pPr>
+              <a:defRPr sz="2100" b="0">
+                <a:solidFill>
+                  <a:srgbClr val="152A27"/>
+                </a:solidFill>
+                <a:latin typeface="DejaVu Sans"/>
+                <a:ea typeface="DejaVu Sans"/>
+                <a:cs typeface="DejaVu Sans"/>
+              </a:defRPr>
+            </a:pPr>
+            <a:r>
+              <a:rPr sz="2100" b="0">
+                <a:solidFill>
+                  <a:srgbClr val="152A27"/>
+                </a:solidFill>
+                <a:latin typeface="DejaVu Sans"/>
+                <a:ea typeface="DejaVu Sans"/>
+                <a:cs typeface="DejaVu Sans"/>
+              </a:rPr>
+              <a:t>Is the payment funded?</a:t>
+            </a:r>
+          </a:p>
+          <a:p xmlns:a="http://schemas.openxmlformats.org/drawingml/2006/main">
+            <a:pPr>
+              <a:defRPr sz="2100" b="0">
+                <a:solidFill>
+                  <a:srgbClr val="152A27"/>
+                </a:solidFill>
+                <a:latin typeface="DejaVu Sans"/>
+                <a:ea typeface="DejaVu Sans"/>
+                <a:cs typeface="DejaVu Sans"/>
+              </a:defRPr>
+            </a:pPr>
+            <a:r>
+              <a:rPr sz="2100" b="0">
+                <a:solidFill>
+                  <a:srgbClr val="152A27"/>
+                </a:solidFill>
+                <a:latin typeface="DejaVu Sans"/>
+                <a:ea typeface="DejaVu Sans"/>
+                <a:cs typeface="DejaVu Sans"/>
+              </a:rPr>
+              <a:t>What remains before settlement?</a:t>
             </a:r>
           </a:p>
         </p:txBody>
@@ -3838,7 +4520,7 @@
           <p:cNvPr id="5" name="">
             <a:extLst xmlns:a="http://schemas.openxmlformats.org/drawingml/2006/main">
               <a:ext uri="{FF2B5EF4-FFF2-40B4-BE49-F238E27FC236}">
-                <a16:creationId xmlns:a16="http://schemas.microsoft.com/office/drawing/2014/main" id="{B51E41F8-FAF8-49F2-81B4-8470B381942B}"/>
+                <a16:creationId xmlns:a16="http://schemas.microsoft.com/office/drawing/2014/main" id="{91E2F8DC-A309-4866-83DC-B3BB6413E225}"/>
               </a:ext>
             </a:extLst>
           </p:cNvPr>
@@ -3849,8 +4531,8 @@
         </p:nvSpPr>
         <p:spPr>
           <a:xfrm xmlns:a="http://schemas.openxmlformats.org/drawingml/2006/main">
-            <a:off x="6400800" y="2781300"/>
-            <a:ext cx="4905375" cy="495300"/>
+            <a:off x="6400800" y="2543175"/>
+            <a:ext cx="4972050" cy="476250"/>
           </a:xfrm>
           <a:prstGeom xmlns:a="http://schemas.openxmlformats.org/drawingml/2006/main" prst="rect">
             <a:avLst/>
@@ -3867,9 +4549,9 @@
           <a:lstStyle xmlns:a="http://schemas.openxmlformats.org/drawingml/2006/main"/>
           <a:p xmlns:a="http://schemas.openxmlformats.org/drawingml/2006/main">
             <a:pPr>
-              <a:defRPr sz="2250" b="1">
-                <a:solidFill>
-                  <a:srgbClr val="142D31"/>
+              <a:defRPr sz="2175" b="1">
+                <a:solidFill>
+                  <a:srgbClr val="146C56"/>
                 </a:solidFill>
                 <a:latin typeface="DejaVu Sans"/>
                 <a:ea typeface="DejaVu Sans"/>
@@ -3877,15 +4559,15 @@
               </a:defRPr>
             </a:pPr>
             <a:r>
-              <a:rPr sz="2250" b="1">
-                <a:solidFill>
-                  <a:srgbClr val="142D31"/>
+              <a:rPr sz="2175" b="1">
+                <a:solidFill>
+                  <a:srgbClr val="146C56"/>
                 </a:solidFill>
                 <a:latin typeface="DejaVu Sans"/>
                 <a:ea typeface="DejaVu Sans"/>
                 <a:cs typeface="DejaVu Sans"/>
               </a:rPr>
-              <a:t>Freelancer</a:t>
+              <a:t>The client needs to know</a:t>
             </a:r>
           </a:p>
         </p:txBody>
@@ -3895,7 +4577,7 @@
           <p:cNvPr id="6" name="">
             <a:extLst xmlns:a="http://schemas.openxmlformats.org/drawingml/2006/main">
               <a:ext uri="{FF2B5EF4-FFF2-40B4-BE49-F238E27FC236}">
-                <a16:creationId xmlns:a16="http://schemas.microsoft.com/office/drawing/2014/main" id="{61554A88-4670-4CBD-B0F1-3D5726247A67}"/>
+                <a16:creationId xmlns:a16="http://schemas.microsoft.com/office/drawing/2014/main" id="{B258942A-DC0D-404A-B5AC-295BE9CFF3E3}"/>
               </a:ext>
             </a:extLst>
           </p:cNvPr>
@@ -3906,8 +4588,8 @@
         </p:nvSpPr>
         <p:spPr>
           <a:xfrm xmlns:a="http://schemas.openxmlformats.org/drawingml/2006/main">
-            <a:off x="6400800" y="3409950"/>
-            <a:ext cx="4905375" cy="2076450"/>
+            <a:off x="6400800" y="3219450"/>
+            <a:ext cx="4972050" cy="2476500"/>
           </a:xfrm>
           <a:prstGeom xmlns:a="http://schemas.openxmlformats.org/drawingml/2006/main" prst="rect">
             <a:avLst/>
@@ -3924,9 +4606,9 @@
           <a:lstStyle xmlns:a="http://schemas.openxmlformats.org/drawingml/2006/main"/>
           <a:p xmlns:a="http://schemas.openxmlformats.org/drawingml/2006/main">
             <a:pPr>
-              <a:defRPr sz="2175" b="0">
-                <a:solidFill>
-                  <a:srgbClr val="142D31"/>
+              <a:defRPr sz="2100" b="0">
+                <a:solidFill>
+                  <a:srgbClr val="152A27"/>
                 </a:solidFill>
                 <a:latin typeface="DejaVu Sans"/>
                 <a:ea typeface="DejaVu Sans"/>
@@ -3934,15 +4616,61 @@
               </a:defRPr>
             </a:pPr>
             <a:r>
-              <a:rPr sz="2175" b="0">
-                <a:solidFill>
-                  <a:srgbClr val="142D31"/>
+              <a:rPr sz="2100" b="0">
+                <a:solidFill>
+                  <a:srgbClr val="152A27"/>
                 </a:solidFill>
                 <a:latin typeface="DejaVu Sans"/>
                 <a:ea typeface="DejaVu Sans"/>
                 <a:cs typeface="DejaVu Sans"/>
               </a:rPr>
-              <a:t>Confirm which terms were accepted and whether payment is funded. Track what remains before settlement.</a:t>
+              <a:t>What did the offer include?</a:t>
+            </a:r>
+          </a:p>
+          <a:p xmlns:a="http://schemas.openxmlformats.org/drawingml/2006/main">
+            <a:pPr>
+              <a:defRPr sz="2100" b="0">
+                <a:solidFill>
+                  <a:srgbClr val="152A27"/>
+                </a:solidFill>
+                <a:latin typeface="DejaVu Sans"/>
+                <a:ea typeface="DejaVu Sans"/>
+                <a:cs typeface="DejaVu Sans"/>
+              </a:defRPr>
+            </a:pPr>
+            <a:r>
+              <a:rPr sz="2100" b="0">
+                <a:solidFill>
+                  <a:srgbClr val="152A27"/>
+                </a:solidFill>
+                <a:latin typeface="DejaVu Sans"/>
+                <a:ea typeface="DejaVu Sans"/>
+                <a:cs typeface="DejaVu Sans"/>
+              </a:rPr>
+              <a:t>Does the delivery match?</a:t>
+            </a:r>
+          </a:p>
+          <a:p xmlns:a="http://schemas.openxmlformats.org/drawingml/2006/main">
+            <a:pPr>
+              <a:defRPr sz="2100" b="0">
+                <a:solidFill>
+                  <a:srgbClr val="152A27"/>
+                </a:solidFill>
+                <a:latin typeface="DejaVu Sans"/>
+                <a:ea typeface="DejaVu Sans"/>
+                <a:cs typeface="DejaVu Sans"/>
+              </a:defRPr>
+            </a:pPr>
+            <a:r>
+              <a:rPr sz="2100" b="0">
+                <a:solidFill>
+                  <a:srgbClr val="152A27"/>
+                </a:solidFill>
+                <a:latin typeface="DejaVu Sans"/>
+                <a:ea typeface="DejaVu Sans"/>
+                <a:cs typeface="DejaVu Sans"/>
+              </a:rPr>
+              <a:t>What does approval authorize?</a:t>
             </a:r>
           </a:p>
         </p:txBody>
@@ -3952,7 +4680,7 @@
           <p:cNvPr id="7" name="">
             <a:extLst xmlns:a="http://schemas.openxmlformats.org/drawingml/2006/main">
               <a:ext uri="{FF2B5EF4-FFF2-40B4-BE49-F238E27FC236}">
-                <a16:creationId xmlns:a16="http://schemas.microsoft.com/office/drawing/2014/main" id="{48D76892-98CF-4F3C-A44D-79EF68C2621A}"/>
+                <a16:creationId xmlns:a16="http://schemas.microsoft.com/office/drawing/2014/main" id="{36CD1408-0B7D-40E7-940F-B3041E46CEC2}"/>
               </a:ext>
             </a:extLst>
           </p:cNvPr>
@@ -3963,8 +4691,8 @@
         </p:nvSpPr>
         <p:spPr>
           <a:xfrm xmlns:a="http://schemas.openxmlformats.org/drawingml/2006/main">
-            <a:off x="685800" y="6038850"/>
-            <a:ext cx="10401300" cy="609600"/>
+            <a:off x="628650" y="6115050"/>
+            <a:ext cx="10534650" cy="628650"/>
           </a:xfrm>
           <a:prstGeom xmlns:a="http://schemas.openxmlformats.org/drawingml/2006/main" prst="rect">
             <a:avLst/>
@@ -3981,9 +4709,9 @@
           <a:lstStyle xmlns:a="http://schemas.openxmlformats.org/drawingml/2006/main"/>
           <a:p xmlns:a="http://schemas.openxmlformats.org/drawingml/2006/main">
             <a:pPr>
-              <a:defRPr sz="1425" b="0">
-                <a:solidFill>
-                  <a:srgbClr val="52646B"/>
+              <a:defRPr sz="1350" b="0">
+                <a:solidFill>
+                  <a:srgbClr val="54645E"/>
                 </a:solidFill>
                 <a:latin typeface="DejaVu Sans"/>
                 <a:ea typeface="DejaVu Sans"/>
@@ -3991,15 +4719,15 @@
               </a:defRPr>
             </a:pPr>
             <a:r>
-              <a:rPr sz="1425" b="0">
-                <a:solidFill>
-                  <a:srgbClr val="52646B"/>
+              <a:rPr sz="1350" b="0">
+                <a:solidFill>
+                  <a:srgbClr val="54645E"/>
                 </a:solidFill>
                 <a:latin typeface="DejaVu Sans"/>
                 <a:ea typeface="DejaVu Sans"/>
                 <a:cs typeface="DejaVu Sans"/>
               </a:rPr>
-              <a:t>Initial use case: one client, one freelancer, one bounded digital deliverable.</a:t>
+              <a:t>Initial use case: one client and one freelancer completing a defined digital task.</a:t>
             </a:r>
           </a:p>
         </p:txBody>
@@ -4007,7 +4735,7 @@
     </p:spTree>
     <p:extLst>
       <p:ext uri="{BB962C8B-B14F-4D97-AF65-F5344CB8AC3E}">
-        <p14:creationId xmlns:p14="http://schemas.microsoft.com/office/powerpoint/2010/main" val="2097399756"/>
+        <p14:creationId xmlns:p14="http://schemas.microsoft.com/office/powerpoint/2010/main" val="899221062"/>
       </p:ext>
     </p:extLst>
   </p:cSld>
@@ -4020,7 +4748,7 @@
     <p:bg>
       <p:bgPr>
         <a:solidFill xmlns:a="http://schemas.openxmlformats.org/drawingml/2006/main">
-          <a:srgbClr val="FFFDFA"/>
+          <a:srgbClr val="FAFAF6"/>
         </a:solidFill>
       </p:bgPr>
     </p:bg>
@@ -4035,10 +4763,10 @@
       </p:grpSpPr>
       <p:sp>
         <p:nvSpPr>
-          <p:cNvPr id="12" name="">
+          <p:cNvPr id="16" name="">
             <a:extLst xmlns:a="http://schemas.openxmlformats.org/drawingml/2006/main">
               <a:ext uri="{FF2B5EF4-FFF2-40B4-BE49-F238E27FC236}">
-                <a16:creationId xmlns:a16="http://schemas.microsoft.com/office/drawing/2014/main" id="{3DBEB9F2-14DF-40ED-B859-188654132BE9}"/>
+                <a16:creationId xmlns:a16="http://schemas.microsoft.com/office/drawing/2014/main" id="{1790648F-6B4D-4658-98D7-E511F5E93A2A}"/>
               </a:ext>
             </a:extLst>
           </p:cNvPr>
@@ -4049,8 +4777,8 @@
         </p:nvSpPr>
         <p:spPr>
           <a:xfrm xmlns:a="http://schemas.openxmlformats.org/drawingml/2006/main">
-            <a:off x="685800" y="457200"/>
-            <a:ext cx="10820400" cy="895350"/>
+            <a:off x="609600" y="447675"/>
+            <a:ext cx="10934700" cy="914400"/>
           </a:xfrm>
           <a:prstGeom xmlns:a="http://schemas.openxmlformats.org/drawingml/2006/main" prst="rect">
             <a:avLst/>
@@ -4067,9 +4795,9 @@
           <a:lstStyle xmlns:a="http://schemas.openxmlformats.org/drawingml/2006/main"/>
           <a:p xmlns:a="http://schemas.openxmlformats.org/drawingml/2006/main">
             <a:pPr>
-              <a:defRPr sz="3600" b="1">
-                <a:solidFill>
-                  <a:srgbClr val="142D31"/>
+              <a:defRPr sz="3675" b="1">
+                <a:solidFill>
+                  <a:srgbClr val="152A27"/>
                 </a:solidFill>
                 <a:latin typeface="DejaVu Sans"/>
                 <a:ea typeface="DejaVu Sans"/>
@@ -4077,15 +4805,15 @@
               </a:defRPr>
             </a:pPr>
             <a:r>
-              <a:rPr sz="3600" b="1">
-                <a:solidFill>
-                  <a:srgbClr val="142D31"/>
+              <a:rPr sz="3675" b="1">
+                <a:solidFill>
+                  <a:srgbClr val="152A27"/>
                 </a:solidFill>
                 <a:latin typeface="DejaVu Sans"/>
                 <a:ea typeface="DejaVu Sans"/>
                 <a:cs typeface="DejaVu Sans"/>
               </a:rPr>
-              <a:t>The VINSS workflow</a:t>
+              <a:t>One room for the deal</a:t>
             </a:r>
           </a:p>
         </p:txBody>
@@ -4095,7 +4823,7 @@
           <p:cNvPr id="2" name="">
             <a:extLst xmlns:a="http://schemas.openxmlformats.org/drawingml/2006/main">
               <a:ext uri="{FF2B5EF4-FFF2-40B4-BE49-F238E27FC236}">
-                <a16:creationId xmlns:a16="http://schemas.microsoft.com/office/drawing/2014/main" id="{93B4A61B-8BB9-40A3-BE85-0B0D1C1188E4}"/>
+                <a16:creationId xmlns:a16="http://schemas.microsoft.com/office/drawing/2014/main" id="{7C692B9F-33ED-470C-B149-593C1D793EF9}"/>
               </a:ext>
             </a:extLst>
           </p:cNvPr>
@@ -4106,8 +4834,8 @@
         </p:nvSpPr>
         <p:spPr>
           <a:xfrm xmlns:a="http://schemas.openxmlformats.org/drawingml/2006/main">
-            <a:off x="685800" y="1447800"/>
-            <a:ext cx="10648950" cy="781050"/>
+            <a:off x="628650" y="1476375"/>
+            <a:ext cx="10934700" cy="685800"/>
           </a:xfrm>
           <a:prstGeom xmlns:a="http://schemas.openxmlformats.org/drawingml/2006/main" prst="rect">
             <a:avLst/>
@@ -4124,9 +4852,9 @@
           <a:lstStyle xmlns:a="http://schemas.openxmlformats.org/drawingml/2006/main"/>
           <a:p xmlns:a="http://schemas.openxmlformats.org/drawingml/2006/main">
             <a:pPr>
-              <a:defRPr sz="2250" b="0">
-                <a:solidFill>
-                  <a:srgbClr val="087F80"/>
+              <a:defRPr sz="2100" b="0">
+                <a:solidFill>
+                  <a:srgbClr val="146C56"/>
                 </a:solidFill>
                 <a:latin typeface="DejaVu Sans"/>
                 <a:ea typeface="DejaVu Sans"/>
@@ -4134,15 +4862,15 @@
               </a:defRPr>
             </a:pPr>
             <a:r>
-              <a:rPr sz="2250" b="0">
-                <a:solidFill>
-                  <a:srgbClr val="087F80"/>
+              <a:rPr sz="2100" b="0">
+                <a:solidFill>
+                  <a:srgbClr val="146C56"/>
                 </a:solidFill>
                 <a:latin typeface="DejaVu Sans"/>
                 <a:ea typeface="DejaVu Sans"/>
                 <a:cs typeface="DejaVu Sans"/>
               </a:rPr>
-              <a:t>A private room connects work terms to the ledger record.</a:t>
+              <a:t>An invite link or QR brings both people into the same workflow.</a:t>
             </a:r>
           </a:p>
         </p:txBody>
@@ -4152,7 +4880,7 @@
           <p:cNvPr id="3" name="">
             <a:extLst xmlns:a="http://schemas.openxmlformats.org/drawingml/2006/main">
               <a:ext uri="{FF2B5EF4-FFF2-40B4-BE49-F238E27FC236}">
-                <a16:creationId xmlns:a16="http://schemas.microsoft.com/office/drawing/2014/main" id="{110674BF-D0A7-4E15-A7D1-D9866C58E61E}"/>
+                <a16:creationId xmlns:a16="http://schemas.microsoft.com/office/drawing/2014/main" id="{6EDD79BC-87CB-4A98-9D2C-B11667117C9F}"/>
               </a:ext>
             </a:extLst>
           </p:cNvPr>
@@ -4163,8 +4891,8 @@
         </p:nvSpPr>
         <p:spPr>
           <a:xfrm xmlns:a="http://schemas.openxmlformats.org/drawingml/2006/main">
-            <a:off x="685800" y="2590800"/>
-            <a:ext cx="4905375" cy="514350"/>
+            <a:off x="628650" y="2457450"/>
+            <a:ext cx="714375" cy="514350"/>
           </a:xfrm>
           <a:prstGeom xmlns:a="http://schemas.openxmlformats.org/drawingml/2006/main" prst="rect">
             <a:avLst/>
@@ -4181,9 +4909,9 @@
           <a:lstStyle xmlns:a="http://schemas.openxmlformats.org/drawingml/2006/main"/>
           <a:p xmlns:a="http://schemas.openxmlformats.org/drawingml/2006/main">
             <a:pPr>
-              <a:defRPr sz="2250" b="1">
-                <a:solidFill>
-                  <a:srgbClr val="142D31"/>
+              <a:defRPr sz="2700" b="1">
+                <a:solidFill>
+                  <a:srgbClr val="146C56"/>
                 </a:solidFill>
                 <a:latin typeface="DejaVu Sans"/>
                 <a:ea typeface="DejaVu Sans"/>
@@ -4191,15 +4919,15 @@
               </a:defRPr>
             </a:pPr>
             <a:r>
-              <a:rPr sz="2250" b="1">
-                <a:solidFill>
-                  <a:srgbClr val="142D31"/>
+              <a:rPr sz="2700" b="1">
+                <a:solidFill>
+                  <a:srgbClr val="146C56"/>
                 </a:solidFill>
                 <a:latin typeface="DejaVu Sans"/>
                 <a:ea typeface="DejaVu Sans"/>
                 <a:cs typeface="DejaVu Sans"/>
               </a:rPr>
-              <a:t>01  Invite</a:t>
+              <a:t>01</a:t>
             </a:r>
           </a:p>
         </p:txBody>
@@ -4209,7 +4937,7 @@
           <p:cNvPr id="4" name="">
             <a:extLst xmlns:a="http://schemas.openxmlformats.org/drawingml/2006/main">
               <a:ext uri="{FF2B5EF4-FFF2-40B4-BE49-F238E27FC236}">
-                <a16:creationId xmlns:a16="http://schemas.microsoft.com/office/drawing/2014/main" id="{CED14195-BEB0-48C1-9FFB-FB37A542C44D}"/>
+                <a16:creationId xmlns:a16="http://schemas.microsoft.com/office/drawing/2014/main" id="{BC7D3EAA-3B55-43A0-A025-F67322843C9D}"/>
               </a:ext>
             </a:extLst>
           </p:cNvPr>
@@ -4220,8 +4948,8 @@
         </p:nvSpPr>
         <p:spPr>
           <a:xfrm xmlns:a="http://schemas.openxmlformats.org/drawingml/2006/main">
-            <a:off x="685800" y="3181350"/>
-            <a:ext cx="4905375" cy="857250"/>
+            <a:off x="1428750" y="2457450"/>
+            <a:ext cx="4343400" cy="457200"/>
           </a:xfrm>
           <a:prstGeom xmlns:a="http://schemas.openxmlformats.org/drawingml/2006/main" prst="rect">
             <a:avLst/>
@@ -4238,9 +4966,9 @@
           <a:lstStyle xmlns:a="http://schemas.openxmlformats.org/drawingml/2006/main"/>
           <a:p xmlns:a="http://schemas.openxmlformats.org/drawingml/2006/main">
             <a:pPr>
-              <a:defRPr sz="1950" b="0">
-                <a:solidFill>
-                  <a:srgbClr val="142D31"/>
+              <a:defRPr sz="2250" b="1">
+                <a:solidFill>
+                  <a:srgbClr val="152A27"/>
                 </a:solidFill>
                 <a:latin typeface="DejaVu Sans"/>
                 <a:ea typeface="DejaVu Sans"/>
@@ -4248,15 +4976,15 @@
               </a:defRPr>
             </a:pPr>
             <a:r>
-              <a:rPr sz="1950" b="0">
-                <a:solidFill>
-                  <a:srgbClr val="142D31"/>
+              <a:rPr sz="2250" b="1">
+                <a:solidFill>
+                  <a:srgbClr val="152A27"/>
                 </a:solidFill>
                 <a:latin typeface="DejaVu Sans"/>
                 <a:ea typeface="DejaVu Sans"/>
                 <a:cs typeface="DejaVu Sans"/>
               </a:rPr>
-              <a:t>Open a link or QR and connect a Canton wallet.</a:t>
+              <a:t>Discuss and agree</a:t>
             </a:r>
           </a:p>
         </p:txBody>
@@ -4266,7 +4994,7 @@
           <p:cNvPr id="5" name="">
             <a:extLst xmlns:a="http://schemas.openxmlformats.org/drawingml/2006/main">
               <a:ext uri="{FF2B5EF4-FFF2-40B4-BE49-F238E27FC236}">
-                <a16:creationId xmlns:a16="http://schemas.microsoft.com/office/drawing/2014/main" id="{13A991CD-E948-44AE-9DCF-3148D3D84BF4}"/>
+                <a16:creationId xmlns:a16="http://schemas.microsoft.com/office/drawing/2014/main" id="{AFAF25F7-4762-4D0C-91A4-F09BCB4E7195}"/>
               </a:ext>
             </a:extLst>
           </p:cNvPr>
@@ -4277,8 +5005,8 @@
         </p:nvSpPr>
         <p:spPr>
           <a:xfrm xmlns:a="http://schemas.openxmlformats.org/drawingml/2006/main">
-            <a:off x="6257925" y="2590800"/>
-            <a:ext cx="4905375" cy="514350"/>
+            <a:off x="1428750" y="3048000"/>
+            <a:ext cx="4267200" cy="952500"/>
           </a:xfrm>
           <a:prstGeom xmlns:a="http://schemas.openxmlformats.org/drawingml/2006/main" prst="rect">
             <a:avLst/>
@@ -4295,9 +5023,9 @@
           <a:lstStyle xmlns:a="http://schemas.openxmlformats.org/drawingml/2006/main"/>
           <a:p xmlns:a="http://schemas.openxmlformats.org/drawingml/2006/main">
             <a:pPr>
-              <a:defRPr sz="2250" b="1">
-                <a:solidFill>
-                  <a:srgbClr val="142D31"/>
+              <a:defRPr sz="1950" b="0">
+                <a:solidFill>
+                  <a:srgbClr val="152A27"/>
                 </a:solidFill>
                 <a:latin typeface="DejaVu Sans"/>
                 <a:ea typeface="DejaVu Sans"/>
@@ -4305,15 +5033,15 @@
               </a:defRPr>
             </a:pPr>
             <a:r>
-              <a:rPr sz="2250" b="1">
-                <a:solidFill>
-                  <a:srgbClr val="142D31"/>
+              <a:rPr sz="1950" b="0">
+                <a:solidFill>
+                  <a:srgbClr val="152A27"/>
                 </a:solidFill>
                 <a:latin typeface="DejaVu Sans"/>
                 <a:ea typeface="DejaVu Sans"/>
                 <a:cs typeface="DejaVu Sans"/>
               </a:rPr>
-              <a:t>02  Agree</a:t>
+              <a:t>Private messages lead to an accepted offer.</a:t>
             </a:r>
           </a:p>
         </p:txBody>
@@ -4323,7 +5051,7 @@
           <p:cNvPr id="6" name="">
             <a:extLst xmlns:a="http://schemas.openxmlformats.org/drawingml/2006/main">
               <a:ext uri="{FF2B5EF4-FFF2-40B4-BE49-F238E27FC236}">
-                <a16:creationId xmlns:a16="http://schemas.microsoft.com/office/drawing/2014/main" id="{D6E57AD3-7702-40A2-9486-5BA21BA163ED}"/>
+                <a16:creationId xmlns:a16="http://schemas.microsoft.com/office/drawing/2014/main" id="{A9A18A10-DC66-4706-85E3-9C6854ED2318}"/>
               </a:ext>
             </a:extLst>
           </p:cNvPr>
@@ -4334,8 +5062,8 @@
         </p:nvSpPr>
         <p:spPr>
           <a:xfrm xmlns:a="http://schemas.openxmlformats.org/drawingml/2006/main">
-            <a:off x="6257925" y="3181350"/>
-            <a:ext cx="4905375" cy="857250"/>
+            <a:off x="6343650" y="2457450"/>
+            <a:ext cx="714375" cy="514350"/>
           </a:xfrm>
           <a:prstGeom xmlns:a="http://schemas.openxmlformats.org/drawingml/2006/main" prst="rect">
             <a:avLst/>
@@ -4352,9 +5080,9 @@
           <a:lstStyle xmlns:a="http://schemas.openxmlformats.org/drawingml/2006/main"/>
           <a:p xmlns:a="http://schemas.openxmlformats.org/drawingml/2006/main">
             <a:pPr>
-              <a:defRPr sz="1950" b="0">
-                <a:solidFill>
-                  <a:srgbClr val="142D31"/>
+              <a:defRPr sz="2700" b="1">
+                <a:solidFill>
+                  <a:srgbClr val="146C56"/>
                 </a:solidFill>
                 <a:latin typeface="DejaVu Sans"/>
                 <a:ea typeface="DejaVu Sans"/>
@@ -4362,15 +5090,15 @@
               </a:defRPr>
             </a:pPr>
             <a:r>
-              <a:rPr sz="1950" b="0">
-                <a:solidFill>
-                  <a:srgbClr val="142D31"/>
+              <a:rPr sz="2700" b="1">
+                <a:solidFill>
+                  <a:srgbClr val="146C56"/>
                 </a:solidFill>
                 <a:latin typeface="DejaVu Sans"/>
                 <a:ea typeface="DejaVu Sans"/>
                 <a:cs typeface="DejaVu Sans"/>
               </a:rPr>
-              <a:t>Discuss work and accept an offer with private terms.</a:t>
+              <a:t>02</a:t>
             </a:r>
           </a:p>
         </p:txBody>
@@ -4380,7 +5108,7 @@
           <p:cNvPr id="7" name="">
             <a:extLst xmlns:a="http://schemas.openxmlformats.org/drawingml/2006/main">
               <a:ext uri="{FF2B5EF4-FFF2-40B4-BE49-F238E27FC236}">
-                <a16:creationId xmlns:a16="http://schemas.microsoft.com/office/drawing/2014/main" id="{4B221EC3-9205-420C-AEA2-ACB3DA9FFD8D}"/>
+                <a16:creationId xmlns:a16="http://schemas.microsoft.com/office/drawing/2014/main" id="{3E0F0ACA-093D-472D-99CE-5055B1129A93}"/>
               </a:ext>
             </a:extLst>
           </p:cNvPr>
@@ -4391,8 +5119,8 @@
         </p:nvSpPr>
         <p:spPr>
           <a:xfrm xmlns:a="http://schemas.openxmlformats.org/drawingml/2006/main">
-            <a:off x="685800" y="4171950"/>
-            <a:ext cx="4905375" cy="514350"/>
+            <a:off x="7143750" y="2457450"/>
+            <a:ext cx="4343400" cy="457200"/>
           </a:xfrm>
           <a:prstGeom xmlns:a="http://schemas.openxmlformats.org/drawingml/2006/main" prst="rect">
             <a:avLst/>
@@ -4411,7 +5139,7 @@
             <a:pPr>
               <a:defRPr sz="2250" b="1">
                 <a:solidFill>
-                  <a:srgbClr val="142D31"/>
+                  <a:srgbClr val="152A27"/>
                 </a:solidFill>
                 <a:latin typeface="DejaVu Sans"/>
                 <a:ea typeface="DejaVu Sans"/>
@@ -4421,13 +5149,13 @@
             <a:r>
               <a:rPr sz="2250" b="1">
                 <a:solidFill>
-                  <a:srgbClr val="142D31"/>
+                  <a:srgbClr val="152A27"/>
                 </a:solidFill>
                 <a:latin typeface="DejaVu Sans"/>
                 <a:ea typeface="DejaVu Sans"/>
                 <a:cs typeface="DejaVu Sans"/>
               </a:rPr>
-              <a:t>03  Fund escrow</a:t>
+              <a:t>Fund escrow</a:t>
             </a:r>
           </a:p>
         </p:txBody>
@@ -4437,7 +5165,7 @@
           <p:cNvPr id="8" name="">
             <a:extLst xmlns:a="http://schemas.openxmlformats.org/drawingml/2006/main">
               <a:ext uri="{FF2B5EF4-FFF2-40B4-BE49-F238E27FC236}">
-                <a16:creationId xmlns:a16="http://schemas.microsoft.com/office/drawing/2014/main" id="{54B67E51-7AE6-4C7B-BADC-889921447B67}"/>
+                <a16:creationId xmlns:a16="http://schemas.microsoft.com/office/drawing/2014/main" id="{60780201-B887-43F9-BC24-50798C9BB306}"/>
               </a:ext>
             </a:extLst>
           </p:cNvPr>
@@ -4448,8 +5176,8 @@
         </p:nvSpPr>
         <p:spPr>
           <a:xfrm xmlns:a="http://schemas.openxmlformats.org/drawingml/2006/main">
-            <a:off x="685800" y="4762500"/>
-            <a:ext cx="4905375" cy="857250"/>
+            <a:off x="7143750" y="3048000"/>
+            <a:ext cx="4267200" cy="952500"/>
           </a:xfrm>
           <a:prstGeom xmlns:a="http://schemas.openxmlformats.org/drawingml/2006/main" prst="rect">
             <a:avLst/>
@@ -4468,7 +5196,7 @@
             <a:pPr>
               <a:defRPr sz="1950" b="0">
                 <a:solidFill>
-                  <a:srgbClr val="142D31"/>
+                  <a:srgbClr val="152A27"/>
                 </a:solidFill>
                 <a:latin typeface="DejaVu Sans"/>
                 <a:ea typeface="DejaVu Sans"/>
@@ -4478,13 +5206,13 @@
             <a:r>
               <a:rPr sz="1950" b="0">
                 <a:solidFill>
-                  <a:srgbClr val="142D31"/>
+                  <a:srgbClr val="152A27"/>
                 </a:solidFill>
                 <a:latin typeface="DejaVu Sans"/>
                 <a:ea typeface="DejaVu Sans"/>
                 <a:cs typeface="DejaVu Sans"/>
               </a:rPr>
-              <a:t>Create the allocation-backed escrow and submit work.</a:t>
+              <a:t>The client authorizes the payment allocation.</a:t>
             </a:r>
           </a:p>
         </p:txBody>
@@ -4494,7 +5222,7 @@
           <p:cNvPr id="9" name="">
             <a:extLst xmlns:a="http://schemas.openxmlformats.org/drawingml/2006/main">
               <a:ext uri="{FF2B5EF4-FFF2-40B4-BE49-F238E27FC236}">
-                <a16:creationId xmlns:a16="http://schemas.microsoft.com/office/drawing/2014/main" id="{5FD382D6-86C0-4D3C-87B8-4919F927958B}"/>
+                <a16:creationId xmlns:a16="http://schemas.microsoft.com/office/drawing/2014/main" id="{38184A05-FDD0-4BC1-AE9E-6BA3DB7E327A}"/>
               </a:ext>
             </a:extLst>
           </p:cNvPr>
@@ -4505,8 +5233,8 @@
         </p:nvSpPr>
         <p:spPr>
           <a:xfrm xmlns:a="http://schemas.openxmlformats.org/drawingml/2006/main">
-            <a:off x="6257925" y="4171950"/>
-            <a:ext cx="4905375" cy="514350"/>
+            <a:off x="628650" y="4095750"/>
+            <a:ext cx="714375" cy="514350"/>
           </a:xfrm>
           <a:prstGeom xmlns:a="http://schemas.openxmlformats.org/drawingml/2006/main" prst="rect">
             <a:avLst/>
@@ -4523,9 +5251,9 @@
           <a:lstStyle xmlns:a="http://schemas.openxmlformats.org/drawingml/2006/main"/>
           <a:p xmlns:a="http://schemas.openxmlformats.org/drawingml/2006/main">
             <a:pPr>
-              <a:defRPr sz="2250" b="1">
-                <a:solidFill>
-                  <a:srgbClr val="142D31"/>
+              <a:defRPr sz="2700" b="1">
+                <a:solidFill>
+                  <a:srgbClr val="146C56"/>
                 </a:solidFill>
                 <a:latin typeface="DejaVu Sans"/>
                 <a:ea typeface="DejaVu Sans"/>
@@ -4533,15 +5261,15 @@
               </a:defRPr>
             </a:pPr>
             <a:r>
-              <a:rPr sz="2250" b="1">
-                <a:solidFill>
-                  <a:srgbClr val="142D31"/>
+              <a:rPr sz="2700" b="1">
+                <a:solidFill>
+                  <a:srgbClr val="146C56"/>
                 </a:solidFill>
                 <a:latin typeface="DejaVu Sans"/>
                 <a:ea typeface="DejaVu Sans"/>
                 <a:cs typeface="DejaVu Sans"/>
               </a:rPr>
-              <a:t>04  Review and settle</a:t>
+              <a:t>03</a:t>
             </a:r>
           </a:p>
         </p:txBody>
@@ -4551,7 +5279,7 @@
           <p:cNvPr id="10" name="">
             <a:extLst xmlns:a="http://schemas.openxmlformats.org/drawingml/2006/main">
               <a:ext uri="{FF2B5EF4-FFF2-40B4-BE49-F238E27FC236}">
-                <a16:creationId xmlns:a16="http://schemas.microsoft.com/office/drawing/2014/main" id="{317E7215-A644-4D60-A733-5D9FA87D7B57}"/>
+                <a16:creationId xmlns:a16="http://schemas.microsoft.com/office/drawing/2014/main" id="{2EFE1343-5B0A-4350-A7CE-A5937DFDD817}"/>
               </a:ext>
             </a:extLst>
           </p:cNvPr>
@@ -4562,8 +5290,8 @@
         </p:nvSpPr>
         <p:spPr>
           <a:xfrm xmlns:a="http://schemas.openxmlformats.org/drawingml/2006/main">
-            <a:off x="6257925" y="4762500"/>
-            <a:ext cx="4905375" cy="857250"/>
+            <a:off x="1428750" y="4095750"/>
+            <a:ext cx="4343400" cy="457200"/>
           </a:xfrm>
           <a:prstGeom xmlns:a="http://schemas.openxmlformats.org/drawingml/2006/main" prst="rect">
             <a:avLst/>
@@ -4580,9 +5308,9 @@
           <a:lstStyle xmlns:a="http://schemas.openxmlformats.org/drawingml/2006/main"/>
           <a:p xmlns:a="http://schemas.openxmlformats.org/drawingml/2006/main">
             <a:pPr>
-              <a:defRPr sz="1950" b="0">
-                <a:solidFill>
-                  <a:srgbClr val="142D31"/>
+              <a:defRPr sz="2250" b="1">
+                <a:solidFill>
+                  <a:srgbClr val="152A27"/>
                 </a:solidFill>
                 <a:latin typeface="DejaVu Sans"/>
                 <a:ea typeface="DejaVu Sans"/>
@@ -4590,15 +5318,15 @@
               </a:defRPr>
             </a:pPr>
             <a:r>
-              <a:rPr sz="1950" b="0">
-                <a:solidFill>
-                  <a:srgbClr val="142D31"/>
+              <a:rPr sz="2250" b="1">
+                <a:solidFill>
+                  <a:srgbClr val="152A27"/>
                 </a:solidFill>
                 <a:latin typeface="DejaVu Sans"/>
                 <a:ea typeface="DejaVu Sans"/>
                 <a:cs typeface="DejaVu Sans"/>
               </a:rPr>
-              <a:t>Review delivery, approve and produce a settlement receipt.</a:t>
+              <a:t>Deliver and review</a:t>
             </a:r>
           </a:p>
         </p:txBody>
@@ -4608,7 +5336,7 @@
           <p:cNvPr id="11" name="">
             <a:extLst xmlns:a="http://schemas.openxmlformats.org/drawingml/2006/main">
               <a:ext uri="{FF2B5EF4-FFF2-40B4-BE49-F238E27FC236}">
-                <a16:creationId xmlns:a16="http://schemas.microsoft.com/office/drawing/2014/main" id="{EF361125-CC23-42D7-B66D-CA5E3F6A7CE9}"/>
+                <a16:creationId xmlns:a16="http://schemas.microsoft.com/office/drawing/2014/main" id="{BCF85C14-66F4-409F-AED9-2873CF04AA55}"/>
               </a:ext>
             </a:extLst>
           </p:cNvPr>
@@ -4619,8 +5347,8 @@
         </p:nvSpPr>
         <p:spPr>
           <a:xfrm xmlns:a="http://schemas.openxmlformats.org/drawingml/2006/main">
-            <a:off x="685800" y="6038850"/>
-            <a:ext cx="10401300" cy="609600"/>
+            <a:off x="1428750" y="4686300"/>
+            <a:ext cx="4267200" cy="952500"/>
           </a:xfrm>
           <a:prstGeom xmlns:a="http://schemas.openxmlformats.org/drawingml/2006/main" prst="rect">
             <a:avLst/>
@@ -4637,9 +5365,9 @@
           <a:lstStyle xmlns:a="http://schemas.openxmlformats.org/drawingml/2006/main"/>
           <a:p xmlns:a="http://schemas.openxmlformats.org/drawingml/2006/main">
             <a:pPr>
-              <a:defRPr sz="1425" b="0">
-                <a:solidFill>
-                  <a:srgbClr val="52646B"/>
+              <a:defRPr sz="1950" b="0">
+                <a:solidFill>
+                  <a:srgbClr val="152A27"/>
                 </a:solidFill>
                 <a:latin typeface="DejaVu Sans"/>
                 <a:ea typeface="DejaVu Sans"/>
@@ -4647,15 +5375,243 @@
               </a:defRPr>
             </a:pPr>
             <a:r>
-              <a:rPr sz="1425" b="0">
-                <a:solidFill>
-                  <a:srgbClr val="52646B"/>
+              <a:rPr sz="1950" b="0">
+                <a:solidFill>
+                  <a:srgbClr val="152A27"/>
                 </a:solidFill>
                 <a:latin typeface="DejaVu Sans"/>
                 <a:ea typeface="DejaVu Sans"/>
                 <a:cs typeface="DejaVu Sans"/>
               </a:rPr>
-              <a:t>Groups support encrypted discussion. Offers and escrow remain between two Parties.</a:t>
+              <a:t>The freelancer submits work. The client approves or requests revision.</a:t>
+            </a:r>
+          </a:p>
+        </p:txBody>
+      </p:sp>
+      <p:sp>
+        <p:nvSpPr>
+          <p:cNvPr id="12" name="">
+            <a:extLst xmlns:a="http://schemas.openxmlformats.org/drawingml/2006/main">
+              <a:ext uri="{FF2B5EF4-FFF2-40B4-BE49-F238E27FC236}">
+                <a16:creationId xmlns:a16="http://schemas.microsoft.com/office/drawing/2014/main" id="{4D61A6EE-38B4-46B6-AEBA-385E0EC8634A}"/>
+              </a:ext>
+            </a:extLst>
+          </p:cNvPr>
+          <p:cNvSpPr>
+            <a:spLocks xmlns:a="http://schemas.openxmlformats.org/drawingml/2006/main" noGrp="1"/>
+          </p:cNvSpPr>
+          <p:nvPr/>
+        </p:nvSpPr>
+        <p:spPr>
+          <a:xfrm xmlns:a="http://schemas.openxmlformats.org/drawingml/2006/main">
+            <a:off x="6343650" y="4095750"/>
+            <a:ext cx="714375" cy="514350"/>
+          </a:xfrm>
+          <a:prstGeom xmlns:a="http://schemas.openxmlformats.org/drawingml/2006/main" prst="rect">
+            <a:avLst/>
+          </a:prstGeom>
+          <a:noFill xmlns:a="http://schemas.openxmlformats.org/drawingml/2006/main"/>
+          <a:ln xmlns:a="http://schemas.openxmlformats.org/drawingml/2006/main" w="0">
+            <a:noFill/>
+          </a:ln>
+        </p:spPr>
+        <p:txBody>
+          <a:bodyPr xmlns:a="http://schemas.openxmlformats.org/drawingml/2006/main">
+            <a:noAutofit/>
+          </a:bodyPr>
+          <a:lstStyle xmlns:a="http://schemas.openxmlformats.org/drawingml/2006/main"/>
+          <a:p xmlns:a="http://schemas.openxmlformats.org/drawingml/2006/main">
+            <a:pPr>
+              <a:defRPr sz="2700" b="1">
+                <a:solidFill>
+                  <a:srgbClr val="146C56"/>
+                </a:solidFill>
+                <a:latin typeface="DejaVu Sans"/>
+                <a:ea typeface="DejaVu Sans"/>
+                <a:cs typeface="DejaVu Sans"/>
+              </a:defRPr>
+            </a:pPr>
+            <a:r>
+              <a:rPr sz="2700" b="1">
+                <a:solidFill>
+                  <a:srgbClr val="146C56"/>
+                </a:solidFill>
+                <a:latin typeface="DejaVu Sans"/>
+                <a:ea typeface="DejaVu Sans"/>
+                <a:cs typeface="DejaVu Sans"/>
+              </a:rPr>
+              <a:t>04</a:t>
+            </a:r>
+          </a:p>
+        </p:txBody>
+      </p:sp>
+      <p:sp>
+        <p:nvSpPr>
+          <p:cNvPr id="13" name="">
+            <a:extLst xmlns:a="http://schemas.openxmlformats.org/drawingml/2006/main">
+              <a:ext uri="{FF2B5EF4-FFF2-40B4-BE49-F238E27FC236}">
+                <a16:creationId xmlns:a16="http://schemas.microsoft.com/office/drawing/2014/main" id="{21615EBC-2C5F-44AF-B4C2-667FE70CF57B}"/>
+              </a:ext>
+            </a:extLst>
+          </p:cNvPr>
+          <p:cNvSpPr>
+            <a:spLocks xmlns:a="http://schemas.openxmlformats.org/drawingml/2006/main" noGrp="1"/>
+          </p:cNvSpPr>
+          <p:nvPr/>
+        </p:nvSpPr>
+        <p:spPr>
+          <a:xfrm xmlns:a="http://schemas.openxmlformats.org/drawingml/2006/main">
+            <a:off x="7143750" y="4095750"/>
+            <a:ext cx="4343400" cy="457200"/>
+          </a:xfrm>
+          <a:prstGeom xmlns:a="http://schemas.openxmlformats.org/drawingml/2006/main" prst="rect">
+            <a:avLst/>
+          </a:prstGeom>
+          <a:noFill xmlns:a="http://schemas.openxmlformats.org/drawingml/2006/main"/>
+          <a:ln xmlns:a="http://schemas.openxmlformats.org/drawingml/2006/main" w="0">
+            <a:noFill/>
+          </a:ln>
+        </p:spPr>
+        <p:txBody>
+          <a:bodyPr xmlns:a="http://schemas.openxmlformats.org/drawingml/2006/main">
+            <a:noAutofit/>
+          </a:bodyPr>
+          <a:lstStyle xmlns:a="http://schemas.openxmlformats.org/drawingml/2006/main"/>
+          <a:p xmlns:a="http://schemas.openxmlformats.org/drawingml/2006/main">
+            <a:pPr>
+              <a:defRPr sz="2250" b="1">
+                <a:solidFill>
+                  <a:srgbClr val="152A27"/>
+                </a:solidFill>
+                <a:latin typeface="DejaVu Sans"/>
+                <a:ea typeface="DejaVu Sans"/>
+                <a:cs typeface="DejaVu Sans"/>
+              </a:defRPr>
+            </a:pPr>
+            <a:r>
+              <a:rPr sz="2250" b="1">
+                <a:solidFill>
+                  <a:srgbClr val="152A27"/>
+                </a:solidFill>
+                <a:latin typeface="DejaVu Sans"/>
+                <a:ea typeface="DejaVu Sans"/>
+                <a:cs typeface="DejaVu Sans"/>
+              </a:rPr>
+              <a:t>Settle payment</a:t>
+            </a:r>
+          </a:p>
+        </p:txBody>
+      </p:sp>
+      <p:sp>
+        <p:nvSpPr>
+          <p:cNvPr id="14" name="">
+            <a:extLst xmlns:a="http://schemas.openxmlformats.org/drawingml/2006/main">
+              <a:ext uri="{FF2B5EF4-FFF2-40B4-BE49-F238E27FC236}">
+                <a16:creationId xmlns:a16="http://schemas.microsoft.com/office/drawing/2014/main" id="{212C4C71-33AD-4DD1-A178-AF9EE992D7E5}"/>
+              </a:ext>
+            </a:extLst>
+          </p:cNvPr>
+          <p:cNvSpPr>
+            <a:spLocks xmlns:a="http://schemas.openxmlformats.org/drawingml/2006/main" noGrp="1"/>
+          </p:cNvSpPr>
+          <p:nvPr/>
+        </p:nvSpPr>
+        <p:spPr>
+          <a:xfrm xmlns:a="http://schemas.openxmlformats.org/drawingml/2006/main">
+            <a:off x="7143750" y="4686300"/>
+            <a:ext cx="4267200" cy="952500"/>
+          </a:xfrm>
+          <a:prstGeom xmlns:a="http://schemas.openxmlformats.org/drawingml/2006/main" prst="rect">
+            <a:avLst/>
+          </a:prstGeom>
+          <a:noFill xmlns:a="http://schemas.openxmlformats.org/drawingml/2006/main"/>
+          <a:ln xmlns:a="http://schemas.openxmlformats.org/drawingml/2006/main" w="0">
+            <a:noFill/>
+          </a:ln>
+        </p:spPr>
+        <p:txBody>
+          <a:bodyPr xmlns:a="http://schemas.openxmlformats.org/drawingml/2006/main">
+            <a:noAutofit/>
+          </a:bodyPr>
+          <a:lstStyle xmlns:a="http://schemas.openxmlformats.org/drawingml/2006/main"/>
+          <a:p xmlns:a="http://schemas.openxmlformats.org/drawingml/2006/main">
+            <a:pPr>
+              <a:defRPr sz="1950" b="0">
+                <a:solidFill>
+                  <a:srgbClr val="152A27"/>
+                </a:solidFill>
+                <a:latin typeface="DejaVu Sans"/>
+                <a:ea typeface="DejaVu Sans"/>
+                <a:cs typeface="DejaVu Sans"/>
+              </a:defRPr>
+            </a:pPr>
+            <a:r>
+              <a:rPr sz="1950" b="0">
+                <a:solidFill>
+                  <a:srgbClr val="152A27"/>
+                </a:solidFill>
+                <a:latin typeface="DejaVu Sans"/>
+                <a:ea typeface="DejaVu Sans"/>
+                <a:cs typeface="DejaVu Sans"/>
+              </a:rPr>
+              <a:t>After approval, the freelancer settles and receives a ledger receipt.</a:t>
+            </a:r>
+          </a:p>
+        </p:txBody>
+      </p:sp>
+      <p:sp>
+        <p:nvSpPr>
+          <p:cNvPr id="15" name="">
+            <a:extLst xmlns:a="http://schemas.openxmlformats.org/drawingml/2006/main">
+              <a:ext uri="{FF2B5EF4-FFF2-40B4-BE49-F238E27FC236}">
+                <a16:creationId xmlns:a16="http://schemas.microsoft.com/office/drawing/2014/main" id="{8D4290FE-B022-4FD8-96F2-F44E5CCAB785}"/>
+              </a:ext>
+            </a:extLst>
+          </p:cNvPr>
+          <p:cNvSpPr>
+            <a:spLocks xmlns:a="http://schemas.openxmlformats.org/drawingml/2006/main" noGrp="1"/>
+          </p:cNvSpPr>
+          <p:nvPr/>
+        </p:nvSpPr>
+        <p:spPr>
+          <a:xfrm xmlns:a="http://schemas.openxmlformats.org/drawingml/2006/main">
+            <a:off x="628650" y="6115050"/>
+            <a:ext cx="10534650" cy="628650"/>
+          </a:xfrm>
+          <a:prstGeom xmlns:a="http://schemas.openxmlformats.org/drawingml/2006/main" prst="rect">
+            <a:avLst/>
+          </a:prstGeom>
+          <a:noFill xmlns:a="http://schemas.openxmlformats.org/drawingml/2006/main"/>
+          <a:ln xmlns:a="http://schemas.openxmlformats.org/drawingml/2006/main" w="0">
+            <a:noFill/>
+          </a:ln>
+        </p:spPr>
+        <p:txBody>
+          <a:bodyPr xmlns:a="http://schemas.openxmlformats.org/drawingml/2006/main">
+            <a:noAutofit/>
+          </a:bodyPr>
+          <a:lstStyle xmlns:a="http://schemas.openxmlformats.org/drawingml/2006/main"/>
+          <a:p xmlns:a="http://schemas.openxmlformats.org/drawingml/2006/main">
+            <a:pPr>
+              <a:defRPr sz="1350" b="0">
+                <a:solidFill>
+                  <a:srgbClr val="54645E"/>
+                </a:solidFill>
+                <a:latin typeface="DejaVu Sans"/>
+                <a:ea typeface="DejaVu Sans"/>
+                <a:cs typeface="DejaVu Sans"/>
+              </a:defRPr>
+            </a:pPr>
+            <a:r>
+              <a:rPr sz="1350" b="0">
+                <a:solidFill>
+                  <a:srgbClr val="54645E"/>
+                </a:solidFill>
+                <a:latin typeface="DejaVu Sans"/>
+                <a:ea typeface="DejaVu Sans"/>
+                <a:cs typeface="DejaVu Sans"/>
+              </a:rPr>
+              <a:t>Encrypted group chat supports team discussion. Escrow currently uses two-person rooms.</a:t>
             </a:r>
           </a:p>
         </p:txBody>
@@ -4663,7 +5619,7 @@
     </p:spTree>
     <p:extLst>
       <p:ext uri="{BB962C8B-B14F-4D97-AF65-F5344CB8AC3E}">
-        <p14:creationId xmlns:p14="http://schemas.microsoft.com/office/powerpoint/2010/main" val="1382427989"/>
+        <p14:creationId xmlns:p14="http://schemas.microsoft.com/office/powerpoint/2010/main" val="2112096475"/>
       </p:ext>
     </p:extLst>
   </p:cSld>
@@ -4676,7 +5632,7 @@
     <p:bg>
       <p:bgPr>
         <a:solidFill xmlns:a="http://schemas.openxmlformats.org/drawingml/2006/main">
-          <a:srgbClr val="FFFDFA"/>
+          <a:srgbClr val="FAFAF6"/>
         </a:solidFill>
       </p:bgPr>
     </p:bg>
@@ -4691,10 +5647,10 @@
       </p:grpSpPr>
       <p:sp>
         <p:nvSpPr>
-          <p:cNvPr id="8" name="">
+          <p:cNvPr id="5" name="">
             <a:extLst xmlns:a="http://schemas.openxmlformats.org/drawingml/2006/main">
               <a:ext uri="{FF2B5EF4-FFF2-40B4-BE49-F238E27FC236}">
-                <a16:creationId xmlns:a16="http://schemas.microsoft.com/office/drawing/2014/main" id="{2ADF4A53-D4C5-471C-8951-31C7BE532CAB}"/>
+                <a16:creationId xmlns:a16="http://schemas.microsoft.com/office/drawing/2014/main" id="{9566C54E-A2DA-458D-9055-4979B61BF747}"/>
               </a:ext>
             </a:extLst>
           </p:cNvPr>
@@ -4705,8 +5661,8 @@
         </p:nvSpPr>
         <p:spPr>
           <a:xfrm xmlns:a="http://schemas.openxmlformats.org/drawingml/2006/main">
-            <a:off x="685800" y="457200"/>
-            <a:ext cx="10820400" cy="895350"/>
+            <a:off x="609600" y="447675"/>
+            <a:ext cx="10934700" cy="914400"/>
           </a:xfrm>
           <a:prstGeom xmlns:a="http://schemas.openxmlformats.org/drawingml/2006/main" prst="rect">
             <a:avLst/>
@@ -4723,9 +5679,9 @@
           <a:lstStyle xmlns:a="http://schemas.openxmlformats.org/drawingml/2006/main"/>
           <a:p xmlns:a="http://schemas.openxmlformats.org/drawingml/2006/main">
             <a:pPr>
-              <a:defRPr sz="3600" b="1">
-                <a:solidFill>
-                  <a:srgbClr val="142D31"/>
+              <a:defRPr sz="3675" b="1">
+                <a:solidFill>
+                  <a:srgbClr val="152A27"/>
                 </a:solidFill>
                 <a:latin typeface="DejaVu Sans"/>
                 <a:ea typeface="DejaVu Sans"/>
@@ -4733,15 +5689,15 @@
               </a:defRPr>
             </a:pPr>
             <a:r>
-              <a:rPr sz="3600" b="1">
-                <a:solidFill>
-                  <a:srgbClr val="142D31"/>
+              <a:rPr sz="3675" b="1">
+                <a:solidFill>
+                  <a:srgbClr val="152A27"/>
                 </a:solidFill>
                 <a:latin typeface="DejaVu Sans"/>
                 <a:ea typeface="DejaVu Sans"/>
                 <a:cs typeface="DejaVu Sans"/>
               </a:rPr>
-              <a:t>Why Canton</a:t>
+              <a:t>Escrow has explicit payment states</a:t>
             </a:r>
           </a:p>
         </p:txBody>
@@ -4751,7 +5707,7 @@
           <p:cNvPr id="2" name="">
             <a:extLst xmlns:a="http://schemas.openxmlformats.org/drawingml/2006/main">
               <a:ext uri="{FF2B5EF4-FFF2-40B4-BE49-F238E27FC236}">
-                <a16:creationId xmlns:a16="http://schemas.microsoft.com/office/drawing/2014/main" id="{1E80E0F1-11FE-44A9-A919-D17701532D71}"/>
+                <a16:creationId xmlns:a16="http://schemas.microsoft.com/office/drawing/2014/main" id="{9DDEB897-972A-4EF1-BEFB-D6BE3B3DCA2D}"/>
               </a:ext>
             </a:extLst>
           </p:cNvPr>
@@ -4762,8 +5718,8 @@
         </p:nvSpPr>
         <p:spPr>
           <a:xfrm xmlns:a="http://schemas.openxmlformats.org/drawingml/2006/main">
-            <a:off x="685800" y="1447800"/>
-            <a:ext cx="10648950" cy="781050"/>
+            <a:off x="628650" y="1476375"/>
+            <a:ext cx="10934700" cy="685800"/>
           </a:xfrm>
           <a:prstGeom xmlns:a="http://schemas.openxmlformats.org/drawingml/2006/main" prst="rect">
             <a:avLst/>
@@ -4780,9 +5736,9 @@
           <a:lstStyle xmlns:a="http://schemas.openxmlformats.org/drawingml/2006/main"/>
           <a:p xmlns:a="http://schemas.openxmlformats.org/drawingml/2006/main">
             <a:pPr>
-              <a:defRPr sz="2250" b="0">
-                <a:solidFill>
-                  <a:srgbClr val="087F80"/>
+              <a:defRPr sz="2100" b="0">
+                <a:solidFill>
+                  <a:srgbClr val="146C56"/>
                 </a:solidFill>
                 <a:latin typeface="DejaVu Sans"/>
                 <a:ea typeface="DejaVu Sans"/>
@@ -4790,25 +5746,418 @@
               </a:defRPr>
             </a:pPr>
             <a:r>
-              <a:rPr sz="2250" b="0">
-                <a:solidFill>
-                  <a:srgbClr val="087F80"/>
+              <a:rPr sz="2100" b="0">
+                <a:solidFill>
+                  <a:srgbClr val="146C56"/>
                 </a:solidFill>
                 <a:latin typeface="DejaVu Sans"/>
                 <a:ea typeface="DejaVu Sans"/>
                 <a:cs typeface="DejaVu Sans"/>
               </a:rPr>
-              <a:t>Content privacy and workflow authority have separate jobs.</a:t>
-            </a:r>
-          </a:p>
-        </p:txBody>
-      </p:sp>
-      <p:sp>
-        <p:nvSpPr>
-          <p:cNvPr id="3" name="">
+              <a:t>Acceptance, funding and settlement each require their own action.</a:t>
+            </a:r>
+          </a:p>
+        </p:txBody>
+      </p:sp>
+      <p:graphicFrame>
+        <p:nvGraphicFramePr>
+          <p:cNvPr id="7" name=""/>
+          <p:cNvGraphicFramePr/>
+          <p:nvPr/>
+        </p:nvGraphicFramePr>
+        <p:xfrm>
+          <a:off xmlns:a="http://schemas.openxmlformats.org/drawingml/2006/main" x="628650" y="2381250"/>
+          <a:ext xmlns:a="http://schemas.openxmlformats.org/drawingml/2006/main" cx="10934700" cy="3143250"/>
+        </p:xfrm>
+        <a:graphic xmlns:a="http://schemas.openxmlformats.org/drawingml/2006/main">
+          <a:graphicData uri="http://schemas.openxmlformats.org/drawingml/2006/table">
+            <a:tbl>
+              <a:tblPr firstRow="0" bandRow="0"/>
+              <a:tblGrid>
+                <a:gridCol w="2524125"/>
+                <a:gridCol w="4000500"/>
+                <a:gridCol w="4410075"/>
+              </a:tblGrid>
+              <a:tr h="628650">
+                <a:tc>
+                  <a:txBody>
+                    <a:bodyPr/>
+                    <a:lstStyle/>
+                    <a:p>
+                      <a:r>
+                        <a:rPr sz="1800" b="1">
+                          <a:solidFill>
+                            <a:srgbClr val="FFFFFF"/>
+                          </a:solidFill>
+                          <a:latin typeface="DejaVu Sans"/>
+                          <a:ea typeface="DejaVu Sans"/>
+                          <a:cs typeface="DejaVu Sans"/>
+                        </a:rPr>
+                        <a:t>State</a:t>
+                      </a:r>
+                    </a:p>
+                  </a:txBody>
+                  <a:tcPr marL="142875" marR="142875" marT="76200" marB="76200">
+                    <a:solidFill>
+                      <a:srgbClr val="152A27"/>
+                    </a:solidFill>
+                  </a:tcPr>
+                </a:tc>
+                <a:tc>
+                  <a:txBody>
+                    <a:bodyPr/>
+                    <a:lstStyle/>
+                    <a:p>
+                      <a:r>
+                        <a:rPr sz="1800" b="1">
+                          <a:solidFill>
+                            <a:srgbClr val="FFFFFF"/>
+                          </a:solidFill>
+                          <a:latin typeface="DejaVu Sans"/>
+                          <a:ea typeface="DejaVu Sans"/>
+                          <a:cs typeface="DejaVu Sans"/>
+                        </a:rPr>
+                        <a:t>Who acts</a:t>
+                      </a:r>
+                    </a:p>
+                  </a:txBody>
+                  <a:tcPr marL="142875" marR="142875" marT="76200" marB="76200">
+                    <a:solidFill>
+                      <a:srgbClr val="152A27"/>
+                    </a:solidFill>
+                  </a:tcPr>
+                </a:tc>
+                <a:tc>
+                  <a:txBody>
+                    <a:bodyPr/>
+                    <a:lstStyle/>
+                    <a:p>
+                      <a:r>
+                        <a:rPr sz="1800" b="1">
+                          <a:solidFill>
+                            <a:srgbClr val="FFFFFF"/>
+                          </a:solidFill>
+                          <a:latin typeface="DejaVu Sans"/>
+                          <a:ea typeface="DejaVu Sans"/>
+                          <a:cs typeface="DejaVu Sans"/>
+                        </a:rPr>
+                        <a:t>What the state means</a:t>
+                      </a:r>
+                    </a:p>
+                  </a:txBody>
+                  <a:tcPr marL="142875" marR="142875" marT="76200" marB="76200">
+                    <a:solidFill>
+                      <a:srgbClr val="152A27"/>
+                    </a:solidFill>
+                  </a:tcPr>
+                </a:tc>
+              </a:tr>
+              <a:tr h="628650">
+                <a:tc>
+                  <a:txBody>
+                    <a:bodyPr/>
+                    <a:lstStyle/>
+                    <a:p>
+                      <a:r>
+                        <a:rPr sz="1800" b="0">
+                          <a:solidFill>
+                            <a:srgbClr val="152A27"/>
+                          </a:solidFill>
+                          <a:latin typeface="DejaVu Sans"/>
+                          <a:ea typeface="DejaVu Sans"/>
+                          <a:cs typeface="DejaVu Sans"/>
+                        </a:rPr>
+                        <a:t>Accepted</a:t>
+                      </a:r>
+                    </a:p>
+                  </a:txBody>
+                  <a:tcPr marL="142875" marR="142875" marT="76200" marB="76200">
+                    <a:solidFill>
+                      <a:srgbClr val="F0F3EE"/>
+                    </a:solidFill>
+                  </a:tcPr>
+                </a:tc>
+                <a:tc>
+                  <a:txBody>
+                    <a:bodyPr/>
+                    <a:lstStyle/>
+                    <a:p>
+                      <a:r>
+                        <a:rPr sz="1800" b="0">
+                          <a:solidFill>
+                            <a:srgbClr val="152A27"/>
+                          </a:solidFill>
+                          <a:latin typeface="DejaVu Sans"/>
+                          <a:ea typeface="DejaVu Sans"/>
+                          <a:cs typeface="DejaVu Sans"/>
+                        </a:rPr>
+                        <a:t>Offer accepter</a:t>
+                      </a:r>
+                    </a:p>
+                  </a:txBody>
+                  <a:tcPr marL="142875" marR="142875" marT="76200" marB="76200">
+                    <a:solidFill>
+                      <a:srgbClr val="F0F3EE"/>
+                    </a:solidFill>
+                  </a:tcPr>
+                </a:tc>
+                <a:tc>
+                  <a:txBody>
+                    <a:bodyPr/>
+                    <a:lstStyle/>
+                    <a:p>
+                      <a:r>
+                        <a:rPr sz="1800" b="0">
+                          <a:solidFill>
+                            <a:srgbClr val="152A27"/>
+                          </a:solidFill>
+                          <a:latin typeface="DejaVu Sans"/>
+                          <a:ea typeface="DejaVu Sans"/>
+                          <a:cs typeface="DejaVu Sans"/>
+                        </a:rPr>
+                        <a:t>Both people have an agreement.</a:t>
+                      </a:r>
+                    </a:p>
+                  </a:txBody>
+                  <a:tcPr marL="142875" marR="142875" marT="76200" marB="76200">
+                    <a:solidFill>
+                      <a:srgbClr val="F0F3EE"/>
+                    </a:solidFill>
+                  </a:tcPr>
+                </a:tc>
+              </a:tr>
+              <a:tr h="628650">
+                <a:tc>
+                  <a:txBody>
+                    <a:bodyPr/>
+                    <a:lstStyle/>
+                    <a:p>
+                      <a:r>
+                        <a:rPr sz="1800" b="0">
+                          <a:solidFill>
+                            <a:srgbClr val="152A27"/>
+                          </a:solidFill>
+                          <a:latin typeface="DejaVu Sans"/>
+                          <a:ea typeface="DejaVu Sans"/>
+                          <a:cs typeface="DejaVu Sans"/>
+                        </a:rPr>
+                        <a:t>Funded</a:t>
+                      </a:r>
+                    </a:p>
+                  </a:txBody>
+                  <a:tcPr marL="142875" marR="142875" marT="76200" marB="76200">
+                    <a:solidFill>
+                      <a:srgbClr val="FFFFFF"/>
+                    </a:solidFill>
+                  </a:tcPr>
+                </a:tc>
+                <a:tc>
+                  <a:txBody>
+                    <a:bodyPr/>
+                    <a:lstStyle/>
+                    <a:p>
+                      <a:r>
+                        <a:rPr sz="1800" b="0">
+                          <a:solidFill>
+                            <a:srgbClr val="152A27"/>
+                          </a:solidFill>
+                          <a:latin typeface="DejaVu Sans"/>
+                          <a:ea typeface="DejaVu Sans"/>
+                          <a:cs typeface="DejaVu Sans"/>
+                        </a:rPr>
+                        <a:t>Client / reviewer</a:t>
+                      </a:r>
+                    </a:p>
+                  </a:txBody>
+                  <a:tcPr marL="142875" marR="142875" marT="76200" marB="76200">
+                    <a:solidFill>
+                      <a:srgbClr val="FFFFFF"/>
+                    </a:solidFill>
+                  </a:tcPr>
+                </a:tc>
+                <a:tc>
+                  <a:txBody>
+                    <a:bodyPr/>
+                    <a:lstStyle/>
+                    <a:p>
+                      <a:r>
+                        <a:rPr sz="1800" b="0">
+                          <a:solidFill>
+                            <a:srgbClr val="152A27"/>
+                          </a:solidFill>
+                          <a:latin typeface="DejaVu Sans"/>
+                          <a:ea typeface="DejaVu Sans"/>
+                          <a:cs typeface="DejaVu Sans"/>
+                        </a:rPr>
+                        <a:t>VINSS has validated the referenced token allocation.</a:t>
+                      </a:r>
+                    </a:p>
+                  </a:txBody>
+                  <a:tcPr marL="142875" marR="142875" marT="76200" marB="76200">
+                    <a:solidFill>
+                      <a:srgbClr val="FFFFFF"/>
+                    </a:solidFill>
+                  </a:tcPr>
+                </a:tc>
+              </a:tr>
+              <a:tr h="628650">
+                <a:tc>
+                  <a:txBody>
+                    <a:bodyPr/>
+                    <a:lstStyle/>
+                    <a:p>
+                      <a:r>
+                        <a:rPr sz="1800" b="0">
+                          <a:solidFill>
+                            <a:srgbClr val="152A27"/>
+                          </a:solidFill>
+                          <a:latin typeface="DejaVu Sans"/>
+                          <a:ea typeface="DejaVu Sans"/>
+                          <a:cs typeface="DejaVu Sans"/>
+                        </a:rPr>
+                        <a:t>Approved</a:t>
+                      </a:r>
+                    </a:p>
+                  </a:txBody>
+                  <a:tcPr marL="142875" marR="142875" marT="76200" marB="76200">
+                    <a:solidFill>
+                      <a:srgbClr val="F0F3EE"/>
+                    </a:solidFill>
+                  </a:tcPr>
+                </a:tc>
+                <a:tc>
+                  <a:txBody>
+                    <a:bodyPr/>
+                    <a:lstStyle/>
+                    <a:p>
+                      <a:r>
+                        <a:rPr sz="1800" b="0">
+                          <a:solidFill>
+                            <a:srgbClr val="152A27"/>
+                          </a:solidFill>
+                          <a:latin typeface="DejaVu Sans"/>
+                          <a:ea typeface="DejaVu Sans"/>
+                          <a:cs typeface="DejaVu Sans"/>
+                        </a:rPr>
+                        <a:t>Client / reviewer</a:t>
+                      </a:r>
+                    </a:p>
+                  </a:txBody>
+                  <a:tcPr marL="142875" marR="142875" marT="76200" marB="76200">
+                    <a:solidFill>
+                      <a:srgbClr val="F0F3EE"/>
+                    </a:solidFill>
+                  </a:tcPr>
+                </a:tc>
+                <a:tc>
+                  <a:txBody>
+                    <a:bodyPr/>
+                    <a:lstStyle/>
+                    <a:p>
+                      <a:r>
+                        <a:rPr sz="1800" b="0">
+                          <a:solidFill>
+                            <a:srgbClr val="152A27"/>
+                          </a:solidFill>
+                          <a:latin typeface="DejaVu Sans"/>
+                          <a:ea typeface="DejaVu Sans"/>
+                          <a:cs typeface="DejaVu Sans"/>
+                        </a:rPr>
+                        <a:t>The submitted work has approval for the VINSS settlement path.</a:t>
+                      </a:r>
+                    </a:p>
+                  </a:txBody>
+                  <a:tcPr marL="142875" marR="142875" marT="76200" marB="76200">
+                    <a:solidFill>
+                      <a:srgbClr val="F0F3EE"/>
+                    </a:solidFill>
+                  </a:tcPr>
+                </a:tc>
+              </a:tr>
+              <a:tr h="628650">
+                <a:tc>
+                  <a:txBody>
+                    <a:bodyPr/>
+                    <a:lstStyle/>
+                    <a:p>
+                      <a:r>
+                        <a:rPr sz="1800" b="0">
+                          <a:solidFill>
+                            <a:srgbClr val="152A27"/>
+                          </a:solidFill>
+                          <a:latin typeface="DejaVu Sans"/>
+                          <a:ea typeface="DejaVu Sans"/>
+                          <a:cs typeface="DejaVu Sans"/>
+                        </a:rPr>
+                        <a:t>Settled</a:t>
+                      </a:r>
+                    </a:p>
+                  </a:txBody>
+                  <a:tcPr marL="142875" marR="142875" marT="76200" marB="76200">
+                    <a:solidFill>
+                      <a:srgbClr val="FFFFFF"/>
+                    </a:solidFill>
+                  </a:tcPr>
+                </a:tc>
+                <a:tc>
+                  <a:txBody>
+                    <a:bodyPr/>
+                    <a:lstStyle/>
+                    <a:p>
+                      <a:r>
+                        <a:rPr sz="1800" b="0">
+                          <a:solidFill>
+                            <a:srgbClr val="152A27"/>
+                          </a:solidFill>
+                          <a:latin typeface="DejaVu Sans"/>
+                          <a:ea typeface="DejaVu Sans"/>
+                          <a:cs typeface="DejaVu Sans"/>
+                        </a:rPr>
+                        <a:t>Freelancer / fulfiller</a:t>
+                      </a:r>
+                    </a:p>
+                  </a:txBody>
+                  <a:tcPr marL="142875" marR="142875" marT="76200" marB="76200">
+                    <a:solidFill>
+                      <a:srgbClr val="FFFFFF"/>
+                    </a:solidFill>
+                  </a:tcPr>
+                </a:tc>
+                <a:tc>
+                  <a:txBody>
+                    <a:bodyPr/>
+                    <a:lstStyle/>
+                    <a:p>
+                      <a:r>
+                        <a:rPr sz="1800" b="0">
+                          <a:solidFill>
+                            <a:srgbClr val="152A27"/>
+                          </a:solidFill>
+                          <a:latin typeface="DejaVu Sans"/>
+                          <a:ea typeface="DejaVu Sans"/>
+                          <a:cs typeface="DejaVu Sans"/>
+                        </a:rPr>
+                        <a:t>The token transfer completed and a receipt records the outcome.</a:t>
+                      </a:r>
+                    </a:p>
+                  </a:txBody>
+                  <a:tcPr marL="142875" marR="142875" marT="76200" marB="76200">
+                    <a:solidFill>
+                      <a:srgbClr val="FFFFFF"/>
+                    </a:solidFill>
+                  </a:tcPr>
+                </a:tc>
+              </a:tr>
+            </a:tbl>
+          </a:graphicData>
+        </a:graphic>
+      </p:graphicFrame>
+      <p:sp>
+        <p:nvSpPr>
+          <p:cNvPr id="4" name="">
             <a:extLst xmlns:a="http://schemas.openxmlformats.org/drawingml/2006/main">
               <a:ext uri="{FF2B5EF4-FFF2-40B4-BE49-F238E27FC236}">
-                <a16:creationId xmlns:a16="http://schemas.microsoft.com/office/drawing/2014/main" id="{7D07BC8B-02F1-4A31-B524-9C2D533952D8}"/>
+                <a16:creationId xmlns:a16="http://schemas.microsoft.com/office/drawing/2014/main" id="{1394F9E7-8601-4F1F-A352-74C2178A525A}"/>
               </a:ext>
             </a:extLst>
           </p:cNvPr>
@@ -4819,8 +6168,8 @@
         </p:nvSpPr>
         <p:spPr>
           <a:xfrm xmlns:a="http://schemas.openxmlformats.org/drawingml/2006/main">
-            <a:off x="685800" y="2781300"/>
-            <a:ext cx="4905375" cy="495300"/>
+            <a:off x="628650" y="6115050"/>
+            <a:ext cx="10534650" cy="628650"/>
           </a:xfrm>
           <a:prstGeom xmlns:a="http://schemas.openxmlformats.org/drawingml/2006/main" prst="rect">
             <a:avLst/>
@@ -4837,9 +6186,9 @@
           <a:lstStyle xmlns:a="http://schemas.openxmlformats.org/drawingml/2006/main"/>
           <a:p xmlns:a="http://schemas.openxmlformats.org/drawingml/2006/main">
             <a:pPr>
-              <a:defRPr sz="2250" b="1">
-                <a:solidFill>
-                  <a:srgbClr val="142D31"/>
+              <a:defRPr sz="1350" b="0">
+                <a:solidFill>
+                  <a:srgbClr val="54645E"/>
                 </a:solidFill>
                 <a:latin typeface="DejaVu Sans"/>
                 <a:ea typeface="DejaVu Sans"/>
@@ -4847,243 +6196,15 @@
               </a:defRPr>
             </a:pPr>
             <a:r>
-              <a:rPr sz="2250" b="1">
-                <a:solidFill>
-                  <a:srgbClr val="142D31"/>
+              <a:rPr sz="1350" b="0">
+                <a:solidFill>
+                  <a:srgbClr val="54645E"/>
                 </a:solidFill>
                 <a:latin typeface="DejaVu Sans"/>
                 <a:ea typeface="DejaVu Sans"/>
                 <a:cs typeface="DejaVu Sans"/>
               </a:rPr>
-              <a:t>OpenMLS</a:t>
-            </a:r>
-          </a:p>
-        </p:txBody>
-      </p:sp>
-      <p:sp>
-        <p:nvSpPr>
-          <p:cNvPr id="4" name="">
-            <a:extLst xmlns:a="http://schemas.openxmlformats.org/drawingml/2006/main">
-              <a:ext uri="{FF2B5EF4-FFF2-40B4-BE49-F238E27FC236}">
-                <a16:creationId xmlns:a16="http://schemas.microsoft.com/office/drawing/2014/main" id="{399B6405-1BF5-4A58-81B5-C8466A84F326}"/>
-              </a:ext>
-            </a:extLst>
-          </p:cNvPr>
-          <p:cNvSpPr>
-            <a:spLocks xmlns:a="http://schemas.openxmlformats.org/drawingml/2006/main" noGrp="1"/>
-          </p:cNvSpPr>
-          <p:nvPr/>
-        </p:nvSpPr>
-        <p:spPr>
-          <a:xfrm xmlns:a="http://schemas.openxmlformats.org/drawingml/2006/main">
-            <a:off x="685800" y="3409950"/>
-            <a:ext cx="4905375" cy="2076450"/>
-          </a:xfrm>
-          <a:prstGeom xmlns:a="http://schemas.openxmlformats.org/drawingml/2006/main" prst="rect">
-            <a:avLst/>
-          </a:prstGeom>
-          <a:noFill xmlns:a="http://schemas.openxmlformats.org/drawingml/2006/main"/>
-          <a:ln xmlns:a="http://schemas.openxmlformats.org/drawingml/2006/main" w="0">
-            <a:noFill/>
-          </a:ln>
-        </p:spPr>
-        <p:txBody>
-          <a:bodyPr xmlns:a="http://schemas.openxmlformats.org/drawingml/2006/main">
-            <a:noAutofit/>
-          </a:bodyPr>
-          <a:lstStyle xmlns:a="http://schemas.openxmlformats.org/drawingml/2006/main"/>
-          <a:p xmlns:a="http://schemas.openxmlformats.org/drawingml/2006/main">
-            <a:pPr>
-              <a:defRPr sz="2175" b="0">
-                <a:solidFill>
-                  <a:srgbClr val="142D31"/>
-                </a:solidFill>
-                <a:latin typeface="DejaVu Sans"/>
-                <a:ea typeface="DejaVu Sans"/>
-                <a:cs typeface="DejaVu Sans"/>
-              </a:defRPr>
-            </a:pPr>
-            <a:r>
-              <a:rPr sz="2175" b="0">
-                <a:solidFill>
-                  <a:srgbClr val="142D31"/>
-                </a:solidFill>
-                <a:latin typeface="DejaVu Sans"/>
-                <a:ea typeface="DejaVu Sans"/>
-                <a:cs typeface="DejaVu Sans"/>
-              </a:rPr>
-              <a:t>The browser encrypts messages, detailed offer terms and group membership content.</a:t>
-            </a:r>
-          </a:p>
-        </p:txBody>
-      </p:sp>
-      <p:sp>
-        <p:nvSpPr>
-          <p:cNvPr id="5" name="">
-            <a:extLst xmlns:a="http://schemas.openxmlformats.org/drawingml/2006/main">
-              <a:ext uri="{FF2B5EF4-FFF2-40B4-BE49-F238E27FC236}">
-                <a16:creationId xmlns:a16="http://schemas.microsoft.com/office/drawing/2014/main" id="{E3212C86-1699-461D-9627-97F994D1B1A2}"/>
-              </a:ext>
-            </a:extLst>
-          </p:cNvPr>
-          <p:cNvSpPr>
-            <a:spLocks xmlns:a="http://schemas.openxmlformats.org/drawingml/2006/main" noGrp="1"/>
-          </p:cNvSpPr>
-          <p:nvPr/>
-        </p:nvSpPr>
-        <p:spPr>
-          <a:xfrm xmlns:a="http://schemas.openxmlformats.org/drawingml/2006/main">
-            <a:off x="6400800" y="2781300"/>
-            <a:ext cx="4905375" cy="495300"/>
-          </a:xfrm>
-          <a:prstGeom xmlns:a="http://schemas.openxmlformats.org/drawingml/2006/main" prst="rect">
-            <a:avLst/>
-          </a:prstGeom>
-          <a:noFill xmlns:a="http://schemas.openxmlformats.org/drawingml/2006/main"/>
-          <a:ln xmlns:a="http://schemas.openxmlformats.org/drawingml/2006/main" w="0">
-            <a:noFill/>
-          </a:ln>
-        </p:spPr>
-        <p:txBody>
-          <a:bodyPr xmlns:a="http://schemas.openxmlformats.org/drawingml/2006/main">
-            <a:noAutofit/>
-          </a:bodyPr>
-          <a:lstStyle xmlns:a="http://schemas.openxmlformats.org/drawingml/2006/main"/>
-          <a:p xmlns:a="http://schemas.openxmlformats.org/drawingml/2006/main">
-            <a:pPr>
-              <a:defRPr sz="2250" b="1">
-                <a:solidFill>
-                  <a:srgbClr val="142D31"/>
-                </a:solidFill>
-                <a:latin typeface="DejaVu Sans"/>
-                <a:ea typeface="DejaVu Sans"/>
-                <a:cs typeface="DejaVu Sans"/>
-              </a:defRPr>
-            </a:pPr>
-            <a:r>
-              <a:rPr sz="2250" b="1">
-                <a:solidFill>
-                  <a:srgbClr val="142D31"/>
-                </a:solidFill>
-                <a:latin typeface="DejaVu Sans"/>
-                <a:ea typeface="DejaVu Sans"/>
-                <a:cs typeface="DejaVu Sans"/>
-              </a:rPr>
-              <a:t>Canton</a:t>
-            </a:r>
-          </a:p>
-        </p:txBody>
-      </p:sp>
-      <p:sp>
-        <p:nvSpPr>
-          <p:cNvPr id="6" name="">
-            <a:extLst xmlns:a="http://schemas.openxmlformats.org/drawingml/2006/main">
-              <a:ext uri="{FF2B5EF4-FFF2-40B4-BE49-F238E27FC236}">
-                <a16:creationId xmlns:a16="http://schemas.microsoft.com/office/drawing/2014/main" id="{81CB8604-67F8-4263-BDEF-63A56F8DC08A}"/>
-              </a:ext>
-            </a:extLst>
-          </p:cNvPr>
-          <p:cNvSpPr>
-            <a:spLocks xmlns:a="http://schemas.openxmlformats.org/drawingml/2006/main" noGrp="1"/>
-          </p:cNvSpPr>
-          <p:nvPr/>
-        </p:nvSpPr>
-        <p:spPr>
-          <a:xfrm xmlns:a="http://schemas.openxmlformats.org/drawingml/2006/main">
-            <a:off x="6400800" y="3409950"/>
-            <a:ext cx="4905375" cy="2076450"/>
-          </a:xfrm>
-          <a:prstGeom xmlns:a="http://schemas.openxmlformats.org/drawingml/2006/main" prst="rect">
-            <a:avLst/>
-          </a:prstGeom>
-          <a:noFill xmlns:a="http://schemas.openxmlformats.org/drawingml/2006/main"/>
-          <a:ln xmlns:a="http://schemas.openxmlformats.org/drawingml/2006/main" w="0">
-            <a:noFill/>
-          </a:ln>
-        </p:spPr>
-        <p:txBody>
-          <a:bodyPr xmlns:a="http://schemas.openxmlformats.org/drawingml/2006/main">
-            <a:noAutofit/>
-          </a:bodyPr>
-          <a:lstStyle xmlns:a="http://schemas.openxmlformats.org/drawingml/2006/main"/>
-          <a:p xmlns:a="http://schemas.openxmlformats.org/drawingml/2006/main">
-            <a:pPr>
-              <a:defRPr sz="2175" b="0">
-                <a:solidFill>
-                  <a:srgbClr val="142D31"/>
-                </a:solidFill>
-                <a:latin typeface="DejaVu Sans"/>
-                <a:ea typeface="DejaVu Sans"/>
-                <a:cs typeface="DejaVu Sans"/>
-              </a:defRPr>
-            </a:pPr>
-            <a:r>
-              <a:rPr sz="2175" b="0">
-                <a:solidFill>
-                  <a:srgbClr val="142D31"/>
-                </a:solidFill>
-                <a:latin typeface="DejaVu Sans"/>
-                <a:ea typeface="DejaVu Sans"/>
-                <a:cs typeface="DejaVu Sans"/>
-              </a:rPr>
-              <a:t>Parties sign contracts. Ledger visibility limits disclosure. Daml enforces deal actions and CIP-56 connects settlement.</a:t>
-            </a:r>
-          </a:p>
-        </p:txBody>
-      </p:sp>
-      <p:sp>
-        <p:nvSpPr>
-          <p:cNvPr id="7" name="">
-            <a:extLst xmlns:a="http://schemas.openxmlformats.org/drawingml/2006/main">
-              <a:ext uri="{FF2B5EF4-FFF2-40B4-BE49-F238E27FC236}">
-                <a16:creationId xmlns:a16="http://schemas.microsoft.com/office/drawing/2014/main" id="{89304BD6-B897-497E-9080-5DF51C7B3EC8}"/>
-              </a:ext>
-            </a:extLst>
-          </p:cNvPr>
-          <p:cNvSpPr>
-            <a:spLocks xmlns:a="http://schemas.openxmlformats.org/drawingml/2006/main" noGrp="1"/>
-          </p:cNvSpPr>
-          <p:nvPr/>
-        </p:nvSpPr>
-        <p:spPr>
-          <a:xfrm xmlns:a="http://schemas.openxmlformats.org/drawingml/2006/main">
-            <a:off x="685800" y="6038850"/>
-            <a:ext cx="10401300" cy="609600"/>
-          </a:xfrm>
-          <a:prstGeom xmlns:a="http://schemas.openxmlformats.org/drawingml/2006/main" prst="rect">
-            <a:avLst/>
-          </a:prstGeom>
-          <a:noFill xmlns:a="http://schemas.openxmlformats.org/drawingml/2006/main"/>
-          <a:ln xmlns:a="http://schemas.openxmlformats.org/drawingml/2006/main" w="0">
-            <a:noFill/>
-          </a:ln>
-        </p:spPr>
-        <p:txBody>
-          <a:bodyPr xmlns:a="http://schemas.openxmlformats.org/drawingml/2006/main">
-            <a:noAutofit/>
-          </a:bodyPr>
-          <a:lstStyle xmlns:a="http://schemas.openxmlformats.org/drawingml/2006/main"/>
-          <a:p xmlns:a="http://schemas.openxmlformats.org/drawingml/2006/main">
-            <a:pPr>
-              <a:defRPr sz="1425" b="0">
-                <a:solidFill>
-                  <a:srgbClr val="52646B"/>
-                </a:solidFill>
-                <a:latin typeface="DejaVu Sans"/>
-                <a:ea typeface="DejaVu Sans"/>
-                <a:cs typeface="DejaVu Sans"/>
-              </a:defRPr>
-            </a:pPr>
-            <a:r>
-              <a:rPr sz="1425" b="0">
-                <a:solidFill>
-                  <a:srgbClr val="52646B"/>
-                </a:solidFill>
-                <a:latin typeface="DejaVu Sans"/>
-                <a:ea typeface="DejaVu Sans"/>
-                <a:cs typeface="DejaVu Sans"/>
-              </a:rPr>
-              <a:t>Authorized ledger viewers can see metadata and deal amounts. Local history is plaintext in the browser.</a:t>
+              <a:t>VINSS references the allocation. The current module has no dispute or refund choice.</a:t>
             </a:r>
           </a:p>
         </p:txBody>
@@ -5091,7 +6212,7 @@
     </p:spTree>
     <p:extLst>
       <p:ext uri="{BB962C8B-B14F-4D97-AF65-F5344CB8AC3E}">
-        <p14:creationId xmlns:p14="http://schemas.microsoft.com/office/powerpoint/2010/main" val="46309979"/>
+        <p14:creationId xmlns:p14="http://schemas.microsoft.com/office/powerpoint/2010/main" val="619698904"/>
       </p:ext>
     </p:extLst>
   </p:cSld>
@@ -5104,7 +6225,7 @@
     <p:bg>
       <p:bgPr>
         <a:solidFill xmlns:a="http://schemas.openxmlformats.org/drawingml/2006/main">
-          <a:srgbClr val="FFFDFA"/>
+          <a:srgbClr val="152A27"/>
         </a:solidFill>
       </p:bgPr>
     </p:bg>
@@ -5119,10 +6240,10 @@
       </p:grpSpPr>
       <p:sp>
         <p:nvSpPr>
-          <p:cNvPr id="4" name="">
+          <p:cNvPr id="8" name="">
             <a:extLst xmlns:a="http://schemas.openxmlformats.org/drawingml/2006/main">
               <a:ext uri="{FF2B5EF4-FFF2-40B4-BE49-F238E27FC236}">
-                <a16:creationId xmlns:a16="http://schemas.microsoft.com/office/drawing/2014/main" id="{D2B39DDF-729E-460C-8AA5-B402569D2F2C}"/>
+                <a16:creationId xmlns:a16="http://schemas.microsoft.com/office/drawing/2014/main" id="{2BACBB88-D637-4C95-9D01-712E0CABF353}"/>
               </a:ext>
             </a:extLst>
           </p:cNvPr>
@@ -5133,8 +6254,8 @@
         </p:nvSpPr>
         <p:spPr>
           <a:xfrm xmlns:a="http://schemas.openxmlformats.org/drawingml/2006/main">
-            <a:off x="685800" y="457200"/>
-            <a:ext cx="10820400" cy="895350"/>
+            <a:off x="609600" y="447675"/>
+            <a:ext cx="10934700" cy="914400"/>
           </a:xfrm>
           <a:prstGeom xmlns:a="http://schemas.openxmlformats.org/drawingml/2006/main" prst="rect">
             <a:avLst/>
@@ -5151,9 +6272,9 @@
           <a:lstStyle xmlns:a="http://schemas.openxmlformats.org/drawingml/2006/main"/>
           <a:p xmlns:a="http://schemas.openxmlformats.org/drawingml/2006/main">
             <a:pPr>
-              <a:defRPr sz="3600" b="1">
-                <a:solidFill>
-                  <a:srgbClr val="142D31"/>
+              <a:defRPr sz="3675" b="1">
+                <a:solidFill>
+                  <a:srgbClr val="FFFFFF"/>
                 </a:solidFill>
                 <a:latin typeface="DejaVu Sans"/>
                 <a:ea typeface="DejaVu Sans"/>
@@ -5161,39 +6282,580 @@
               </a:defRPr>
             </a:pPr>
             <a:r>
-              <a:rPr sz="3600" b="1">
-                <a:solidFill>
-                  <a:srgbClr val="142D31"/>
+              <a:rPr sz="3675" b="1">
+                <a:solidFill>
+                  <a:srgbClr val="FFFFFF"/>
                 </a:solidFill>
                 <a:latin typeface="DejaVu Sans"/>
                 <a:ea typeface="DejaVu Sans"/>
                 <a:cs typeface="DejaVu Sans"/>
               </a:rPr>
-              <a:t>Evidence already recorded</a:t>
+              <a:t>Why Canton</a:t>
+            </a:r>
+          </a:p>
+        </p:txBody>
+      </p:sp>
+      <p:sp>
+        <p:nvSpPr>
+          <p:cNvPr id="2" name="">
+            <a:extLst xmlns:a="http://schemas.openxmlformats.org/drawingml/2006/main">
+              <a:ext uri="{FF2B5EF4-FFF2-40B4-BE49-F238E27FC236}">
+                <a16:creationId xmlns:a16="http://schemas.microsoft.com/office/drawing/2014/main" id="{9FBEF832-82F0-4833-908A-2FAFD5541D17}"/>
+              </a:ext>
+            </a:extLst>
+          </p:cNvPr>
+          <p:cNvSpPr>
+            <a:spLocks xmlns:a="http://schemas.openxmlformats.org/drawingml/2006/main" noGrp="1"/>
+          </p:cNvSpPr>
+          <p:nvPr/>
+        </p:nvSpPr>
+        <p:spPr>
+          <a:xfrm xmlns:a="http://schemas.openxmlformats.org/drawingml/2006/main">
+            <a:off x="628650" y="1476375"/>
+            <a:ext cx="10934700" cy="685800"/>
+          </a:xfrm>
+          <a:prstGeom xmlns:a="http://schemas.openxmlformats.org/drawingml/2006/main" prst="rect">
+            <a:avLst/>
+          </a:prstGeom>
+          <a:noFill xmlns:a="http://schemas.openxmlformats.org/drawingml/2006/main"/>
+          <a:ln xmlns:a="http://schemas.openxmlformats.org/drawingml/2006/main" w="0">
+            <a:noFill/>
+          </a:ln>
+        </p:spPr>
+        <p:txBody>
+          <a:bodyPr xmlns:a="http://schemas.openxmlformats.org/drawingml/2006/main">
+            <a:noAutofit/>
+          </a:bodyPr>
+          <a:lstStyle xmlns:a="http://schemas.openxmlformats.org/drawingml/2006/main"/>
+          <a:p xmlns:a="http://schemas.openxmlformats.org/drawingml/2006/main">
+            <a:pPr>
+              <a:defRPr sz="2100" b="0">
+                <a:solidFill>
+                  <a:srgbClr val="A9DAC3"/>
+                </a:solidFill>
+                <a:latin typeface="DejaVu Sans"/>
+                <a:ea typeface="DejaVu Sans"/>
+                <a:cs typeface="DejaVu Sans"/>
+              </a:defRPr>
+            </a:pPr>
+            <a:r>
+              <a:rPr sz="2100" b="0">
+                <a:solidFill>
+                  <a:srgbClr val="A9DAC3"/>
+                </a:solidFill>
+                <a:latin typeface="DejaVu Sans"/>
+                <a:ea typeface="DejaVu Sans"/>
+                <a:cs typeface="DejaVu Sans"/>
+              </a:rPr>
+              <a:t>Private negotiation connects to an authorized business record.</a:t>
+            </a:r>
+          </a:p>
+        </p:txBody>
+      </p:sp>
+      <p:sp>
+        <p:nvSpPr>
+          <p:cNvPr id="3" name="">
+            <a:extLst xmlns:a="http://schemas.openxmlformats.org/drawingml/2006/main">
+              <a:ext uri="{FF2B5EF4-FFF2-40B4-BE49-F238E27FC236}">
+                <a16:creationId xmlns:a16="http://schemas.microsoft.com/office/drawing/2014/main" id="{AF38987D-AA98-45A8-9150-E1867D04DCA7}"/>
+              </a:ext>
+            </a:extLst>
+          </p:cNvPr>
+          <p:cNvSpPr>
+            <a:spLocks xmlns:a="http://schemas.openxmlformats.org/drawingml/2006/main" noGrp="1"/>
+          </p:cNvSpPr>
+          <p:nvPr/>
+        </p:nvSpPr>
+        <p:spPr>
+          <a:xfrm xmlns:a="http://schemas.openxmlformats.org/drawingml/2006/main">
+            <a:off x="628650" y="2543175"/>
+            <a:ext cx="4972050" cy="476250"/>
+          </a:xfrm>
+          <a:prstGeom xmlns:a="http://schemas.openxmlformats.org/drawingml/2006/main" prst="rect">
+            <a:avLst/>
+          </a:prstGeom>
+          <a:noFill xmlns:a="http://schemas.openxmlformats.org/drawingml/2006/main"/>
+          <a:ln xmlns:a="http://schemas.openxmlformats.org/drawingml/2006/main" w="0">
+            <a:noFill/>
+          </a:ln>
+        </p:spPr>
+        <p:txBody>
+          <a:bodyPr xmlns:a="http://schemas.openxmlformats.org/drawingml/2006/main">
+            <a:noAutofit/>
+          </a:bodyPr>
+          <a:lstStyle xmlns:a="http://schemas.openxmlformats.org/drawingml/2006/main"/>
+          <a:p xmlns:a="http://schemas.openxmlformats.org/drawingml/2006/main">
+            <a:pPr>
+              <a:defRPr sz="2175" b="1">
+                <a:solidFill>
+                  <a:srgbClr val="A9DAC3"/>
+                </a:solidFill>
+                <a:latin typeface="DejaVu Sans"/>
+                <a:ea typeface="DejaVu Sans"/>
+                <a:cs typeface="DejaVu Sans"/>
+              </a:defRPr>
+            </a:pPr>
+            <a:r>
+              <a:rPr sz="2175" b="1">
+                <a:solidFill>
+                  <a:srgbClr val="A9DAC3"/>
+                </a:solidFill>
+                <a:latin typeface="DejaVu Sans"/>
+                <a:ea typeface="DejaVu Sans"/>
+                <a:cs typeface="DejaVu Sans"/>
+              </a:rPr>
+              <a:t>Content privacy</a:t>
+            </a:r>
+          </a:p>
+        </p:txBody>
+      </p:sp>
+      <p:sp>
+        <p:nvSpPr>
+          <p:cNvPr id="4" name="">
+            <a:extLst xmlns:a="http://schemas.openxmlformats.org/drawingml/2006/main">
+              <a:ext uri="{FF2B5EF4-FFF2-40B4-BE49-F238E27FC236}">
+                <a16:creationId xmlns:a16="http://schemas.microsoft.com/office/drawing/2014/main" id="{4AE6DD5F-96D7-4029-8007-4FE67066DE30}"/>
+              </a:ext>
+            </a:extLst>
+          </p:cNvPr>
+          <p:cNvSpPr>
+            <a:spLocks xmlns:a="http://schemas.openxmlformats.org/drawingml/2006/main" noGrp="1"/>
+          </p:cNvSpPr>
+          <p:nvPr/>
+        </p:nvSpPr>
+        <p:spPr>
+          <a:xfrm xmlns:a="http://schemas.openxmlformats.org/drawingml/2006/main">
+            <a:off x="628650" y="3219450"/>
+            <a:ext cx="4972050" cy="2476500"/>
+          </a:xfrm>
+          <a:prstGeom xmlns:a="http://schemas.openxmlformats.org/drawingml/2006/main" prst="rect">
+            <a:avLst/>
+          </a:prstGeom>
+          <a:noFill xmlns:a="http://schemas.openxmlformats.org/drawingml/2006/main"/>
+          <a:ln xmlns:a="http://schemas.openxmlformats.org/drawingml/2006/main" w="0">
+            <a:noFill/>
+          </a:ln>
+        </p:spPr>
+        <p:txBody>
+          <a:bodyPr xmlns:a="http://schemas.openxmlformats.org/drawingml/2006/main">
+            <a:noAutofit/>
+          </a:bodyPr>
+          <a:lstStyle xmlns:a="http://schemas.openxmlformats.org/drawingml/2006/main"/>
+          <a:p xmlns:a="http://schemas.openxmlformats.org/drawingml/2006/main">
+            <a:pPr>
+              <a:defRPr sz="2100" b="0">
+                <a:solidFill>
+                  <a:srgbClr val="FFFFFF"/>
+                </a:solidFill>
+                <a:latin typeface="DejaVu Sans"/>
+                <a:ea typeface="DejaVu Sans"/>
+                <a:cs typeface="DejaVu Sans"/>
+              </a:defRPr>
+            </a:pPr>
+            <a:r>
+              <a:rPr sz="2100" b="0">
+                <a:solidFill>
+                  <a:srgbClr val="FFFFFF"/>
+                </a:solidFill>
+                <a:latin typeface="DejaVu Sans"/>
+                <a:ea typeface="DejaVu Sans"/>
+                <a:cs typeface="DejaVu Sans"/>
+              </a:rPr>
+              <a:t>OpenMLS encrypts chat and detailed offer terms in the browser.</a:t>
+            </a:r>
+          </a:p>
+          <a:p xmlns:a="http://schemas.openxmlformats.org/drawingml/2006/main">
+            <a:r>
+              <a:t/>
+            </a:r>
+          </a:p>
+          <a:p xmlns:a="http://schemas.openxmlformats.org/drawingml/2006/main">
+            <a:pPr>
+              <a:defRPr sz="2100" b="0">
+                <a:solidFill>
+                  <a:srgbClr val="FFFFFF"/>
+                </a:solidFill>
+                <a:latin typeface="DejaVu Sans"/>
+                <a:ea typeface="DejaVu Sans"/>
+                <a:cs typeface="DejaVu Sans"/>
+              </a:defRPr>
+            </a:pPr>
+            <a:r>
+              <a:rPr sz="2100" b="0">
+                <a:solidFill>
+                  <a:srgbClr val="FFFFFF"/>
+                </a:solidFill>
+                <a:latin typeface="DejaVu Sans"/>
+                <a:ea typeface="DejaVu Sans"/>
+                <a:cs typeface="DejaVu Sans"/>
+              </a:rPr>
+              <a:t>Members decrypt and keep plaintext history locally.</a:t>
+            </a:r>
+          </a:p>
+        </p:txBody>
+      </p:sp>
+      <p:sp>
+        <p:nvSpPr>
+          <p:cNvPr id="5" name="">
+            <a:extLst xmlns:a="http://schemas.openxmlformats.org/drawingml/2006/main">
+              <a:ext uri="{FF2B5EF4-FFF2-40B4-BE49-F238E27FC236}">
+                <a16:creationId xmlns:a16="http://schemas.microsoft.com/office/drawing/2014/main" id="{5F703C79-918D-4FD2-B162-CDCDC2A883E9}"/>
+              </a:ext>
+            </a:extLst>
+          </p:cNvPr>
+          <p:cNvSpPr>
+            <a:spLocks xmlns:a="http://schemas.openxmlformats.org/drawingml/2006/main" noGrp="1"/>
+          </p:cNvSpPr>
+          <p:nvPr/>
+        </p:nvSpPr>
+        <p:spPr>
+          <a:xfrm xmlns:a="http://schemas.openxmlformats.org/drawingml/2006/main">
+            <a:off x="6400800" y="2543175"/>
+            <a:ext cx="4972050" cy="476250"/>
+          </a:xfrm>
+          <a:prstGeom xmlns:a="http://schemas.openxmlformats.org/drawingml/2006/main" prst="rect">
+            <a:avLst/>
+          </a:prstGeom>
+          <a:noFill xmlns:a="http://schemas.openxmlformats.org/drawingml/2006/main"/>
+          <a:ln xmlns:a="http://schemas.openxmlformats.org/drawingml/2006/main" w="0">
+            <a:noFill/>
+          </a:ln>
+        </p:spPr>
+        <p:txBody>
+          <a:bodyPr xmlns:a="http://schemas.openxmlformats.org/drawingml/2006/main">
+            <a:noAutofit/>
+          </a:bodyPr>
+          <a:lstStyle xmlns:a="http://schemas.openxmlformats.org/drawingml/2006/main"/>
+          <a:p xmlns:a="http://schemas.openxmlformats.org/drawingml/2006/main">
+            <a:pPr>
+              <a:defRPr sz="2175" b="1">
+                <a:solidFill>
+                  <a:srgbClr val="A9DAC3"/>
+                </a:solidFill>
+                <a:latin typeface="DejaVu Sans"/>
+                <a:ea typeface="DejaVu Sans"/>
+                <a:cs typeface="DejaVu Sans"/>
+              </a:defRPr>
+            </a:pPr>
+            <a:r>
+              <a:rPr sz="2175" b="1">
+                <a:solidFill>
+                  <a:srgbClr val="A9DAC3"/>
+                </a:solidFill>
+                <a:latin typeface="DejaVu Sans"/>
+                <a:ea typeface="DejaVu Sans"/>
+                <a:cs typeface="DejaVu Sans"/>
+              </a:rPr>
+              <a:t>Deal authority</a:t>
+            </a:r>
+          </a:p>
+        </p:txBody>
+      </p:sp>
+      <p:sp>
+        <p:nvSpPr>
+          <p:cNvPr id="6" name="">
+            <a:extLst xmlns:a="http://schemas.openxmlformats.org/drawingml/2006/main">
+              <a:ext uri="{FF2B5EF4-FFF2-40B4-BE49-F238E27FC236}">
+                <a16:creationId xmlns:a16="http://schemas.microsoft.com/office/drawing/2014/main" id="{E00D6813-0C3C-4E48-A349-1DF0FD083708}"/>
+              </a:ext>
+            </a:extLst>
+          </p:cNvPr>
+          <p:cNvSpPr>
+            <a:spLocks xmlns:a="http://schemas.openxmlformats.org/drawingml/2006/main" noGrp="1"/>
+          </p:cNvSpPr>
+          <p:nvPr/>
+        </p:nvSpPr>
+        <p:spPr>
+          <a:xfrm xmlns:a="http://schemas.openxmlformats.org/drawingml/2006/main">
+            <a:off x="6400800" y="3219450"/>
+            <a:ext cx="4972050" cy="2476500"/>
+          </a:xfrm>
+          <a:prstGeom xmlns:a="http://schemas.openxmlformats.org/drawingml/2006/main" prst="rect">
+            <a:avLst/>
+          </a:prstGeom>
+          <a:noFill xmlns:a="http://schemas.openxmlformats.org/drawingml/2006/main"/>
+          <a:ln xmlns:a="http://schemas.openxmlformats.org/drawingml/2006/main" w="0">
+            <a:noFill/>
+          </a:ln>
+        </p:spPr>
+        <p:txBody>
+          <a:bodyPr xmlns:a="http://schemas.openxmlformats.org/drawingml/2006/main">
+            <a:noAutofit/>
+          </a:bodyPr>
+          <a:lstStyle xmlns:a="http://schemas.openxmlformats.org/drawingml/2006/main"/>
+          <a:p xmlns:a="http://schemas.openxmlformats.org/drawingml/2006/main">
+            <a:pPr>
+              <a:defRPr sz="2100" b="0">
+                <a:solidFill>
+                  <a:srgbClr val="FFFFFF"/>
+                </a:solidFill>
+                <a:latin typeface="DejaVu Sans"/>
+                <a:ea typeface="DejaVu Sans"/>
+                <a:cs typeface="DejaVu Sans"/>
+              </a:defRPr>
+            </a:pPr>
+            <a:r>
+              <a:rPr sz="2100" b="0">
+                <a:solidFill>
+                  <a:srgbClr val="FFFFFF"/>
+                </a:solidFill>
+                <a:latin typeface="DejaVu Sans"/>
+                <a:ea typeface="DejaVu Sans"/>
+                <a:cs typeface="DejaVu Sans"/>
+              </a:rPr>
+              <a:t>Canton controls contract visibility. Daml assigns each deal action to a Party.</a:t>
+            </a:r>
+          </a:p>
+          <a:p xmlns:a="http://schemas.openxmlformats.org/drawingml/2006/main">
+            <a:r>
+              <a:t/>
+            </a:r>
+          </a:p>
+          <a:p xmlns:a="http://schemas.openxmlformats.org/drawingml/2006/main">
+            <a:pPr>
+              <a:defRPr sz="2100" b="0">
+                <a:solidFill>
+                  <a:srgbClr val="FFFFFF"/>
+                </a:solidFill>
+                <a:latin typeface="DejaVu Sans"/>
+                <a:ea typeface="DejaVu Sans"/>
+                <a:cs typeface="DejaVu Sans"/>
+              </a:defRPr>
+            </a:pPr>
+            <a:r>
+              <a:rPr sz="2100" b="0">
+                <a:solidFill>
+                  <a:srgbClr val="FFFFFF"/>
+                </a:solidFill>
+                <a:latin typeface="DejaVu Sans"/>
+                <a:ea typeface="DejaVu Sans"/>
+                <a:cs typeface="DejaVu Sans"/>
+              </a:rPr>
+              <a:t>Token Standard Allocations provide the payment mechanism.</a:t>
+            </a:r>
+          </a:p>
+        </p:txBody>
+      </p:sp>
+      <p:sp>
+        <p:nvSpPr>
+          <p:cNvPr id="7" name="">
+            <a:extLst xmlns:a="http://schemas.openxmlformats.org/drawingml/2006/main">
+              <a:ext uri="{FF2B5EF4-FFF2-40B4-BE49-F238E27FC236}">
+                <a16:creationId xmlns:a16="http://schemas.microsoft.com/office/drawing/2014/main" id="{4A58BD83-346F-4055-B95E-D6D0E459ED80}"/>
+              </a:ext>
+            </a:extLst>
+          </p:cNvPr>
+          <p:cNvSpPr>
+            <a:spLocks xmlns:a="http://schemas.openxmlformats.org/drawingml/2006/main" noGrp="1"/>
+          </p:cNvSpPr>
+          <p:nvPr/>
+        </p:nvSpPr>
+        <p:spPr>
+          <a:xfrm xmlns:a="http://schemas.openxmlformats.org/drawingml/2006/main">
+            <a:off x="628650" y="6115050"/>
+            <a:ext cx="10534650" cy="628650"/>
+          </a:xfrm>
+          <a:prstGeom xmlns:a="http://schemas.openxmlformats.org/drawingml/2006/main" prst="rect">
+            <a:avLst/>
+          </a:prstGeom>
+          <a:noFill xmlns:a="http://schemas.openxmlformats.org/drawingml/2006/main"/>
+          <a:ln xmlns:a="http://schemas.openxmlformats.org/drawingml/2006/main" w="0">
+            <a:noFill/>
+          </a:ln>
+        </p:spPr>
+        <p:txBody>
+          <a:bodyPr xmlns:a="http://schemas.openxmlformats.org/drawingml/2006/main">
+            <a:noAutofit/>
+          </a:bodyPr>
+          <a:lstStyle xmlns:a="http://schemas.openxmlformats.org/drawingml/2006/main"/>
+          <a:p xmlns:a="http://schemas.openxmlformats.org/drawingml/2006/main">
+            <a:pPr>
+              <a:defRPr sz="1350" b="0">
+                <a:solidFill>
+                  <a:srgbClr val="A9DAC3"/>
+                </a:solidFill>
+                <a:latin typeface="DejaVu Sans"/>
+                <a:ea typeface="DejaVu Sans"/>
+                <a:cs typeface="DejaVu Sans"/>
+              </a:defRPr>
+            </a:pPr>
+            <a:r>
+              <a:rPr sz="1350" b="0">
+                <a:solidFill>
+                  <a:srgbClr val="A9DAC3"/>
+                </a:solidFill>
+                <a:latin typeface="DejaVu Sans"/>
+                <a:ea typeface="DejaVu Sans"/>
+                <a:cs typeface="DejaVu Sans"/>
+              </a:rPr>
+              <a:t>Authorized ledger viewers can see deal metadata, including amounts and Parties.</a:t>
+            </a:r>
+          </a:p>
+        </p:txBody>
+      </p:sp>
+    </p:spTree>
+    <p:extLst>
+      <p:ext uri="{BB962C8B-B14F-4D97-AF65-F5344CB8AC3E}">
+        <p14:creationId xmlns:p14="http://schemas.microsoft.com/office/powerpoint/2010/main" val="2052175173"/>
+      </p:ext>
+    </p:extLst>
+  </p:cSld>
+</p:sld>
+</file>
+
+<file path=ppt/slides/slide6.xml><?xml version="1.0" encoding="utf-8"?>
+<p:sld xmlns:p="http://schemas.openxmlformats.org/presentationml/2006/main">
+  <p:cSld>
+    <p:bg>
+      <p:bgPr>
+        <a:solidFill xmlns:a="http://schemas.openxmlformats.org/drawingml/2006/main">
+          <a:srgbClr val="FAFAF6"/>
+        </a:solidFill>
+      </p:bgPr>
+    </p:bg>
+    <p:spTree>
+      <p:nvGrpSpPr>
+        <p:cNvPr id="1" name=""/>
+        <p:cNvGrpSpPr/>
+        <p:nvPr/>
+      </p:nvGrpSpPr>
+      <p:grpSpPr>
+        <a:xfrm xmlns:a="http://schemas.openxmlformats.org/drawingml/2006/main"/>
+      </p:grpSpPr>
+      <p:sp>
+        <p:nvSpPr>
+          <p:cNvPr id="5" name="">
+            <a:extLst xmlns:a="http://schemas.openxmlformats.org/drawingml/2006/main">
+              <a:ext uri="{FF2B5EF4-FFF2-40B4-BE49-F238E27FC236}">
+                <a16:creationId xmlns:a16="http://schemas.microsoft.com/office/drawing/2014/main" id="{9C3CEAB1-EBE4-463E-9151-81437C29CAF3}"/>
+              </a:ext>
+            </a:extLst>
+          </p:cNvPr>
+          <p:cNvSpPr>
+            <a:spLocks xmlns:a="http://schemas.openxmlformats.org/drawingml/2006/main" noGrp="1"/>
+          </p:cNvSpPr>
+          <p:nvPr/>
+        </p:nvSpPr>
+        <p:spPr>
+          <a:xfrm xmlns:a="http://schemas.openxmlformats.org/drawingml/2006/main">
+            <a:off x="609600" y="447675"/>
+            <a:ext cx="10934700" cy="914400"/>
+          </a:xfrm>
+          <a:prstGeom xmlns:a="http://schemas.openxmlformats.org/drawingml/2006/main" prst="rect">
+            <a:avLst/>
+          </a:prstGeom>
+          <a:noFill xmlns:a="http://schemas.openxmlformats.org/drawingml/2006/main"/>
+          <a:ln xmlns:a="http://schemas.openxmlformats.org/drawingml/2006/main" w="0">
+            <a:noFill/>
+          </a:ln>
+        </p:spPr>
+        <p:txBody>
+          <a:bodyPr xmlns:a="http://schemas.openxmlformats.org/drawingml/2006/main">
+            <a:noAutofit/>
+          </a:bodyPr>
+          <a:lstStyle xmlns:a="http://schemas.openxmlformats.org/drawingml/2006/main"/>
+          <a:p xmlns:a="http://schemas.openxmlformats.org/drawingml/2006/main">
+            <a:pPr>
+              <a:defRPr sz="3675" b="1">
+                <a:solidFill>
+                  <a:srgbClr val="152A27"/>
+                </a:solidFill>
+                <a:latin typeface="DejaVu Sans"/>
+                <a:ea typeface="DejaVu Sans"/>
+                <a:cs typeface="DejaVu Sans"/>
+              </a:defRPr>
+            </a:pPr>
+            <a:r>
+              <a:rPr sz="3675" b="1">
+                <a:solidFill>
+                  <a:srgbClr val="152A27"/>
+                </a:solidFill>
+                <a:latin typeface="DejaVu Sans"/>
+                <a:ea typeface="DejaVu Sans"/>
+                <a:cs typeface="DejaVu Sans"/>
+              </a:rPr>
+              <a:t>Recorded technical progress</a:t>
+            </a:r>
+          </a:p>
+        </p:txBody>
+      </p:sp>
+      <p:sp>
+        <p:nvSpPr>
+          <p:cNvPr id="2" name="">
+            <a:extLst xmlns:a="http://schemas.openxmlformats.org/drawingml/2006/main">
+              <a:ext uri="{FF2B5EF4-FFF2-40B4-BE49-F238E27FC236}">
+                <a16:creationId xmlns:a16="http://schemas.microsoft.com/office/drawing/2014/main" id="{7D17EACF-C947-4144-9500-63A94A932845}"/>
+              </a:ext>
+            </a:extLst>
+          </p:cNvPr>
+          <p:cNvSpPr>
+            <a:spLocks xmlns:a="http://schemas.openxmlformats.org/drawingml/2006/main" noGrp="1"/>
+          </p:cNvSpPr>
+          <p:nvPr/>
+        </p:nvSpPr>
+        <p:spPr>
+          <a:xfrm xmlns:a="http://schemas.openxmlformats.org/drawingml/2006/main">
+            <a:off x="628650" y="1476375"/>
+            <a:ext cx="10934700" cy="685800"/>
+          </a:xfrm>
+          <a:prstGeom xmlns:a="http://schemas.openxmlformats.org/drawingml/2006/main" prst="rect">
+            <a:avLst/>
+          </a:prstGeom>
+          <a:noFill xmlns:a="http://schemas.openxmlformats.org/drawingml/2006/main"/>
+          <a:ln xmlns:a="http://schemas.openxmlformats.org/drawingml/2006/main" w="0">
+            <a:noFill/>
+          </a:ln>
+        </p:spPr>
+        <p:txBody>
+          <a:bodyPr xmlns:a="http://schemas.openxmlformats.org/drawingml/2006/main">
+            <a:noAutofit/>
+          </a:bodyPr>
+          <a:lstStyle xmlns:a="http://schemas.openxmlformats.org/drawingml/2006/main"/>
+          <a:p xmlns:a="http://schemas.openxmlformats.org/drawingml/2006/main">
+            <a:pPr>
+              <a:defRPr sz="2100" b="0">
+                <a:solidFill>
+                  <a:srgbClr val="146C56"/>
+                </a:solidFill>
+                <a:latin typeface="DejaVu Sans"/>
+                <a:ea typeface="DejaVu Sans"/>
+                <a:cs typeface="DejaVu Sans"/>
+              </a:defRPr>
+            </a:pPr>
+            <a:r>
+              <a:rPr sz="2100" b="0">
+                <a:solidFill>
+                  <a:srgbClr val="146C56"/>
+                </a:solidFill>
+                <a:latin typeface="DejaVu Sans"/>
+                <a:ea typeface="DejaVu Sans"/>
+                <a:cs typeface="DejaVu Sans"/>
+              </a:rPr>
+              <a:t>A real DevNet settlement and a separate local messaging suite.</a:t>
             </a:r>
           </a:p>
         </p:txBody>
       </p:sp>
       <p:graphicFrame>
         <p:nvGraphicFramePr>
-          <p:cNvPr id="5" name=""/>
+          <p:cNvPr id="7" name=""/>
           <p:cNvGraphicFramePr/>
           <p:nvPr/>
         </p:nvGraphicFramePr>
         <p:xfrm>
-          <a:off xmlns:a="http://schemas.openxmlformats.org/drawingml/2006/main" x="685800" y="1885950"/>
-          <a:ext xmlns:a="http://schemas.openxmlformats.org/drawingml/2006/main" cx="10820400" cy="3695700"/>
+          <a:off xmlns:a="http://schemas.openxmlformats.org/drawingml/2006/main" x="628650" y="2381250"/>
+          <a:ext xmlns:a="http://schemas.openxmlformats.org/drawingml/2006/main" cx="10934700" cy="3143250"/>
         </p:xfrm>
         <a:graphic xmlns:a="http://schemas.openxmlformats.org/drawingml/2006/main">
           <a:graphicData uri="http://schemas.openxmlformats.org/drawingml/2006/table">
             <a:tbl>
               <a:tblPr firstRow="0" bandRow="0"/>
               <a:tblGrid>
-                <a:gridCol w="3295650"/>
-                <a:gridCol w="4210050"/>
-                <a:gridCol w="3314700"/>
+                <a:gridCol w="2514600"/>
+                <a:gridCol w="4171950"/>
+                <a:gridCol w="4248150"/>
               </a:tblGrid>
-              <a:tr h="923925">
+              <a:tr h="785813">
                 <a:tc>
                   <a:txBody>
                     <a:bodyPr/>
@@ -5212,9 +6874,9 @@
                       </a:r>
                     </a:p>
                   </a:txBody>
-                  <a:tcPr marL="152400" marR="152400" marT="133350" marB="114300">
+                  <a:tcPr marL="142875" marR="142875" marT="76200" marB="76200">
                     <a:solidFill>
-                      <a:srgbClr val="142D31"/>
+                      <a:srgbClr val="152A27"/>
                     </a:solidFill>
                   </a:tcPr>
                 </a:tc>
@@ -5232,13 +6894,13 @@
                           <a:ea typeface="DejaVu Sans"/>
                           <a:cs typeface="DejaVu Sans"/>
                         </a:rPr>
-                        <a:t>Result</a:t>
+                        <a:t>Recorded result</a:t>
                       </a:r>
                     </a:p>
                   </a:txBody>
-                  <a:tcPr marL="152400" marR="152400" marT="133350" marB="114300">
+                  <a:tcPr marL="142875" marR="142875" marT="76200" marB="76200">
                     <a:solidFill>
-                      <a:srgbClr val="142D31"/>
+                      <a:srgbClr val="152A27"/>
                     </a:solidFill>
                   </a:tcPr>
                 </a:tc>
@@ -5260,35 +6922,35 @@
                       </a:r>
                     </a:p>
                   </a:txBody>
-                  <a:tcPr marL="152400" marR="152400" marT="133350" marB="114300">
+                  <a:tcPr marL="142875" marR="142875" marT="76200" marB="76200">
                     <a:solidFill>
-                      <a:srgbClr val="142D31"/>
+                      <a:srgbClr val="152A27"/>
                     </a:solidFill>
                   </a:tcPr>
                 </a:tc>
               </a:tr>
-              <a:tr h="923925">
+              <a:tr h="785813">
                 <a:tc>
                   <a:txBody>
                     <a:bodyPr/>
                     <a:lstStyle/>
                     <a:p>
                       <a:r>
-                        <a:rPr sz="1725">
+                        <a:rPr sz="1800" b="0">
                           <a:solidFill>
-                            <a:srgbClr val="142D31"/>
+                            <a:srgbClr val="152A27"/>
                           </a:solidFill>
                           <a:latin typeface="DejaVu Sans"/>
                           <a:ea typeface="DejaVu Sans"/>
                           <a:cs typeface="DejaVu Sans"/>
                         </a:rPr>
-                        <a:t>DevNet escrow, 6 Oct 2026</a:t>
+                        <a:t>6 Oct 2026 escrow</a:t>
                       </a:r>
                     </a:p>
                   </a:txBody>
-                  <a:tcPr marL="152400" marR="152400" marT="133350" marB="114300">
+                  <a:tcPr marL="142875" marR="142875" marT="76200" marB="76200">
                     <a:solidFill>
-                      <a:srgbClr val="FFFDFA"/>
+                      <a:srgbClr val="F0F3EE"/>
                     </a:solidFill>
                   </a:tcPr>
                 </a:tc>
@@ -5298,21 +6960,21 @@
                     <a:lstStyle/>
                     <a:p>
                       <a:r>
-                        <a:rPr sz="1725">
+                        <a:rPr sz="1800" b="0">
                           <a:solidFill>
-                            <a:srgbClr val="142D31"/>
+                            <a:srgbClr val="152A27"/>
                           </a:solidFill>
                           <a:latin typeface="DejaVu Sans"/>
                           <a:ea typeface="DejaVu Sans"/>
                           <a:cs typeface="DejaVu Sans"/>
                         </a:rPr>
-                        <a:t>1 CC settled, receipt and Holding IDs</a:t>
+                        <a:t>1 CC transferred; receipt and receiver holding IDs retained</a:t>
                       </a:r>
                     </a:p>
                   </a:txBody>
-                  <a:tcPr marL="152400" marR="152400" marT="133350" marB="114300">
+                  <a:tcPr marL="142875" marR="142875" marT="76200" marB="76200">
                     <a:solidFill>
-                      <a:srgbClr val="FFFDFA"/>
+                      <a:srgbClr val="F0F3EE"/>
                     </a:solidFill>
                   </a:tcPr>
                 </a:tc>
@@ -5322,47 +6984,47 @@
                     <a:lstStyle/>
                     <a:p>
                       <a:r>
-                        <a:rPr sz="1725">
+                        <a:rPr sz="1800" b="0">
                           <a:solidFill>
-                            <a:srgbClr val="142D31"/>
+                            <a:srgbClr val="152A27"/>
                           </a:solidFill>
                           <a:latin typeface="DejaVu Sans"/>
                           <a:ea typeface="DejaVu Sans"/>
                           <a:cs typeface="DejaVu Sans"/>
                         </a:rPr>
-                        <a:t>Earlier real network run</a:t>
+                        <a:t>Real Canton DevNet run</a:t>
                       </a:r>
                     </a:p>
                   </a:txBody>
-                  <a:tcPr marL="152400" marR="152400" marT="133350" marB="114300">
+                  <a:tcPr marL="142875" marR="142875" marT="76200" marB="76200">
                     <a:solidFill>
-                      <a:srgbClr val="FFFDFA"/>
+                      <a:srgbClr val="F0F3EE"/>
                     </a:solidFill>
                   </a:tcPr>
                 </a:tc>
               </a:tr>
-              <a:tr h="923925">
+              <a:tr h="785813">
                 <a:tc>
                   <a:txBody>
                     <a:bodyPr/>
                     <a:lstStyle/>
                     <a:p>
                       <a:r>
-                        <a:rPr sz="1725">
+                        <a:rPr sz="1800" b="0">
                           <a:solidFill>
-                            <a:srgbClr val="142D31"/>
+                            <a:srgbClr val="152A27"/>
                           </a:solidFill>
                           <a:latin typeface="DejaVu Sans"/>
                           <a:ea typeface="DejaVu Sans"/>
                           <a:cs typeface="DejaVu Sans"/>
                         </a:rPr>
-                        <a:t>Automated tests, 7 Oct 2026</a:t>
+                        <a:t>7 Oct 2026 test suite</a:t>
                       </a:r>
                     </a:p>
                   </a:txBody>
-                  <a:tcPr marL="152400" marR="152400" marT="133350" marB="114300">
+                  <a:tcPr marL="142875" marR="142875" marT="76200" marB="76200">
                     <a:solidFill>
-                      <a:srgbClr val="FFFDFA"/>
+                      <a:srgbClr val="FFFFFF"/>
                     </a:solidFill>
                   </a:tcPr>
                 </a:tc>
@@ -5372,21 +7034,21 @@
                     <a:lstStyle/>
                     <a:p>
                       <a:r>
-                        <a:rPr sz="1725">
+                        <a:rPr sz="1800" b="0">
                           <a:solidFill>
-                            <a:srgbClr val="142D31"/>
+                            <a:srgbClr val="152A27"/>
                           </a:solidFill>
                           <a:latin typeface="DejaVu Sans"/>
                           <a:ea typeface="DejaVu Sans"/>
                           <a:cs typeface="DejaVu Sans"/>
                         </a:rPr>
-                        <a:t>69 passed across 24 files</a:t>
+                        <a:t>69 tests passed across 24 files</a:t>
                       </a:r>
                     </a:p>
                   </a:txBody>
-                  <a:tcPr marL="152400" marR="152400" marT="133350" marB="114300">
+                  <a:tcPr marL="142875" marR="142875" marT="76200" marB="76200">
                     <a:solidFill>
-                      <a:srgbClr val="FFFDFA"/>
+                      <a:srgbClr val="FFFFFF"/>
                     </a:solidFill>
                   </a:tcPr>
                 </a:tc>
@@ -5396,47 +7058,47 @@
                     <a:lstStyle/>
                     <a:p>
                       <a:r>
-                        <a:rPr sz="1725">
+                        <a:rPr sz="1800" b="0">
                           <a:solidFill>
-                            <a:srgbClr val="142D31"/>
+                            <a:srgbClr val="152A27"/>
                           </a:solidFill>
                           <a:latin typeface="DejaVu Sans"/>
                           <a:ea typeface="DejaVu Sans"/>
                           <a:cs typeface="DejaVu Sans"/>
                         </a:rPr>
-                        <a:t>Local tests</a:t>
+                        <a:t>Local automated tests</a:t>
                       </a:r>
                     </a:p>
                   </a:txBody>
-                  <a:tcPr marL="152400" marR="152400" marT="133350" marB="114300">
+                  <a:tcPr marL="142875" marR="142875" marT="76200" marB="76200">
                     <a:solidFill>
-                      <a:srgbClr val="FFFDFA"/>
+                      <a:srgbClr val="FFFFFF"/>
                     </a:solidFill>
                   </a:tcPr>
                 </a:tc>
               </a:tr>
-              <a:tr h="923925">
+              <a:tr h="785813">
                 <a:tc>
                   <a:txBody>
                     <a:bodyPr/>
                     <a:lstStyle/>
                     <a:p>
                       <a:r>
-                        <a:rPr sz="1725">
+                        <a:rPr sz="1800" b="0">
                           <a:solidFill>
-                            <a:srgbClr val="142D31"/>
+                            <a:srgbClr val="152A27"/>
                           </a:solidFill>
                           <a:latin typeface="DejaVu Sans"/>
                           <a:ea typeface="DejaVu Sans"/>
                           <a:cs typeface="DejaVu Sans"/>
                         </a:rPr>
-                        <a:t>OpenMLS messaging scenario</a:t>
+                        <a:t>Messaging integration</a:t>
                       </a:r>
                     </a:p>
                   </a:txBody>
-                  <a:tcPr marL="152400" marR="152400" marT="133350" marB="114300">
+                  <a:tcPr marL="142875" marR="142875" marT="76200" marB="76200">
                     <a:solidFill>
-                      <a:srgbClr val="FFFDFA"/>
+                      <a:srgbClr val="F0F3EE"/>
                     </a:solidFill>
                   </a:tcPr>
                 </a:tc>
@@ -5446,21 +7108,21 @@
                     <a:lstStyle/>
                     <a:p>
                       <a:r>
-                        <a:rPr sz="1725">
+                        <a:rPr sz="1800" b="0">
                           <a:solidFill>
-                            <a:srgbClr val="142D31"/>
+                            <a:srgbClr val="152A27"/>
                           </a:solidFill>
                           <a:latin typeface="DejaVu Sans"/>
                           <a:ea typeface="DejaVu Sans"/>
                           <a:cs typeface="DejaVu Sans"/>
                         </a:rPr>
-                        <a:t>10 messages, three-member group</a:t>
+                        <a:t>10 test messages; Alice-Bob and three-member group</a:t>
                       </a:r>
                     </a:p>
                   </a:txBody>
-                  <a:tcPr marL="152400" marR="152400" marT="133350" marB="114300">
+                  <a:tcPr marL="142875" marR="142875" marT="76200" marB="76200">
                     <a:solidFill>
-                      <a:srgbClr val="FFFDFA"/>
+                      <a:srgbClr val="F0F3EE"/>
                     </a:solidFill>
                   </a:tcPr>
                 </a:tc>
@@ -5470,21 +7132,21 @@
                     <a:lstStyle/>
                     <a:p>
                       <a:r>
-                        <a:rPr sz="1725">
+                        <a:rPr sz="1800" b="0">
                           <a:solidFill>
-                            <a:srgbClr val="142D31"/>
+                            <a:srgbClr val="152A27"/>
                           </a:solidFill>
                           <a:latin typeface="DejaVu Sans"/>
                           <a:ea typeface="DejaVu Sans"/>
                           <a:cs typeface="DejaVu Sans"/>
                         </a:rPr>
-                        <a:t>Real WASM, simulated ledger</a:t>
+                        <a:t>Real OpenMLS WASM; simulated ledger / wallet</a:t>
                       </a:r>
                     </a:p>
                   </a:txBody>
-                  <a:tcPr marL="152400" marR="152400" marT="133350" marB="114300">
+                  <a:tcPr marL="142875" marR="142875" marT="76200" marB="76200">
                     <a:solidFill>
-                      <a:srgbClr val="FFFDFA"/>
+                      <a:srgbClr val="F0F3EE"/>
                     </a:solidFill>
                   </a:tcPr>
                 </a:tc>
@@ -5495,10 +7157,10 @@
       </p:graphicFrame>
       <p:sp>
         <p:nvSpPr>
-          <p:cNvPr id="3" name="">
+          <p:cNvPr id="4" name="">
             <a:extLst xmlns:a="http://schemas.openxmlformats.org/drawingml/2006/main">
               <a:ext uri="{FF2B5EF4-FFF2-40B4-BE49-F238E27FC236}">
-                <a16:creationId xmlns:a16="http://schemas.microsoft.com/office/drawing/2014/main" id="{F8D50C22-6540-4DF0-9640-1C8682C8236B}"/>
+                <a16:creationId xmlns:a16="http://schemas.microsoft.com/office/drawing/2014/main" id="{209B3B65-9F13-4429-802E-52C75B031441}"/>
               </a:ext>
             </a:extLst>
           </p:cNvPr>
@@ -5509,8 +7171,8 @@
         </p:nvSpPr>
         <p:spPr>
           <a:xfrm xmlns:a="http://schemas.openxmlformats.org/drawingml/2006/main">
-            <a:off x="685800" y="6038850"/>
-            <a:ext cx="10401300" cy="609600"/>
+            <a:off x="628650" y="6115050"/>
+            <a:ext cx="10534650" cy="628650"/>
           </a:xfrm>
           <a:prstGeom xmlns:a="http://schemas.openxmlformats.org/drawingml/2006/main" prst="rect">
             <a:avLst/>
@@ -5527,9 +7189,9 @@
           <a:lstStyle xmlns:a="http://schemas.openxmlformats.org/drawingml/2006/main"/>
           <a:p xmlns:a="http://schemas.openxmlformats.org/drawingml/2006/main">
             <a:pPr>
-              <a:defRPr sz="1425" b="0">
-                <a:solidFill>
-                  <a:srgbClr val="52646B"/>
+              <a:defRPr sz="1350" b="0">
+                <a:solidFill>
+                  <a:srgbClr val="54645E"/>
                 </a:solidFill>
                 <a:latin typeface="DejaVu Sans"/>
                 <a:ea typeface="DejaVu Sans"/>
@@ -5537,15 +7199,15 @@
               </a:defRPr>
             </a:pPr>
             <a:r>
-              <a:rPr sz="1425" b="0">
-                <a:solidFill>
-                  <a:srgbClr val="52646B"/>
+              <a:rPr sz="1350" b="0">
+                <a:solidFill>
+                  <a:srgbClr val="54645E"/>
                 </a:solidFill>
                 <a:latin typeface="DejaVu Sans"/>
                 <a:ea typeface="DejaVu Sans"/>
                 <a:cs typeface="DejaVu Sans"/>
               </a:rPr>
-              <a:t>A fresh live wallet run of the updated messaging release remains to be recorded.</a:t>
+              <a:t>The updated browser-wallet messaging flow still needs a fresh live recording.</a:t>
             </a:r>
           </a:p>
         </p:txBody>
@@ -5553,20 +7215,20 @@
     </p:spTree>
     <p:extLst>
       <p:ext uri="{BB962C8B-B14F-4D97-AF65-F5344CB8AC3E}">
-        <p14:creationId xmlns:p14="http://schemas.microsoft.com/office/powerpoint/2010/main" val="170770100"/>
+        <p14:creationId xmlns:p14="http://schemas.microsoft.com/office/powerpoint/2010/main" val="2011667025"/>
       </p:ext>
     </p:extLst>
   </p:cSld>
 </p:sld>
 </file>
 
-<file path=ppt/slides/slide6.xml><?xml version="1.0" encoding="utf-8"?>
+<file path=ppt/slides/slide7.xml><?xml version="1.0" encoding="utf-8"?>
 <p:sld xmlns:p="http://schemas.openxmlformats.org/presentationml/2006/main">
   <p:cSld>
     <p:bg>
       <p:bgPr>
         <a:solidFill xmlns:a="http://schemas.openxmlformats.org/drawingml/2006/main">
-          <a:srgbClr val="FFFDFA"/>
+          <a:srgbClr val="FAFAF6"/>
         </a:solidFill>
       </p:bgPr>
     </p:bg>
@@ -5584,7 +7246,7 @@
           <p:cNvPr id="8" name="">
             <a:extLst xmlns:a="http://schemas.openxmlformats.org/drawingml/2006/main">
               <a:ext uri="{FF2B5EF4-FFF2-40B4-BE49-F238E27FC236}">
-                <a16:creationId xmlns:a16="http://schemas.microsoft.com/office/drawing/2014/main" id="{7AB4693C-EC38-45B5-91B5-19EBB0B13126}"/>
+                <a16:creationId xmlns:a16="http://schemas.microsoft.com/office/drawing/2014/main" id="{2DD50D9D-73B0-487D-B565-E19FE4F99BCF}"/>
               </a:ext>
             </a:extLst>
           </p:cNvPr>
@@ -5595,8 +7257,8 @@
         </p:nvSpPr>
         <p:spPr>
           <a:xfrm xmlns:a="http://schemas.openxmlformats.org/drawingml/2006/main">
-            <a:off x="685800" y="457200"/>
-            <a:ext cx="10820400" cy="895350"/>
+            <a:off x="609600" y="447675"/>
+            <a:ext cx="10934700" cy="914400"/>
           </a:xfrm>
           <a:prstGeom xmlns:a="http://schemas.openxmlformats.org/drawingml/2006/main" prst="rect">
             <a:avLst/>
@@ -5613,9 +7275,9 @@
           <a:lstStyle xmlns:a="http://schemas.openxmlformats.org/drawingml/2006/main"/>
           <a:p xmlns:a="http://schemas.openxmlformats.org/drawingml/2006/main">
             <a:pPr>
-              <a:defRPr sz="3600" b="1">
-                <a:solidFill>
-                  <a:srgbClr val="142D31"/>
+              <a:defRPr sz="3675" b="1">
+                <a:solidFill>
+                  <a:srgbClr val="152A27"/>
                 </a:solidFill>
                 <a:latin typeface="DejaVu Sans"/>
                 <a:ea typeface="DejaVu Sans"/>
@@ -5623,15 +7285,15 @@
               </a:defRPr>
             </a:pPr>
             <a:r>
-              <a:rPr sz="3600" b="1">
-                <a:solidFill>
-                  <a:srgbClr val="142D31"/>
+              <a:rPr sz="3675" b="1">
+                <a:solidFill>
+                  <a:srgbClr val="152A27"/>
                 </a:solidFill>
                 <a:latin typeface="DejaVu Sans"/>
                 <a:ea typeface="DejaVu Sans"/>
                 <a:cs typeface="DejaVu Sans"/>
               </a:rPr>
-              <a:t>The first users</a:t>
+              <a:t>The first users already have a client</a:t>
             </a:r>
           </a:p>
         </p:txBody>
@@ -5641,7 +7303,7 @@
           <p:cNvPr id="2" name="">
             <a:extLst xmlns:a="http://schemas.openxmlformats.org/drawingml/2006/main">
               <a:ext uri="{FF2B5EF4-FFF2-40B4-BE49-F238E27FC236}">
-                <a16:creationId xmlns:a16="http://schemas.microsoft.com/office/drawing/2014/main" id="{D0DE4197-D19F-40D2-834D-BB5F80AD1ECB}"/>
+                <a16:creationId xmlns:a16="http://schemas.microsoft.com/office/drawing/2014/main" id="{0F557EBE-B3C3-44E9-9032-0923B137D85B}"/>
               </a:ext>
             </a:extLst>
           </p:cNvPr>
@@ -5652,8 +7314,8 @@
         </p:nvSpPr>
         <p:spPr>
           <a:xfrm xmlns:a="http://schemas.openxmlformats.org/drawingml/2006/main">
-            <a:off x="685800" y="1447800"/>
-            <a:ext cx="10648950" cy="781050"/>
+            <a:off x="628650" y="1476375"/>
+            <a:ext cx="10934700" cy="685800"/>
           </a:xfrm>
           <a:prstGeom xmlns:a="http://schemas.openxmlformats.org/drawingml/2006/main" prst="rect">
             <a:avLst/>
@@ -5670,9 +7332,9 @@
           <a:lstStyle xmlns:a="http://schemas.openxmlformats.org/drawingml/2006/main"/>
           <a:p xmlns:a="http://schemas.openxmlformats.org/drawingml/2006/main">
             <a:pPr>
-              <a:defRPr sz="2250" b="0">
-                <a:solidFill>
-                  <a:srgbClr val="087F80"/>
+              <a:defRPr sz="2100" b="0">
+                <a:solidFill>
+                  <a:srgbClr val="146C56"/>
                 </a:solidFill>
                 <a:latin typeface="DejaVu Sans"/>
                 <a:ea typeface="DejaVu Sans"/>
@@ -5680,15 +7342,15 @@
               </a:defRPr>
             </a:pPr>
             <a:r>
-              <a:rPr sz="2250" b="0">
-                <a:solidFill>
-                  <a:srgbClr val="087F80"/>
+              <a:rPr sz="2100" b="0">
+                <a:solidFill>
+                  <a:srgbClr val="146C56"/>
                 </a:solidFill>
                 <a:latin typeface="DejaVu Sans"/>
                 <a:ea typeface="DejaVu Sans"/>
                 <a:cs typeface="DejaVu Sans"/>
               </a:rPr>
-              <a:t>Start with direct clients, then expand marketplace supply.</a:t>
+              <a:t>Direct invitations make the product useful before marketplace scale.</a:t>
             </a:r>
           </a:p>
         </p:txBody>
@@ -5698,7 +7360,7 @@
           <p:cNvPr id="3" name="">
             <a:extLst xmlns:a="http://schemas.openxmlformats.org/drawingml/2006/main">
               <a:ext uri="{FF2B5EF4-FFF2-40B4-BE49-F238E27FC236}">
-                <a16:creationId xmlns:a16="http://schemas.microsoft.com/office/drawing/2014/main" id="{38FAF335-FA15-49A1-A5A9-E024D7D58D5C}"/>
+                <a16:creationId xmlns:a16="http://schemas.microsoft.com/office/drawing/2014/main" id="{9A9E6F35-20B8-4E3A-9E66-2A3C09CB7F43}"/>
               </a:ext>
             </a:extLst>
           </p:cNvPr>
@@ -5709,8 +7371,8 @@
         </p:nvSpPr>
         <p:spPr>
           <a:xfrm xmlns:a="http://schemas.openxmlformats.org/drawingml/2006/main">
-            <a:off x="685800" y="2781300"/>
-            <a:ext cx="4905375" cy="495300"/>
+            <a:off x="628650" y="2543175"/>
+            <a:ext cx="4972050" cy="476250"/>
           </a:xfrm>
           <a:prstGeom xmlns:a="http://schemas.openxmlformats.org/drawingml/2006/main" prst="rect">
             <a:avLst/>
@@ -5727,9 +7389,9 @@
           <a:lstStyle xmlns:a="http://schemas.openxmlformats.org/drawingml/2006/main"/>
           <a:p xmlns:a="http://schemas.openxmlformats.org/drawingml/2006/main">
             <a:pPr>
-              <a:defRPr sz="2250" b="1">
-                <a:solidFill>
-                  <a:srgbClr val="142D31"/>
+              <a:defRPr sz="2175" b="1">
+                <a:solidFill>
+                  <a:srgbClr val="146C56"/>
                 </a:solidFill>
                 <a:latin typeface="DejaVu Sans"/>
                 <a:ea typeface="DejaVu Sans"/>
@@ -5737,15 +7399,15 @@
               </a:defRPr>
             </a:pPr>
             <a:r>
-              <a:rPr sz="2250" b="1">
-                <a:solidFill>
-                  <a:srgbClr val="142D31"/>
+              <a:rPr sz="2175" b="1">
+                <a:solidFill>
+                  <a:srgbClr val="146C56"/>
                 </a:solidFill>
                 <a:latin typeface="DejaVu Sans"/>
                 <a:ea typeface="DejaVu Sans"/>
                 <a:cs typeface="DejaVu Sans"/>
               </a:rPr>
-              <a:t>Initial pilot</a:t>
+              <a:t>Initial cohort</a:t>
             </a:r>
           </a:p>
         </p:txBody>
@@ -5755,7 +7417,7 @@
           <p:cNvPr id="4" name="">
             <a:extLst xmlns:a="http://schemas.openxmlformats.org/drawingml/2006/main">
               <a:ext uri="{FF2B5EF4-FFF2-40B4-BE49-F238E27FC236}">
-                <a16:creationId xmlns:a16="http://schemas.microsoft.com/office/drawing/2014/main" id="{C1E4CBA9-0A3D-427B-AF38-8D8F33D9C6D3}"/>
+                <a16:creationId xmlns:a16="http://schemas.microsoft.com/office/drawing/2014/main" id="{0EF7C844-FE6A-4A9F-A4D7-7F2DF5460516}"/>
               </a:ext>
             </a:extLst>
           </p:cNvPr>
@@ -5766,8 +7428,8 @@
         </p:nvSpPr>
         <p:spPr>
           <a:xfrm xmlns:a="http://schemas.openxmlformats.org/drawingml/2006/main">
-            <a:off x="685800" y="3409950"/>
-            <a:ext cx="4905375" cy="2076450"/>
+            <a:off x="628650" y="3219450"/>
+            <a:ext cx="4972050" cy="2476500"/>
           </a:xfrm>
           <a:prstGeom xmlns:a="http://schemas.openxmlformats.org/drawingml/2006/main" prst="rect">
             <a:avLst/>
@@ -5784,9 +7446,9 @@
           <a:lstStyle xmlns:a="http://schemas.openxmlformats.org/drawingml/2006/main"/>
           <a:p xmlns:a="http://schemas.openxmlformats.org/drawingml/2006/main">
             <a:pPr>
-              <a:defRPr sz="2175" b="0">
-                <a:solidFill>
-                  <a:srgbClr val="142D31"/>
+              <a:defRPr sz="2100" b="0">
+                <a:solidFill>
+                  <a:srgbClr val="152A27"/>
                 </a:solidFill>
                 <a:latin typeface="DejaVu Sans"/>
                 <a:ea typeface="DejaVu Sans"/>
@@ -5794,15 +7456,43 @@
               </a:defRPr>
             </a:pPr>
             <a:r>
-              <a:rPr sz="2175" b="0">
-                <a:solidFill>
-                  <a:srgbClr val="142D31"/>
+              <a:rPr sz="2100" b="0">
+                <a:solidFill>
+                  <a:srgbClr val="152A27"/>
                 </a:solidFill>
                 <a:latin typeface="DejaVu Sans"/>
                 <a:ea typeface="DejaVu Sans"/>
                 <a:cs typeface="DejaVu Sans"/>
               </a:rPr>
-              <a:t>A proposed 3-5 pairs doing design, development or writing work. Begin with compatible wallets and test tokens.</a:t>
+              <a:t>3-5 client-freelancer pairs.</a:t>
+            </a:r>
+          </a:p>
+          <a:p xmlns:a="http://schemas.openxmlformats.org/drawingml/2006/main">
+            <a:r>
+              <a:t/>
+            </a:r>
+          </a:p>
+          <a:p xmlns:a="http://schemas.openxmlformats.org/drawingml/2006/main">
+            <a:pPr>
+              <a:defRPr sz="2100" b="0">
+                <a:solidFill>
+                  <a:srgbClr val="152A27"/>
+                </a:solidFill>
+                <a:latin typeface="DejaVu Sans"/>
+                <a:ea typeface="DejaVu Sans"/>
+                <a:cs typeface="DejaVu Sans"/>
+              </a:defRPr>
+            </a:pPr>
+            <a:r>
+              <a:rPr sz="2100" b="0">
+                <a:solidFill>
+                  <a:srgbClr val="152A27"/>
+                </a:solidFill>
+                <a:latin typeface="DejaVu Sans"/>
+                <a:ea typeface="DejaVu Sans"/>
+                <a:cs typeface="DejaVu Sans"/>
+              </a:rPr>
+              <a:t>One defined digital deliverable, a named reviewer and compatible Canton wallets.</a:t>
             </a:r>
           </a:p>
         </p:txBody>
@@ -5812,7 +7502,7 @@
           <p:cNvPr id="5" name="">
             <a:extLst xmlns:a="http://schemas.openxmlformats.org/drawingml/2006/main">
               <a:ext uri="{FF2B5EF4-FFF2-40B4-BE49-F238E27FC236}">
-                <a16:creationId xmlns:a16="http://schemas.microsoft.com/office/drawing/2014/main" id="{9C31822A-6ADE-4A5D-9EBE-EE74A9E07429}"/>
+                <a16:creationId xmlns:a16="http://schemas.microsoft.com/office/drawing/2014/main" id="{C0F24004-DB1F-42E2-89D0-619195BB17AD}"/>
               </a:ext>
             </a:extLst>
           </p:cNvPr>
@@ -5823,8 +7513,8 @@
         </p:nvSpPr>
         <p:spPr>
           <a:xfrm xmlns:a="http://schemas.openxmlformats.org/drawingml/2006/main">
-            <a:off x="6400800" y="2781300"/>
-            <a:ext cx="4905375" cy="495300"/>
+            <a:off x="6400800" y="2543175"/>
+            <a:ext cx="4972050" cy="476250"/>
           </a:xfrm>
           <a:prstGeom xmlns:a="http://schemas.openxmlformats.org/drawingml/2006/main" prst="rect">
             <a:avLst/>
@@ -5841,9 +7531,9 @@
           <a:lstStyle xmlns:a="http://schemas.openxmlformats.org/drawingml/2006/main"/>
           <a:p xmlns:a="http://schemas.openxmlformats.org/drawingml/2006/main">
             <a:pPr>
-              <a:defRPr sz="2250" b="1">
-                <a:solidFill>
-                  <a:srgbClr val="142D31"/>
+              <a:defRPr sz="2175" b="1">
+                <a:solidFill>
+                  <a:srgbClr val="146C56"/>
                 </a:solidFill>
                 <a:latin typeface="DejaVu Sans"/>
                 <a:ea typeface="DejaVu Sans"/>
@@ -5851,15 +7541,15 @@
               </a:defRPr>
             </a:pPr>
             <a:r>
-              <a:rPr sz="2250" b="1">
-                <a:solidFill>
-                  <a:srgbClr val="142D31"/>
+              <a:rPr sz="2175" b="1">
+                <a:solidFill>
+                  <a:srgbClr val="146C56"/>
                 </a:solidFill>
                 <a:latin typeface="DejaVu Sans"/>
                 <a:ea typeface="DejaVu Sans"/>
                 <a:cs typeface="DejaVu Sans"/>
               </a:rPr>
-              <a:t>What to learn</a:t>
+              <a:t>What the pilot must show</a:t>
             </a:r>
           </a:p>
         </p:txBody>
@@ -5869,7 +7559,7 @@
           <p:cNvPr id="6" name="">
             <a:extLst xmlns:a="http://schemas.openxmlformats.org/drawingml/2006/main">
               <a:ext uri="{FF2B5EF4-FFF2-40B4-BE49-F238E27FC236}">
-                <a16:creationId xmlns:a16="http://schemas.microsoft.com/office/drawing/2014/main" id="{C3F0635E-052E-4120-9BA7-553B08713905}"/>
+                <a16:creationId xmlns:a16="http://schemas.microsoft.com/office/drawing/2014/main" id="{A1772096-CFA5-47C0-9053-A2BA688BA882}"/>
               </a:ext>
             </a:extLst>
           </p:cNvPr>
@@ -5880,8 +7570,8 @@
         </p:nvSpPr>
         <p:spPr>
           <a:xfrm xmlns:a="http://schemas.openxmlformats.org/drawingml/2006/main">
-            <a:off x="6400800" y="3409950"/>
-            <a:ext cx="4905375" cy="2076450"/>
+            <a:off x="6400800" y="3219450"/>
+            <a:ext cx="4972050" cy="2476500"/>
           </a:xfrm>
           <a:prstGeom xmlns:a="http://schemas.openxmlformats.org/drawingml/2006/main" prst="rect">
             <a:avLst/>
@@ -5898,9 +7588,9 @@
           <a:lstStyle xmlns:a="http://schemas.openxmlformats.org/drawingml/2006/main"/>
           <a:p xmlns:a="http://schemas.openxmlformats.org/drawingml/2006/main">
             <a:pPr>
-              <a:defRPr sz="2175" b="0">
-                <a:solidFill>
-                  <a:srgbClr val="142D31"/>
+              <a:defRPr sz="2100" b="0">
+                <a:solidFill>
+                  <a:srgbClr val="152A27"/>
                 </a:solidFill>
                 <a:latin typeface="DejaVu Sans"/>
                 <a:ea typeface="DejaVu Sans"/>
@@ -5908,15 +7598,43 @@
               </a:defRPr>
             </a:pPr>
             <a:r>
-              <a:rPr sz="2175" b="0">
-                <a:solidFill>
-                  <a:srgbClr val="142D31"/>
+              <a:rPr sz="2100" b="0">
+                <a:solidFill>
+                  <a:srgbClr val="152A27"/>
                 </a:solidFill>
                 <a:latin typeface="DejaVu Sans"/>
                 <a:ea typeface="DejaVu Sans"/>
                 <a:cs typeface="DejaVu Sans"/>
               </a:rPr>
-              <a:t>Successful invite joins, complete funded workflows, wallet failures, repeat use and participant interviews.</a:t>
+              <a:t>Both people can join and complete the funded workflow.</a:t>
+            </a:r>
+          </a:p>
+          <a:p xmlns:a="http://schemas.openxmlformats.org/drawingml/2006/main">
+            <a:r>
+              <a:t/>
+            </a:r>
+          </a:p>
+          <a:p xmlns:a="http://schemas.openxmlformats.org/drawingml/2006/main">
+            <a:pPr>
+              <a:defRPr sz="2100" b="0">
+                <a:solidFill>
+                  <a:srgbClr val="152A27"/>
+                </a:solidFill>
+                <a:latin typeface="DejaVu Sans"/>
+                <a:ea typeface="DejaVu Sans"/>
+                <a:cs typeface="DejaVu Sans"/>
+              </a:defRPr>
+            </a:pPr>
+            <a:r>
+              <a:rPr sz="2100" b="0">
+                <a:solidFill>
+                  <a:srgbClr val="152A27"/>
+                </a:solidFill>
+                <a:latin typeface="DejaVu Sans"/>
+                <a:ea typeface="DejaVu Sans"/>
+                <a:cs typeface="DejaVu Sans"/>
+              </a:rPr>
+              <a:t>They understand approval and choose to return for a second task.</a:t>
             </a:r>
           </a:p>
         </p:txBody>
@@ -5926,7 +7644,7 @@
           <p:cNvPr id="7" name="">
             <a:extLst xmlns:a="http://schemas.openxmlformats.org/drawingml/2006/main">
               <a:ext uri="{FF2B5EF4-FFF2-40B4-BE49-F238E27FC236}">
-                <a16:creationId xmlns:a16="http://schemas.microsoft.com/office/drawing/2014/main" id="{A2B886C0-C3AA-4717-B02B-AF425915420D}"/>
+                <a16:creationId xmlns:a16="http://schemas.microsoft.com/office/drawing/2014/main" id="{6890D71E-5BC0-40D5-9C66-6322157C08BC}"/>
               </a:ext>
             </a:extLst>
           </p:cNvPr>
@@ -5937,8 +7655,8 @@
         </p:nvSpPr>
         <p:spPr>
           <a:xfrm xmlns:a="http://schemas.openxmlformats.org/drawingml/2006/main">
-            <a:off x="685800" y="6038850"/>
-            <a:ext cx="10401300" cy="609600"/>
+            <a:off x="628650" y="6115050"/>
+            <a:ext cx="10534650" cy="628650"/>
           </a:xfrm>
           <a:prstGeom xmlns:a="http://schemas.openxmlformats.org/drawingml/2006/main" prst="rect">
             <a:avLst/>
@@ -5955,9 +7673,9 @@
           <a:lstStyle xmlns:a="http://schemas.openxmlformats.org/drawingml/2006/main"/>
           <a:p xmlns:a="http://schemas.openxmlformats.org/drawingml/2006/main">
             <a:pPr>
-              <a:defRPr sz="1425" b="0">
-                <a:solidFill>
-                  <a:srgbClr val="52646B"/>
+              <a:defRPr sz="1350" b="0">
+                <a:solidFill>
+                  <a:srgbClr val="54645E"/>
                 </a:solidFill>
                 <a:latin typeface="DejaVu Sans"/>
                 <a:ea typeface="DejaVu Sans"/>
@@ -5965,15 +7683,15 @@
               </a:defRPr>
             </a:pPr>
             <a:r>
-              <a:rPr sz="1425" b="0">
-                <a:solidFill>
-                  <a:srgbClr val="52646B"/>
+              <a:rPr sz="1350" b="0">
+                <a:solidFill>
+                  <a:srgbClr val="54645E"/>
                 </a:solidFill>
                 <a:latin typeface="DejaVu Sans"/>
                 <a:ea typeface="DejaVu Sans"/>
                 <a:cs typeface="DejaVu Sans"/>
               </a:rPr>
-              <a:t>These are pilot targets and proposed metrics. No paying-user or retention figures are claimed.</a:t>
+              <a:t>Proposed audience and pilot. Customer demand and retention are not yet measured.</a:t>
             </a:r>
           </a:p>
         </p:txBody>
@@ -5981,20 +7699,20 @@
     </p:spTree>
     <p:extLst>
       <p:ext uri="{BB962C8B-B14F-4D97-AF65-F5344CB8AC3E}">
-        <p14:creationId xmlns:p14="http://schemas.microsoft.com/office/powerpoint/2010/main" val="51457815"/>
+        <p14:creationId xmlns:p14="http://schemas.microsoft.com/office/powerpoint/2010/main" val="1024147297"/>
       </p:ext>
     </p:extLst>
   </p:cSld>
 </p:sld>
 </file>
 
-<file path=ppt/slides/slide7.xml><?xml version="1.0" encoding="utf-8"?>
+<file path=ppt/slides/slide8.xml><?xml version="1.0" encoding="utf-8"?>
 <p:sld xmlns:p="http://schemas.openxmlformats.org/presentationml/2006/main">
   <p:cSld>
     <p:bg>
       <p:bgPr>
         <a:solidFill xmlns:a="http://schemas.openxmlformats.org/drawingml/2006/main">
-          <a:srgbClr val="FFFDFA"/>
+          <a:srgbClr val="FAFAF6"/>
         </a:solidFill>
       </p:bgPr>
     </p:bg>
@@ -6012,7 +7730,7 @@
           <p:cNvPr id="8" name="">
             <a:extLst xmlns:a="http://schemas.openxmlformats.org/drawingml/2006/main">
               <a:ext uri="{FF2B5EF4-FFF2-40B4-BE49-F238E27FC236}">
-                <a16:creationId xmlns:a16="http://schemas.microsoft.com/office/drawing/2014/main" id="{ED47CB49-D7A3-4B26-94B4-B82BE6241E70}"/>
+                <a16:creationId xmlns:a16="http://schemas.microsoft.com/office/drawing/2014/main" id="{F1C53D62-C2F3-448C-B305-1B1541001435}"/>
               </a:ext>
             </a:extLst>
           </p:cNvPr>
@@ -6023,8 +7741,8 @@
         </p:nvSpPr>
         <p:spPr>
           <a:xfrm xmlns:a="http://schemas.openxmlformats.org/drawingml/2006/main">
-            <a:off x="685800" y="457200"/>
-            <a:ext cx="10820400" cy="895350"/>
+            <a:off x="609600" y="447675"/>
+            <a:ext cx="10934700" cy="914400"/>
           </a:xfrm>
           <a:prstGeom xmlns:a="http://schemas.openxmlformats.org/drawingml/2006/main" prst="rect">
             <a:avLst/>
@@ -6041,9 +7759,9 @@
           <a:lstStyle xmlns:a="http://schemas.openxmlformats.org/drawingml/2006/main"/>
           <a:p xmlns:a="http://schemas.openxmlformats.org/drawingml/2006/main">
             <a:pPr>
-              <a:defRPr sz="3600" b="1">
-                <a:solidFill>
-                  <a:srgbClr val="142D31"/>
+              <a:defRPr sz="3675" b="1">
+                <a:solidFill>
+                  <a:srgbClr val="152A27"/>
                 </a:solidFill>
                 <a:latin typeface="DejaVu Sans"/>
                 <a:ea typeface="DejaVu Sans"/>
@@ -6051,15 +7769,15 @@
               </a:defRPr>
             </a:pPr>
             <a:r>
-              <a:rPr sz="3600" b="1">
-                <a:solidFill>
-                  <a:srgbClr val="142D31"/>
+              <a:rPr sz="3675" b="1">
+                <a:solidFill>
+                  <a:srgbClr val="152A27"/>
                 </a:solidFill>
                 <a:latin typeface="DejaVu Sans"/>
                 <a:ea typeface="DejaVu Sans"/>
                 <a:cs typeface="DejaVu Sans"/>
               </a:rPr>
-              <a:t>Business and distribution</a:t>
+              <a:t>A subscription for recurring work</a:t>
             </a:r>
           </a:p>
         </p:txBody>
@@ -6069,7 +7787,7 @@
           <p:cNvPr id="2" name="">
             <a:extLst xmlns:a="http://schemas.openxmlformats.org/drawingml/2006/main">
               <a:ext uri="{FF2B5EF4-FFF2-40B4-BE49-F238E27FC236}">
-                <a16:creationId xmlns:a16="http://schemas.microsoft.com/office/drawing/2014/main" id="{D068D21E-71FB-4900-B238-0DDCCFADCC44}"/>
+                <a16:creationId xmlns:a16="http://schemas.microsoft.com/office/drawing/2014/main" id="{0CD7D3BA-B6CA-4186-929B-9EBCEF6F34B8}"/>
               </a:ext>
             </a:extLst>
           </p:cNvPr>
@@ -6080,8 +7798,8 @@
         </p:nvSpPr>
         <p:spPr>
           <a:xfrm xmlns:a="http://schemas.openxmlformats.org/drawingml/2006/main">
-            <a:off x="685800" y="1447800"/>
-            <a:ext cx="10648950" cy="781050"/>
+            <a:off x="628650" y="1476375"/>
+            <a:ext cx="10934700" cy="685800"/>
           </a:xfrm>
           <a:prstGeom xmlns:a="http://schemas.openxmlformats.org/drawingml/2006/main" prst="rect">
             <a:avLst/>
@@ -6098,9 +7816,9 @@
           <a:lstStyle xmlns:a="http://schemas.openxmlformats.org/drawingml/2006/main"/>
           <a:p xmlns:a="http://schemas.openxmlformats.org/drawingml/2006/main">
             <a:pPr>
-              <a:defRPr sz="2250" b="0">
-                <a:solidFill>
-                  <a:srgbClr val="087F80"/>
+              <a:defRPr sz="2100" b="0">
+                <a:solidFill>
+                  <a:srgbClr val="146C56"/>
                 </a:solidFill>
                 <a:latin typeface="DejaVu Sans"/>
                 <a:ea typeface="DejaVu Sans"/>
@@ -6108,15 +7826,15 @@
               </a:defRPr>
             </a:pPr>
             <a:r>
-              <a:rPr sz="2250" b="0">
-                <a:solidFill>
-                  <a:srgbClr val="087F80"/>
+              <a:rPr sz="2100" b="0">
+                <a:solidFill>
+                  <a:srgbClr val="146C56"/>
                 </a:solidFill>
                 <a:latin typeface="DejaVu Sans"/>
                 <a:ea typeface="DejaVu Sans"/>
                 <a:cs typeface="DejaVu Sans"/>
               </a:rPr>
-              <a:t>Completed engagements can bring the next client.</a:t>
+              <a:t>Optional VIP is the proposed commercial model.</a:t>
             </a:r>
           </a:p>
         </p:txBody>
@@ -6126,7 +7844,7 @@
           <p:cNvPr id="3" name="">
             <a:extLst xmlns:a="http://schemas.openxmlformats.org/drawingml/2006/main">
               <a:ext uri="{FF2B5EF4-FFF2-40B4-BE49-F238E27FC236}">
-                <a16:creationId xmlns:a16="http://schemas.microsoft.com/office/drawing/2014/main" id="{7281CF2F-9495-43C0-A0D9-E5544D46CD0C}"/>
+                <a16:creationId xmlns:a16="http://schemas.microsoft.com/office/drawing/2014/main" id="{6AFA86EC-0F28-4044-BE08-F1801922A20E}"/>
               </a:ext>
             </a:extLst>
           </p:cNvPr>
@@ -6137,8 +7855,8 @@
         </p:nvSpPr>
         <p:spPr>
           <a:xfrm xmlns:a="http://schemas.openxmlformats.org/drawingml/2006/main">
-            <a:off x="685800" y="2781300"/>
-            <a:ext cx="4905375" cy="495300"/>
+            <a:off x="628650" y="2543175"/>
+            <a:ext cx="4972050" cy="476250"/>
           </a:xfrm>
           <a:prstGeom xmlns:a="http://schemas.openxmlformats.org/drawingml/2006/main" prst="rect">
             <a:avLst/>
@@ -6155,9 +7873,9 @@
           <a:lstStyle xmlns:a="http://schemas.openxmlformats.org/drawingml/2006/main"/>
           <a:p xmlns:a="http://schemas.openxmlformats.org/drawingml/2006/main">
             <a:pPr>
-              <a:defRPr sz="2250" b="1">
-                <a:solidFill>
-                  <a:srgbClr val="142D31"/>
+              <a:defRPr sz="2175" b="1">
+                <a:solidFill>
+                  <a:srgbClr val="146C56"/>
                 </a:solidFill>
                 <a:latin typeface="DejaVu Sans"/>
                 <a:ea typeface="DejaVu Sans"/>
@@ -6165,15 +7883,15 @@
               </a:defRPr>
             </a:pPr>
             <a:r>
-              <a:rPr sz="2250" b="1">
-                <a:solidFill>
-                  <a:srgbClr val="142D31"/>
+              <a:rPr sz="2175" b="1">
+                <a:solidFill>
+                  <a:srgbClr val="146C56"/>
                 </a:solidFill>
                 <a:latin typeface="DejaVu Sans"/>
                 <a:ea typeface="DejaVu Sans"/>
                 <a:cs typeface="DejaVu Sans"/>
               </a:rPr>
-              <a:t>Acquisition</a:t>
+              <a:t>Benefits to validate</a:t>
             </a:r>
           </a:p>
         </p:txBody>
@@ -6183,7 +7901,7 @@
           <p:cNvPr id="4" name="">
             <a:extLst xmlns:a="http://schemas.openxmlformats.org/drawingml/2006/main">
               <a:ext uri="{FF2B5EF4-FFF2-40B4-BE49-F238E27FC236}">
-                <a16:creationId xmlns:a16="http://schemas.microsoft.com/office/drawing/2014/main" id="{CB83271E-40D0-4626-ABD4-46B2B780B427}"/>
+                <a16:creationId xmlns:a16="http://schemas.microsoft.com/office/drawing/2014/main" id="{17103EF5-7E14-4258-8981-DA575A4A2B7D}"/>
               </a:ext>
             </a:extLst>
           </p:cNvPr>
@@ -6194,8 +7912,8 @@
         </p:nvSpPr>
         <p:spPr>
           <a:xfrm xmlns:a="http://schemas.openxmlformats.org/drawingml/2006/main">
-            <a:off x="685800" y="3409950"/>
-            <a:ext cx="4905375" cy="2076450"/>
+            <a:off x="628650" y="3219450"/>
+            <a:ext cx="4972050" cy="2476500"/>
           </a:xfrm>
           <a:prstGeom xmlns:a="http://schemas.openxmlformats.org/drawingml/2006/main" prst="rect">
             <a:avLst/>
@@ -6212,9 +7930,9 @@
           <a:lstStyle xmlns:a="http://schemas.openxmlformats.org/drawingml/2006/main"/>
           <a:p xmlns:a="http://schemas.openxmlformats.org/drawingml/2006/main">
             <a:pPr>
-              <a:defRPr sz="2175" b="0">
-                <a:solidFill>
-                  <a:srgbClr val="142D31"/>
+              <a:defRPr sz="2100" b="0">
+                <a:solidFill>
+                  <a:srgbClr val="152A27"/>
                 </a:solidFill>
                 <a:latin typeface="DejaVu Sans"/>
                 <a:ea typeface="DejaVu Sans"/>
@@ -6222,15 +7940,89 @@
               </a:defRPr>
             </a:pPr>
             <a:r>
-              <a:rPr sz="2175" b="0">
-                <a:solidFill>
-                  <a:srgbClr val="142D31"/>
+              <a:rPr sz="2100" b="0">
+                <a:solidFill>
+                  <a:srgbClr val="152A27"/>
                 </a:solidFill>
                 <a:latin typeface="DejaVu Sans"/>
                 <a:ea typeface="DejaVu Sans"/>
                 <a:cs typeface="DejaVu Sans"/>
               </a:rPr>
-              <a:t>Recruit freelance pairs through proposed community channels. Use completed workflows as consented case studies and test counterparty referrals.</a:t>
+              <a:t>Reusable offer templates.</a:t>
+            </a:r>
+          </a:p>
+          <a:p xmlns:a="http://schemas.openxmlformats.org/drawingml/2006/main">
+            <a:pPr>
+              <a:defRPr sz="2100" b="0">
+                <a:solidFill>
+                  <a:srgbClr val="152A27"/>
+                </a:solidFill>
+                <a:latin typeface="DejaVu Sans"/>
+                <a:ea typeface="DejaVu Sans"/>
+                <a:cs typeface="DejaVu Sans"/>
+              </a:defRPr>
+            </a:pPr>
+            <a:r>
+              <a:rPr sz="2100" b="0">
+                <a:solidFill>
+                  <a:srgbClr val="152A27"/>
+                </a:solidFill>
+                <a:latin typeface="DejaVu Sans"/>
+                <a:ea typeface="DejaVu Sans"/>
+                <a:cs typeface="DejaVu Sans"/>
+              </a:rPr>
+              <a:t>Deal activity exports.</a:t>
+            </a:r>
+          </a:p>
+          <a:p xmlns:a="http://schemas.openxmlformats.org/drawingml/2006/main">
+            <a:pPr>
+              <a:defRPr sz="2100" b="0">
+                <a:solidFill>
+                  <a:srgbClr val="152A27"/>
+                </a:solidFill>
+                <a:latin typeface="DejaVu Sans"/>
+                <a:ea typeface="DejaVu Sans"/>
+                <a:cs typeface="DejaVu Sans"/>
+              </a:defRPr>
+            </a:pPr>
+            <a:r>
+              <a:rPr sz="2100" b="0">
+                <a:solidFill>
+                  <a:srgbClr val="152A27"/>
+                </a:solidFill>
+                <a:latin typeface="DejaVu Sans"/>
+                <a:ea typeface="DejaVu Sans"/>
+                <a:cs typeface="DejaVu Sans"/>
+              </a:rPr>
+              <a:t>More marketplace listings.</a:t>
+            </a:r>
+          </a:p>
+          <a:p xmlns:a="http://schemas.openxmlformats.org/drawingml/2006/main">
+            <a:r>
+              <a:t/>
+            </a:r>
+          </a:p>
+          <a:p xmlns:a="http://schemas.openxmlformats.org/drawingml/2006/main">
+            <a:pPr>
+              <a:defRPr sz="2100" b="0">
+                <a:solidFill>
+                  <a:srgbClr val="152A27"/>
+                </a:solidFill>
+                <a:latin typeface="DejaVu Sans"/>
+                <a:ea typeface="DejaVu Sans"/>
+                <a:cs typeface="DejaVu Sans"/>
+              </a:defRPr>
+            </a:pPr>
+            <a:r>
+              <a:rPr sz="2100" b="0">
+                <a:solidFill>
+                  <a:srgbClr val="152A27"/>
+                </a:solidFill>
+                <a:latin typeface="DejaVu Sans"/>
+                <a:ea typeface="DejaVu Sans"/>
+                <a:cs typeface="DejaVu Sans"/>
+              </a:rPr>
+              <a:t>The buyer is a freelancer or small team managing repeat projects.</a:t>
             </a:r>
           </a:p>
         </p:txBody>
@@ -6240,7 +8032,7 @@
           <p:cNvPr id="5" name="">
             <a:extLst xmlns:a="http://schemas.openxmlformats.org/drawingml/2006/main">
               <a:ext uri="{FF2B5EF4-FFF2-40B4-BE49-F238E27FC236}">
-                <a16:creationId xmlns:a16="http://schemas.microsoft.com/office/drawing/2014/main" id="{518E0296-149F-4852-841D-23DD0B43B8C5}"/>
+                <a16:creationId xmlns:a16="http://schemas.microsoft.com/office/drawing/2014/main" id="{1A17A04E-5FF5-421C-9462-5736E8F06447}"/>
               </a:ext>
             </a:extLst>
           </p:cNvPr>
@@ -6251,8 +8043,8 @@
         </p:nvSpPr>
         <p:spPr>
           <a:xfrm xmlns:a="http://schemas.openxmlformats.org/drawingml/2006/main">
-            <a:off x="6400800" y="2781300"/>
-            <a:ext cx="4905375" cy="495300"/>
+            <a:off x="6400800" y="2543175"/>
+            <a:ext cx="4972050" cy="476250"/>
           </a:xfrm>
           <a:prstGeom xmlns:a="http://schemas.openxmlformats.org/drawingml/2006/main" prst="rect">
             <a:avLst/>
@@ -6269,9 +8061,9 @@
           <a:lstStyle xmlns:a="http://schemas.openxmlformats.org/drawingml/2006/main"/>
           <a:p xmlns:a="http://schemas.openxmlformats.org/drawingml/2006/main">
             <a:pPr>
-              <a:defRPr sz="2250" b="1">
-                <a:solidFill>
-                  <a:srgbClr val="142D31"/>
+              <a:defRPr sz="2175" b="1">
+                <a:solidFill>
+                  <a:srgbClr val="146C56"/>
                 </a:solidFill>
                 <a:latin typeface="DejaVu Sans"/>
                 <a:ea typeface="DejaVu Sans"/>
@@ -6279,15 +8071,15 @@
               </a:defRPr>
             </a:pPr>
             <a:r>
-              <a:rPr sz="2250" b="1">
-                <a:solidFill>
-                  <a:srgbClr val="142D31"/>
+              <a:rPr sz="2175" b="1">
+                <a:solidFill>
+                  <a:srgbClr val="146C56"/>
                 </a:solidFill>
                 <a:latin typeface="DejaVu Sans"/>
                 <a:ea typeface="DejaVu Sans"/>
                 <a:cs typeface="DejaVu Sans"/>
               </a:rPr>
-              <a:t>Optional VIP</a:t>
+              <a:t>How to test it</a:t>
             </a:r>
           </a:p>
         </p:txBody>
@@ -6297,7 +8089,7 @@
           <p:cNvPr id="6" name="">
             <a:extLst xmlns:a="http://schemas.openxmlformats.org/drawingml/2006/main">
               <a:ext uri="{FF2B5EF4-FFF2-40B4-BE49-F238E27FC236}">
-                <a16:creationId xmlns:a16="http://schemas.microsoft.com/office/drawing/2014/main" id="{18586A00-3C54-4C9F-911E-346753BD1D3C}"/>
+                <a16:creationId xmlns:a16="http://schemas.microsoft.com/office/drawing/2014/main" id="{E2499607-5BDD-4807-8D3D-4EA4D7533206}"/>
               </a:ext>
             </a:extLst>
           </p:cNvPr>
@@ -6308,8 +8100,8 @@
         </p:nvSpPr>
         <p:spPr>
           <a:xfrm xmlns:a="http://schemas.openxmlformats.org/drawingml/2006/main">
-            <a:off x="6400800" y="3409950"/>
-            <a:ext cx="4905375" cy="2076450"/>
+            <a:off x="6400800" y="3219450"/>
+            <a:ext cx="4972050" cy="2476500"/>
           </a:xfrm>
           <a:prstGeom xmlns:a="http://schemas.openxmlformats.org/drawingml/2006/main" prst="rect">
             <a:avLst/>
@@ -6326,9 +8118,9 @@
           <a:lstStyle xmlns:a="http://schemas.openxmlformats.org/drawingml/2006/main"/>
           <a:p xmlns:a="http://schemas.openxmlformats.org/drawingml/2006/main">
             <a:pPr>
-              <a:defRPr sz="2175" b="0">
-                <a:solidFill>
-                  <a:srgbClr val="142D31"/>
+              <a:defRPr sz="2100" b="0">
+                <a:solidFill>
+                  <a:srgbClr val="152A27"/>
                 </a:solidFill>
                 <a:latin typeface="DejaVu Sans"/>
                 <a:ea typeface="DejaVu Sans"/>
@@ -6336,15 +8128,43 @@
               </a:defRPr>
             </a:pPr>
             <a:r>
-              <a:rPr sz="2175" b="0">
-                <a:solidFill>
-                  <a:srgbClr val="142D31"/>
+              <a:rPr sz="2100" b="0">
+                <a:solidFill>
+                  <a:srgbClr val="152A27"/>
                 </a:solidFill>
                 <a:latin typeface="DejaVu Sans"/>
                 <a:ea typeface="DejaVu Sans"/>
                 <a:cs typeface="DejaVu Sans"/>
               </a:rPr>
-              <a:t>Validate willingness to pay for repeat-project tools. Templates, listings and exports appear in the preview. Pricing and billing remain pending.</a:t>
+              <a:t>Observe second deals and interview repeat users.</a:t>
+            </a:r>
+          </a:p>
+          <a:p xmlns:a="http://schemas.openxmlformats.org/drawingml/2006/main">
+            <a:r>
+              <a:t/>
+            </a:r>
+          </a:p>
+          <a:p xmlns:a="http://schemas.openxmlformats.org/drawingml/2006/main">
+            <a:pPr>
+              <a:defRPr sz="2100" b="0">
+                <a:solidFill>
+                  <a:srgbClr val="152A27"/>
+                </a:solidFill>
+                <a:latin typeface="DejaVu Sans"/>
+                <a:ea typeface="DejaVu Sans"/>
+                <a:cs typeface="DejaVu Sans"/>
+              </a:defRPr>
+            </a:pPr>
+            <a:r>
+              <a:rPr sz="2100" b="0">
+                <a:solidFill>
+                  <a:srgbClr val="152A27"/>
+                </a:solidFill>
+                <a:latin typeface="DejaVu Sans"/>
+                <a:ea typeface="DejaVu Sans"/>
+                <a:cs typeface="DejaVu Sans"/>
+              </a:rPr>
+              <a:t>Identify the benefit they would pay for before setting a price or building billing.</a:t>
             </a:r>
           </a:p>
         </p:txBody>
@@ -6354,7 +8174,7 @@
           <p:cNvPr id="7" name="">
             <a:extLst xmlns:a="http://schemas.openxmlformats.org/drawingml/2006/main">
               <a:ext uri="{FF2B5EF4-FFF2-40B4-BE49-F238E27FC236}">
-                <a16:creationId xmlns:a16="http://schemas.microsoft.com/office/drawing/2014/main" id="{E51562C9-7821-4D0D-B648-10D2627A0B1A}"/>
+                <a16:creationId xmlns:a16="http://schemas.microsoft.com/office/drawing/2014/main" id="{EC6873CF-56D8-4D0C-8589-92D0EB0EE150}"/>
               </a:ext>
             </a:extLst>
           </p:cNvPr>
@@ -6365,8 +8185,8 @@
         </p:nvSpPr>
         <p:spPr>
           <a:xfrm xmlns:a="http://schemas.openxmlformats.org/drawingml/2006/main">
-            <a:off x="685800" y="6038850"/>
-            <a:ext cx="10401300" cy="609600"/>
+            <a:off x="628650" y="6115050"/>
+            <a:ext cx="10534650" cy="628650"/>
           </a:xfrm>
           <a:prstGeom xmlns:a="http://schemas.openxmlformats.org/drawingml/2006/main" prst="rect">
             <a:avLst/>
@@ -6383,9 +8203,9 @@
           <a:lstStyle xmlns:a="http://schemas.openxmlformats.org/drawingml/2006/main"/>
           <a:p xmlns:a="http://schemas.openxmlformats.org/drawingml/2006/main">
             <a:pPr>
-              <a:defRPr sz="1425" b="0">
-                <a:solidFill>
-                  <a:srgbClr val="52646B"/>
+              <a:defRPr sz="1350" b="0">
+                <a:solidFill>
+                  <a:srgbClr val="54645E"/>
                 </a:solidFill>
                 <a:latin typeface="DejaVu Sans"/>
                 <a:ea typeface="DejaVu Sans"/>
@@ -6393,15 +8213,15 @@
               </a:defRPr>
             </a:pPr>
             <a:r>
-              <a:rPr sz="1425" b="0">
-                <a:solidFill>
-                  <a:srgbClr val="52646B"/>
+              <a:rPr sz="1350" b="0">
+                <a:solidFill>
+                  <a:srgbClr val="54645E"/>
                 </a:solidFill>
                 <a:latin typeface="DejaVu Sans"/>
                 <a:ea typeface="DejaVu Sans"/>
                 <a:cs typeface="DejaVu Sans"/>
               </a:rPr>
-              <a:t>Points are planned. No transaction-fee schedule, reward income or confirmed partnership is assumed.</a:t>
+              <a:t>VIP billing and Points issuance are pending. Private chat and escrow are core features.</a:t>
             </a:r>
           </a:p>
         </p:txBody>
@@ -6409,20 +8229,20 @@
     </p:spTree>
     <p:extLst>
       <p:ext uri="{BB962C8B-B14F-4D97-AF65-F5344CB8AC3E}">
-        <p14:creationId xmlns:p14="http://schemas.microsoft.com/office/powerpoint/2010/main" val="1497272735"/>
+        <p14:creationId xmlns:p14="http://schemas.microsoft.com/office/powerpoint/2010/main" val="1601419562"/>
       </p:ext>
     </p:extLst>
   </p:cSld>
 </p:sld>
 </file>
 
-<file path=ppt/slides/slide8.xml><?xml version="1.0" encoding="utf-8"?>
+<file path=ppt/slides/slide9.xml><?xml version="1.0" encoding="utf-8"?>
 <p:sld xmlns:p="http://schemas.openxmlformats.org/presentationml/2006/main">
   <p:cSld>
     <p:bg>
       <p:bgPr>
         <a:solidFill xmlns:a="http://schemas.openxmlformats.org/drawingml/2006/main">
-          <a:srgbClr val="FFFDFA"/>
+          <a:srgbClr val="FAFAF6"/>
         </a:solidFill>
       </p:bgPr>
     </p:bg>
@@ -6437,10 +8257,10 @@
       </p:grpSpPr>
       <p:sp>
         <p:nvSpPr>
-          <p:cNvPr id="8" name="">
+          <p:cNvPr id="5" name="">
             <a:extLst xmlns:a="http://schemas.openxmlformats.org/drawingml/2006/main">
               <a:ext uri="{FF2B5EF4-FFF2-40B4-BE49-F238E27FC236}">
-                <a16:creationId xmlns:a16="http://schemas.microsoft.com/office/drawing/2014/main" id="{F3E2757E-C17B-45B0-8841-FDD178302D0A}"/>
+                <a16:creationId xmlns:a16="http://schemas.microsoft.com/office/drawing/2014/main" id="{EA84DC96-32FD-434A-AED1-54CFE95278F7}"/>
               </a:ext>
             </a:extLst>
           </p:cNvPr>
@@ -6451,8 +8271,8 @@
         </p:nvSpPr>
         <p:spPr>
           <a:xfrm xmlns:a="http://schemas.openxmlformats.org/drawingml/2006/main">
-            <a:off x="685800" y="457200"/>
-            <a:ext cx="10820400" cy="895350"/>
+            <a:off x="609600" y="447675"/>
+            <a:ext cx="10934700" cy="914400"/>
           </a:xfrm>
           <a:prstGeom xmlns:a="http://schemas.openxmlformats.org/drawingml/2006/main" prst="rect">
             <a:avLst/>
@@ -6469,9 +8289,9 @@
           <a:lstStyle xmlns:a="http://schemas.openxmlformats.org/drawingml/2006/main"/>
           <a:p xmlns:a="http://schemas.openxmlformats.org/drawingml/2006/main">
             <a:pPr>
-              <a:defRPr sz="3600" b="1">
-                <a:solidFill>
-                  <a:srgbClr val="142D31"/>
+              <a:defRPr sz="3675" b="1">
+                <a:solidFill>
+                  <a:srgbClr val="152A27"/>
                 </a:solidFill>
                 <a:latin typeface="DejaVu Sans"/>
                 <a:ea typeface="DejaVu Sans"/>
@@ -6479,15 +8299,15 @@
               </a:defRPr>
             </a:pPr>
             <a:r>
-              <a:rPr sz="3600" b="1">
-                <a:solidFill>
-                  <a:srgbClr val="142D31"/>
+              <a:rPr sz="3675" b="1">
+                <a:solidFill>
+                  <a:srgbClr val="152A27"/>
                 </a:solidFill>
                 <a:latin typeface="DejaVu Sans"/>
                 <a:ea typeface="DejaVu Sans"/>
                 <a:cs typeface="DejaVu Sans"/>
               </a:rPr>
-              <a:t>The next Canton pilot</a:t>
+              <a:t>A pilot with measurable decisions</a:t>
             </a:r>
           </a:p>
         </p:txBody>
@@ -6497,7 +8317,7 @@
           <p:cNvPr id="2" name="">
             <a:extLst xmlns:a="http://schemas.openxmlformats.org/drawingml/2006/main">
               <a:ext uri="{FF2B5EF4-FFF2-40B4-BE49-F238E27FC236}">
-                <a16:creationId xmlns:a16="http://schemas.microsoft.com/office/drawing/2014/main" id="{8AD53C9C-BDDE-4686-8F1D-29F951B758FA}"/>
+                <a16:creationId xmlns:a16="http://schemas.microsoft.com/office/drawing/2014/main" id="{46F8F40A-F639-41A9-8298-AFA83878D23F}"/>
               </a:ext>
             </a:extLst>
           </p:cNvPr>
@@ -6508,8 +8328,8 @@
         </p:nvSpPr>
         <p:spPr>
           <a:xfrm xmlns:a="http://schemas.openxmlformats.org/drawingml/2006/main">
-            <a:off x="685800" y="1447800"/>
-            <a:ext cx="10648950" cy="781050"/>
+            <a:off x="628650" y="1476375"/>
+            <a:ext cx="10934700" cy="685800"/>
           </a:xfrm>
           <a:prstGeom xmlns:a="http://schemas.openxmlformats.org/drawingml/2006/main" prst="rect">
             <a:avLst/>
@@ -6526,9 +8346,9 @@
           <a:lstStyle xmlns:a="http://schemas.openxmlformats.org/drawingml/2006/main"/>
           <a:p xmlns:a="http://schemas.openxmlformats.org/drawingml/2006/main">
             <a:pPr>
-              <a:defRPr sz="2250" b="0">
-                <a:solidFill>
-                  <a:srgbClr val="087F80"/>
+              <a:defRPr sz="2100" b="0">
+                <a:solidFill>
+                  <a:srgbClr val="146C56"/>
                 </a:solidFill>
                 <a:latin typeface="DejaVu Sans"/>
                 <a:ea typeface="DejaVu Sans"/>
@@ -6536,25 +8356,344 @@
               </a:defRPr>
             </a:pPr>
             <a:r>
-              <a:rPr sz="2250" b="0">
-                <a:solidFill>
-                  <a:srgbClr val="087F80"/>
+              <a:rPr sz="2100" b="0">
+                <a:solidFill>
+                  <a:srgbClr val="146C56"/>
                 </a:solidFill>
                 <a:latin typeface="DejaVu Sans"/>
                 <a:ea typeface="DejaVu Sans"/>
                 <a:cs typeface="DejaVu Sans"/>
               </a:rPr>
-              <a:t>Verify the current release, then validate repeat use.</a:t>
-            </a:r>
-          </a:p>
-        </p:txBody>
-      </p:sp>
-      <p:sp>
-        <p:nvSpPr>
-          <p:cNvPr id="3" name="">
+              <a:t>Recruit pairs, observe the first deal, then test repeat use.</a:t>
+            </a:r>
+          </a:p>
+        </p:txBody>
+      </p:sp>
+      <p:graphicFrame>
+        <p:nvGraphicFramePr>
+          <p:cNvPr id="7" name=""/>
+          <p:cNvGraphicFramePr/>
+          <p:nvPr/>
+        </p:nvGraphicFramePr>
+        <p:xfrm>
+          <a:off xmlns:a="http://schemas.openxmlformats.org/drawingml/2006/main" x="628650" y="2381250"/>
+          <a:ext xmlns:a="http://schemas.openxmlformats.org/drawingml/2006/main" cx="10934700" cy="3143250"/>
+        </p:xfrm>
+        <a:graphic xmlns:a="http://schemas.openxmlformats.org/drawingml/2006/main">
+          <a:graphicData uri="http://schemas.openxmlformats.org/drawingml/2006/table">
+            <a:tbl>
+              <a:tblPr firstRow="0" bandRow="0"/>
+              <a:tblGrid>
+                <a:gridCol w="2524125"/>
+                <a:gridCol w="4000500"/>
+                <a:gridCol w="4410075"/>
+              </a:tblGrid>
+              <a:tr h="785813">
+                <a:tc>
+                  <a:txBody>
+                    <a:bodyPr/>
+                    <a:lstStyle/>
+                    <a:p>
+                      <a:r>
+                        <a:rPr sz="1800" b="1">
+                          <a:solidFill>
+                            <a:srgbClr val="FFFFFF"/>
+                          </a:solidFill>
+                          <a:latin typeface="DejaVu Sans"/>
+                          <a:ea typeface="DejaVu Sans"/>
+                          <a:cs typeface="DejaVu Sans"/>
+                        </a:rPr>
+                        <a:t>Proposed measure</a:t>
+                      </a:r>
+                    </a:p>
+                  </a:txBody>
+                  <a:tcPr marL="142875" marR="142875" marT="76200" marB="76200">
+                    <a:solidFill>
+                      <a:srgbClr val="152A27"/>
+                    </a:solidFill>
+                  </a:tcPr>
+                </a:tc>
+                <a:tc>
+                  <a:txBody>
+                    <a:bodyPr/>
+                    <a:lstStyle/>
+                    <a:p>
+                      <a:r>
+                        <a:rPr sz="1800" b="1">
+                          <a:solidFill>
+                            <a:srgbClr val="FFFFFF"/>
+                          </a:solidFill>
+                          <a:latin typeface="DejaVu Sans"/>
+                          <a:ea typeface="DejaVu Sans"/>
+                          <a:cs typeface="DejaVu Sans"/>
+                        </a:rPr>
+                        <a:t>Target for a small pilot</a:t>
+                      </a:r>
+                    </a:p>
+                  </a:txBody>
+                  <a:tcPr marL="142875" marR="142875" marT="76200" marB="76200">
+                    <a:solidFill>
+                      <a:srgbClr val="152A27"/>
+                    </a:solidFill>
+                  </a:tcPr>
+                </a:tc>
+                <a:tc>
+                  <a:txBody>
+                    <a:bodyPr/>
+                    <a:lstStyle/>
+                    <a:p>
+                      <a:r>
+                        <a:rPr sz="1800" b="1">
+                          <a:solidFill>
+                            <a:srgbClr val="FFFFFF"/>
+                          </a:solidFill>
+                          <a:latin typeface="DejaVu Sans"/>
+                          <a:ea typeface="DejaVu Sans"/>
+                          <a:cs typeface="DejaVu Sans"/>
+                        </a:rPr>
+                        <a:t>Decision</a:t>
+                      </a:r>
+                    </a:p>
+                  </a:txBody>
+                  <a:tcPr marL="142875" marR="142875" marT="76200" marB="76200">
+                    <a:solidFill>
+                      <a:srgbClr val="152A27"/>
+                    </a:solidFill>
+                  </a:tcPr>
+                </a:tc>
+              </a:tr>
+              <a:tr h="785813">
+                <a:tc>
+                  <a:txBody>
+                    <a:bodyPr/>
+                    <a:lstStyle/>
+                    <a:p>
+                      <a:r>
+                        <a:rPr sz="1800" b="0">
+                          <a:solidFill>
+                            <a:srgbClr val="152A27"/>
+                          </a:solidFill>
+                          <a:latin typeface="DejaVu Sans"/>
+                          <a:ea typeface="DejaVu Sans"/>
+                          <a:cs typeface="DejaVu Sans"/>
+                        </a:rPr>
+                        <a:t>Invite and deal completion</a:t>
+                      </a:r>
+                    </a:p>
+                  </a:txBody>
+                  <a:tcPr marL="142875" marR="142875" marT="76200" marB="76200">
+                    <a:solidFill>
+                      <a:srgbClr val="F0F3EE"/>
+                    </a:solidFill>
+                  </a:tcPr>
+                </a:tc>
+                <a:tc>
+                  <a:txBody>
+                    <a:bodyPr/>
+                    <a:lstStyle/>
+                    <a:p>
+                      <a:r>
+                        <a:rPr sz="1800" b="0">
+                          <a:solidFill>
+                            <a:srgbClr val="152A27"/>
+                          </a:solidFill>
+                          <a:latin typeface="DejaVu Sans"/>
+                          <a:ea typeface="DejaVu Sans"/>
+                          <a:cs typeface="DejaVu Sans"/>
+                        </a:rPr>
+                        <a:t>At least 80% of controlled attempts</a:t>
+                      </a:r>
+                    </a:p>
+                  </a:txBody>
+                  <a:tcPr marL="142875" marR="142875" marT="76200" marB="76200">
+                    <a:solidFill>
+                      <a:srgbClr val="F0F3EE"/>
+                    </a:solidFill>
+                  </a:tcPr>
+                </a:tc>
+                <a:tc>
+                  <a:txBody>
+                    <a:bodyPr/>
+                    <a:lstStyle/>
+                    <a:p>
+                      <a:r>
+                        <a:rPr sz="1800" b="0">
+                          <a:solidFill>
+                            <a:srgbClr val="152A27"/>
+                          </a:solidFill>
+                          <a:latin typeface="DejaVu Sans"/>
+                          <a:ea typeface="DejaVu Sans"/>
+                          <a:cs typeface="DejaVu Sans"/>
+                        </a:rPr>
+                        <a:t>Fix recurring failures before expanding.</a:t>
+                      </a:r>
+                    </a:p>
+                  </a:txBody>
+                  <a:tcPr marL="142875" marR="142875" marT="76200" marB="76200">
+                    <a:solidFill>
+                      <a:srgbClr val="F0F3EE"/>
+                    </a:solidFill>
+                  </a:tcPr>
+                </a:tc>
+              </a:tr>
+              <a:tr h="785813">
+                <a:tc>
+                  <a:txBody>
+                    <a:bodyPr/>
+                    <a:lstStyle/>
+                    <a:p>
+                      <a:r>
+                        <a:rPr sz="1800" b="0">
+                          <a:solidFill>
+                            <a:srgbClr val="152A27"/>
+                          </a:solidFill>
+                          <a:latin typeface="DejaVu Sans"/>
+                          <a:ea typeface="DejaVu Sans"/>
+                          <a:cs typeface="DejaVu Sans"/>
+                        </a:rPr>
+                        <a:t>Repeat use</a:t>
+                      </a:r>
+                    </a:p>
+                  </a:txBody>
+                  <a:tcPr marL="142875" marR="142875" marT="76200" marB="76200">
+                    <a:solidFill>
+                      <a:srgbClr val="FFFFFF"/>
+                    </a:solidFill>
+                  </a:tcPr>
+                </a:tc>
+                <a:tc>
+                  <a:txBody>
+                    <a:bodyPr/>
+                    <a:lstStyle/>
+                    <a:p>
+                      <a:r>
+                        <a:rPr sz="1800" b="0">
+                          <a:solidFill>
+                            <a:srgbClr val="152A27"/>
+                          </a:solidFill>
+                          <a:latin typeface="DejaVu Sans"/>
+                          <a:ea typeface="DejaVu Sans"/>
+                          <a:cs typeface="DejaVu Sans"/>
+                        </a:rPr>
+                        <a:t>At least 2 pairs start a second task within 14 days</a:t>
+                      </a:r>
+                    </a:p>
+                  </a:txBody>
+                  <a:tcPr marL="142875" marR="142875" marT="76200" marB="76200">
+                    <a:solidFill>
+                      <a:srgbClr val="FFFFFF"/>
+                    </a:solidFill>
+                  </a:tcPr>
+                </a:tc>
+                <a:tc>
+                  <a:txBody>
+                    <a:bodyPr/>
+                    <a:lstStyle/>
+                    <a:p>
+                      <a:r>
+                        <a:rPr sz="1800" b="0">
+                          <a:solidFill>
+                            <a:srgbClr val="152A27"/>
+                          </a:solidFill>
+                          <a:latin typeface="DejaVu Sans"/>
+                          <a:ea typeface="DejaVu Sans"/>
+                          <a:cs typeface="DejaVu Sans"/>
+                        </a:rPr>
+                        <a:t>Check whether the product solves a recurring need.</a:t>
+                      </a:r>
+                    </a:p>
+                  </a:txBody>
+                  <a:tcPr marL="142875" marR="142875" marT="76200" marB="76200">
+                    <a:solidFill>
+                      <a:srgbClr val="FFFFFF"/>
+                    </a:solidFill>
+                  </a:tcPr>
+                </a:tc>
+              </a:tr>
+              <a:tr h="785813">
+                <a:tc>
+                  <a:txBody>
+                    <a:bodyPr/>
+                    <a:lstStyle/>
+                    <a:p>
+                      <a:r>
+                        <a:rPr sz="1800" b="0">
+                          <a:solidFill>
+                            <a:srgbClr val="152A27"/>
+                          </a:solidFill>
+                          <a:latin typeface="DejaVu Sans"/>
+                          <a:ea typeface="DejaVu Sans"/>
+                          <a:cs typeface="DejaVu Sans"/>
+                        </a:rPr>
+                        <a:t>VIP interest</a:t>
+                      </a:r>
+                    </a:p>
+                  </a:txBody>
+                  <a:tcPr marL="142875" marR="142875" marT="76200" marB="76200">
+                    <a:solidFill>
+                      <a:srgbClr val="F0F3EE"/>
+                    </a:solidFill>
+                  </a:tcPr>
+                </a:tc>
+                <a:tc>
+                  <a:txBody>
+                    <a:bodyPr/>
+                    <a:lstStyle/>
+                    <a:p>
+                      <a:r>
+                        <a:rPr sz="1800" b="0">
+                          <a:solidFill>
+                            <a:srgbClr val="152A27"/>
+                          </a:solidFill>
+                          <a:latin typeface="DejaVu Sans"/>
+                          <a:ea typeface="DejaVu Sans"/>
+                          <a:cs typeface="DejaVu Sans"/>
+                        </a:rPr>
+                        <a:t>At least 2 repeat-user interviews identify willingness to pay</a:t>
+                      </a:r>
+                    </a:p>
+                  </a:txBody>
+                  <a:tcPr marL="142875" marR="142875" marT="76200" marB="76200">
+                    <a:solidFill>
+                      <a:srgbClr val="F0F3EE"/>
+                    </a:solidFill>
+                  </a:tcPr>
+                </a:tc>
+                <a:tc>
+                  <a:txBody>
+                    <a:bodyPr/>
+                    <a:lstStyle/>
+                    <a:p>
+                      <a:r>
+                        <a:rPr sz="1800" b="0">
+                          <a:solidFill>
+                            <a:srgbClr val="152A27"/>
+                          </a:solidFill>
+                          <a:latin typeface="DejaVu Sans"/>
+                          <a:ea typeface="DejaVu Sans"/>
+                          <a:cs typeface="DejaVu Sans"/>
+                        </a:rPr>
+                        <a:t>Choose a benefit for a pricing test.</a:t>
+                      </a:r>
+                    </a:p>
+                  </a:txBody>
+                  <a:tcPr marL="142875" marR="142875" marT="76200" marB="76200">
+                    <a:solidFill>
+                      <a:srgbClr val="F0F3EE"/>
+                    </a:solidFill>
+                  </a:tcPr>
+                </a:tc>
+              </a:tr>
+            </a:tbl>
+          </a:graphicData>
+        </a:graphic>
+      </p:graphicFrame>
+      <p:sp>
+        <p:nvSpPr>
+          <p:cNvPr id="4" name="">
             <a:extLst xmlns:a="http://schemas.openxmlformats.org/drawingml/2006/main">
               <a:ext uri="{FF2B5EF4-FFF2-40B4-BE49-F238E27FC236}">
-                <a16:creationId xmlns:a16="http://schemas.microsoft.com/office/drawing/2014/main" id="{91A14731-AA36-4A4E-A328-E4307CA0151B}"/>
+                <a16:creationId xmlns:a16="http://schemas.microsoft.com/office/drawing/2014/main" id="{2AC86987-4150-42A6-BFDB-72C3A79ECE63}"/>
               </a:ext>
             </a:extLst>
           </p:cNvPr>
@@ -6565,8 +8704,8 @@
         </p:nvSpPr>
         <p:spPr>
           <a:xfrm xmlns:a="http://schemas.openxmlformats.org/drawingml/2006/main">
-            <a:off x="685800" y="2781300"/>
-            <a:ext cx="4905375" cy="495300"/>
+            <a:off x="628650" y="6115050"/>
+            <a:ext cx="10534650" cy="628650"/>
           </a:xfrm>
           <a:prstGeom xmlns:a="http://schemas.openxmlformats.org/drawingml/2006/main" prst="rect">
             <a:avLst/>
@@ -6583,9 +8722,9 @@
           <a:lstStyle xmlns:a="http://schemas.openxmlformats.org/drawingml/2006/main"/>
           <a:p xmlns:a="http://schemas.openxmlformats.org/drawingml/2006/main">
             <a:pPr>
-              <a:defRPr sz="2250" b="1">
-                <a:solidFill>
-                  <a:srgbClr val="142D31"/>
+              <a:defRPr sz="1350" b="0">
+                <a:solidFill>
+                  <a:srgbClr val="54645E"/>
                 </a:solidFill>
                 <a:latin typeface="DejaVu Sans"/>
                 <a:ea typeface="DejaVu Sans"/>
@@ -6593,243 +8732,15 @@
               </a:defRPr>
             </a:pPr>
             <a:r>
-              <a:rPr sz="2250" b="1">
-                <a:solidFill>
-                  <a:srgbClr val="142D31"/>
+              <a:rPr sz="1350" b="0">
+                <a:solidFill>
+                  <a:srgbClr val="54645E"/>
                 </a:solidFill>
                 <a:latin typeface="DejaVu Sans"/>
                 <a:ea typeface="DejaVu Sans"/>
                 <a:cs typeface="DejaVu Sans"/>
               </a:rPr>
-              <a:t>Immediate proof</a:t>
-            </a:r>
-          </a:p>
-        </p:txBody>
-      </p:sp>
-      <p:sp>
-        <p:nvSpPr>
-          <p:cNvPr id="4" name="">
-            <a:extLst xmlns:a="http://schemas.openxmlformats.org/drawingml/2006/main">
-              <a:ext uri="{FF2B5EF4-FFF2-40B4-BE49-F238E27FC236}">
-                <a16:creationId xmlns:a16="http://schemas.microsoft.com/office/drawing/2014/main" id="{352F237B-F327-430E-AD76-E5DCB679C236}"/>
-              </a:ext>
-            </a:extLst>
-          </p:cNvPr>
-          <p:cNvSpPr>
-            <a:spLocks xmlns:a="http://schemas.openxmlformats.org/drawingml/2006/main" noGrp="1"/>
-          </p:cNvSpPr>
-          <p:nvPr/>
-        </p:nvSpPr>
-        <p:spPr>
-          <a:xfrm xmlns:a="http://schemas.openxmlformats.org/drawingml/2006/main">
-            <a:off x="685800" y="3409950"/>
-            <a:ext cx="4905375" cy="2076450"/>
-          </a:xfrm>
-          <a:prstGeom xmlns:a="http://schemas.openxmlformats.org/drawingml/2006/main" prst="rect">
-            <a:avLst/>
-          </a:prstGeom>
-          <a:noFill xmlns:a="http://schemas.openxmlformats.org/drawingml/2006/main"/>
-          <a:ln xmlns:a="http://schemas.openxmlformats.org/drawingml/2006/main" w="0">
-            <a:noFill/>
-          </a:ln>
-        </p:spPr>
-        <p:txBody>
-          <a:bodyPr xmlns:a="http://schemas.openxmlformats.org/drawingml/2006/main">
-            <a:noAutofit/>
-          </a:bodyPr>
-          <a:lstStyle xmlns:a="http://schemas.openxmlformats.org/drawingml/2006/main"/>
-          <a:p xmlns:a="http://schemas.openxmlformats.org/drawingml/2006/main">
-            <a:pPr>
-              <a:defRPr sz="2175" b="0">
-                <a:solidFill>
-                  <a:srgbClr val="142D31"/>
-                </a:solidFill>
-                <a:latin typeface="DejaVu Sans"/>
-                <a:ea typeface="DejaVu Sans"/>
-                <a:cs typeface="DejaVu Sans"/>
-              </a:defRPr>
-            </a:pPr>
-            <a:r>
-              <a:rPr sz="2175" b="0">
-                <a:solidFill>
-                  <a:srgbClr val="142D31"/>
-                </a:solidFill>
-                <a:latin typeface="DejaVu Sans"/>
-                <a:ea typeface="DejaVu Sans"/>
-                <a:cs typeface="DejaVu Sans"/>
-              </a:rPr>
-              <a:t>Record isolated-wallet invitation, private chat, group messaging and settlement. Retain actual update IDs and visibility results.</a:t>
-            </a:r>
-          </a:p>
-        </p:txBody>
-      </p:sp>
-      <p:sp>
-        <p:nvSpPr>
-          <p:cNvPr id="5" name="">
-            <a:extLst xmlns:a="http://schemas.openxmlformats.org/drawingml/2006/main">
-              <a:ext uri="{FF2B5EF4-FFF2-40B4-BE49-F238E27FC236}">
-                <a16:creationId xmlns:a16="http://schemas.microsoft.com/office/drawing/2014/main" id="{9FB7138E-3190-479A-86A7-48F0E4068F20}"/>
-              </a:ext>
-            </a:extLst>
-          </p:cNvPr>
-          <p:cNvSpPr>
-            <a:spLocks xmlns:a="http://schemas.openxmlformats.org/drawingml/2006/main" noGrp="1"/>
-          </p:cNvSpPr>
-          <p:nvPr/>
-        </p:nvSpPr>
-        <p:spPr>
-          <a:xfrm xmlns:a="http://schemas.openxmlformats.org/drawingml/2006/main">
-            <a:off x="6400800" y="2781300"/>
-            <a:ext cx="4905375" cy="495300"/>
-          </a:xfrm>
-          <a:prstGeom xmlns:a="http://schemas.openxmlformats.org/drawingml/2006/main" prst="rect">
-            <a:avLst/>
-          </a:prstGeom>
-          <a:noFill xmlns:a="http://schemas.openxmlformats.org/drawingml/2006/main"/>
-          <a:ln xmlns:a="http://schemas.openxmlformats.org/drawingml/2006/main" w="0">
-            <a:noFill/>
-          </a:ln>
-        </p:spPr>
-        <p:txBody>
-          <a:bodyPr xmlns:a="http://schemas.openxmlformats.org/drawingml/2006/main">
-            <a:noAutofit/>
-          </a:bodyPr>
-          <a:lstStyle xmlns:a="http://schemas.openxmlformats.org/drawingml/2006/main"/>
-          <a:p xmlns:a="http://schemas.openxmlformats.org/drawingml/2006/main">
-            <a:pPr>
-              <a:defRPr sz="2250" b="1">
-                <a:solidFill>
-                  <a:srgbClr val="142D31"/>
-                </a:solidFill>
-                <a:latin typeface="DejaVu Sans"/>
-                <a:ea typeface="DejaVu Sans"/>
-                <a:cs typeface="DejaVu Sans"/>
-              </a:defRPr>
-            </a:pPr>
-            <a:r>
-              <a:rPr sz="2250" b="1">
-                <a:solidFill>
-                  <a:srgbClr val="142D31"/>
-                </a:solidFill>
-                <a:latin typeface="DejaVu Sans"/>
-                <a:ea typeface="DejaVu Sans"/>
-                <a:cs typeface="DejaVu Sans"/>
-              </a:rPr>
-              <a:t>Expansion gate</a:t>
-            </a:r>
-          </a:p>
-        </p:txBody>
-      </p:sp>
-      <p:sp>
-        <p:nvSpPr>
-          <p:cNvPr id="6" name="">
-            <a:extLst xmlns:a="http://schemas.openxmlformats.org/drawingml/2006/main">
-              <a:ext uri="{FF2B5EF4-FFF2-40B4-BE49-F238E27FC236}">
-                <a16:creationId xmlns:a16="http://schemas.microsoft.com/office/drawing/2014/main" id="{3010196F-E69C-4A72-9660-7864319B2B4A}"/>
-              </a:ext>
-            </a:extLst>
-          </p:cNvPr>
-          <p:cNvSpPr>
-            <a:spLocks xmlns:a="http://schemas.openxmlformats.org/drawingml/2006/main" noGrp="1"/>
-          </p:cNvSpPr>
-          <p:nvPr/>
-        </p:nvSpPr>
-        <p:spPr>
-          <a:xfrm xmlns:a="http://schemas.openxmlformats.org/drawingml/2006/main">
-            <a:off x="6400800" y="3409950"/>
-            <a:ext cx="4905375" cy="2076450"/>
-          </a:xfrm>
-          <a:prstGeom xmlns:a="http://schemas.openxmlformats.org/drawingml/2006/main" prst="rect">
-            <a:avLst/>
-          </a:prstGeom>
-          <a:noFill xmlns:a="http://schemas.openxmlformats.org/drawingml/2006/main"/>
-          <a:ln xmlns:a="http://schemas.openxmlformats.org/drawingml/2006/main" w="0">
-            <a:noFill/>
-          </a:ln>
-        </p:spPr>
-        <p:txBody>
-          <a:bodyPr xmlns:a="http://schemas.openxmlformats.org/drawingml/2006/main">
-            <a:noAutofit/>
-          </a:bodyPr>
-          <a:lstStyle xmlns:a="http://schemas.openxmlformats.org/drawingml/2006/main"/>
-          <a:p xmlns:a="http://schemas.openxmlformats.org/drawingml/2006/main">
-            <a:pPr>
-              <a:defRPr sz="2175" b="0">
-                <a:solidFill>
-                  <a:srgbClr val="142D31"/>
-                </a:solidFill>
-                <a:latin typeface="DejaVu Sans"/>
-                <a:ea typeface="DejaVu Sans"/>
-                <a:cs typeface="DejaVu Sans"/>
-              </a:defRPr>
-            </a:pPr>
-            <a:r>
-              <a:rPr sz="2175" b="0">
-                <a:solidFill>
-                  <a:srgbClr val="142D31"/>
-                </a:solidFill>
-                <a:latin typeface="DejaVu Sans"/>
-                <a:ea typeface="DejaVu Sans"/>
-                <a:cs typeface="DejaVu Sans"/>
-              </a:rPr>
-              <a:t>Resolve reliability failures and define dispute/refund handling. Then add self-service publishing and validate VIP. Multichain comes later.</a:t>
-            </a:r>
-          </a:p>
-        </p:txBody>
-      </p:sp>
-      <p:sp>
-        <p:nvSpPr>
-          <p:cNvPr id="7" name="">
-            <a:extLst xmlns:a="http://schemas.openxmlformats.org/drawingml/2006/main">
-              <a:ext uri="{FF2B5EF4-FFF2-40B4-BE49-F238E27FC236}">
-                <a16:creationId xmlns:a16="http://schemas.microsoft.com/office/drawing/2014/main" id="{53BC84BB-296A-4B7A-B550-37FFF771A6F5}"/>
-              </a:ext>
-            </a:extLst>
-          </p:cNvPr>
-          <p:cNvSpPr>
-            <a:spLocks xmlns:a="http://schemas.openxmlformats.org/drawingml/2006/main" noGrp="1"/>
-          </p:cNvSpPr>
-          <p:nvPr/>
-        </p:nvSpPr>
-        <p:spPr>
-          <a:xfrm xmlns:a="http://schemas.openxmlformats.org/drawingml/2006/main">
-            <a:off x="685800" y="6038850"/>
-            <a:ext cx="10401300" cy="609600"/>
-          </a:xfrm>
-          <a:prstGeom xmlns:a="http://schemas.openxmlformats.org/drawingml/2006/main" prst="rect">
-            <a:avLst/>
-          </a:prstGeom>
-          <a:noFill xmlns:a="http://schemas.openxmlformats.org/drawingml/2006/main"/>
-          <a:ln xmlns:a="http://schemas.openxmlformats.org/drawingml/2006/main" w="0">
-            <a:noFill/>
-          </a:ln>
-        </p:spPr>
-        <p:txBody>
-          <a:bodyPr xmlns:a="http://schemas.openxmlformats.org/drawingml/2006/main">
-            <a:noAutofit/>
-          </a:bodyPr>
-          <a:lstStyle xmlns:a="http://schemas.openxmlformats.org/drawingml/2006/main"/>
-          <a:p xmlns:a="http://schemas.openxmlformats.org/drawingml/2006/main">
-            <a:pPr>
-              <a:defRPr sz="1425" b="0">
-                <a:solidFill>
-                  <a:srgbClr val="52646B"/>
-                </a:solidFill>
-                <a:latin typeface="DejaVu Sans"/>
-                <a:ea typeface="DejaVu Sans"/>
-                <a:cs typeface="DejaVu Sans"/>
-              </a:defRPr>
-            </a:pPr>
-            <a:r>
-              <a:rPr sz="1425" b="0">
-                <a:solidFill>
-                  <a:srgbClr val="52646B"/>
-                </a:solidFill>
-                <a:latin typeface="DejaVu Sans"/>
-                <a:ea typeface="DejaVu Sans"/>
-                <a:cs typeface="DejaVu Sans"/>
-              </a:rPr>
-              <a:t>App: vinss-canton.vercel.app     Repository: github.com/ntfound-dev/Vinss-canton</a:t>
+              <a:t>Targets are proposed, not achieved results. Report raw counts for the 3-5-pair cohort.</a:t>
             </a:r>
           </a:p>
         </p:txBody>
@@ -6837,7 +8748,7 @@
     </p:spTree>
     <p:extLst>
       <p:ext uri="{BB962C8B-B14F-4D97-AF65-F5344CB8AC3E}">
-        <p14:creationId xmlns:p14="http://schemas.microsoft.com/office/powerpoint/2010/main" val="1555193612"/>
+        <p14:creationId xmlns:p14="http://schemas.microsoft.com/office/powerpoint/2010/main" val="293107685"/>
       </p:ext>
     </p:extLst>
   </p:cSld>
